--- a/out/Безопасность_на_Крайнем_Севере.pptx
+++ b/out/Безопасность_на_Крайнем_Севере.pptx
@@ -5219,7 +5219,7 @@
                 <a:latin typeface="Times New Roman" panose="02020603050405020304" pitchFamily="18" charset="0"/>
                 <a:cs typeface="Times New Roman" panose="02020603050405020304" pitchFamily="18" charset="0"/>
               </a:rPr>
-              <a:t>студент группы ___________</a:t>
+              <a:t>студент группы 202</a:t>
             </a:r>
           </a:p>
           <a:p>
@@ -5231,7 +5231,7 @@
                 <a:latin typeface="Times New Roman" panose="02020603050405020304" pitchFamily="18" charset="0"/>
                 <a:cs typeface="Times New Roman" panose="02020603050405020304" pitchFamily="18" charset="0"/>
               </a:rPr>
-              <a:t>_____________________________</a:t>
+              <a:t>Некрасов Егор</a:t>
             </a:r>
           </a:p>
           <a:p>
@@ -5243,7 +5243,7 @@
                 <a:latin typeface="Times New Roman" panose="02020603050405020304" pitchFamily="18" charset="0"/>
                 <a:cs typeface="Times New Roman" panose="02020603050405020304" pitchFamily="18" charset="0"/>
               </a:rPr>
-              <a:t>ФИО</a:t>
+              <a:t/>
             </a:r>
             <a:endParaRPr lang="ru-RU" dirty="0">
               <a:solidFill>

--- a/out/Безопасность_на_Крайнем_Севере.pptx
+++ b/out/Безопасность_на_Крайнем_Севере.pptx
@@ -738,6 +738,916 @@
     </a:lvl9pPr>
   </p:notesStyle>
 </p:notesMaster>
+</file>
+
+<file path=ppt/notesSlides/notesSlide14.xml><?xml version="1.0" encoding="utf-8"?>
+<p:notes xmlns:a="http://schemas.openxmlformats.org/drawingml/2006/main" xmlns:p="http://schemas.openxmlformats.org/presentationml/2006/main" xmlns:r="http://schemas.openxmlformats.org/officeDocument/2006/relationships">
+  <p:cSld>
+    <p:spTree>
+      <p:nvGrpSpPr>
+        <p:cNvPr id="1" name=""/>
+        <p:cNvGrpSpPr/>
+        <p:nvPr/>
+      </p:nvGrpSpPr>
+      <p:grpSpPr>
+        <a:xfrm>
+          <a:off x="0" y="0"/>
+          <a:ext cx="0" cy="0"/>
+          <a:chOff x="0" y="0"/>
+          <a:chExt cx="0" cy="0"/>
+        </a:xfrm>
+      </p:grpSpPr>
+      <p:sp>
+        <p:nvSpPr>
+          <p:cNvPr id="2" name="Slide Image Placeholder 1"/>
+          <p:cNvSpPr>
+            <a:spLocks noGrp="1"/>
+          </p:cNvSpPr>
+          <p:nvPr>
+            <p:ph type="sldImg" idx="2"/>
+          </p:nvPr>
+        </p:nvSpPr>
+        <p:spPr/>
+      </p:sp>
+      <p:sp>
+        <p:nvSpPr>
+          <p:cNvPr id="3" name="Notes Placeholder 2"/>
+          <p:cNvSpPr>
+            <a:spLocks noGrp="1"/>
+          </p:cNvSpPr>
+          <p:nvPr>
+            <p:ph type="body" idx="3" sz="quarter"/>
+          </p:nvPr>
+        </p:nvSpPr>
+        <p:spPr/>
+        <p:txBody>
+          <a:bodyPr/>
+          <a:lstStyle/>
+          <a:p>
+            <a:r>
+              <a:t>Добрый день! Меня зовут Егор Некрасов, группа 202. Тема моего доклада — безопасность в условиях Крайнего Севера. Я расскажу о четырёх главных факторах риска: холоде, полярной ночи, изоляции и специфике одежды, а также покажу плакат: карту зон, многослойную систему одежды и график работ и отдыха при низких температурах.</a:t>
+            </a:r>
+          </a:p>
+        </p:txBody>
+      </p:sp>
+      <p:sp>
+        <p:nvSpPr>
+          <p:cNvPr id="4" name="Slide Number Placeholder 3"/>
+          <p:cNvSpPr>
+            <a:spLocks noGrp="1"/>
+          </p:cNvSpPr>
+          <p:nvPr>
+            <p:ph type="sldNum" idx="5" sz="quarter"/>
+          </p:nvPr>
+        </p:nvSpPr>
+        <p:spPr/>
+      </p:sp>
+    </p:spTree>
+  </p:cSld>
+  <p:clrMapOvr>
+    <a:masterClrMapping/>
+  </p:clrMapOvr>
+</p:notes>
+</file>
+
+<file path=ppt/notesSlides/notesSlide15.xml><?xml version="1.0" encoding="utf-8"?>
+<p:notes xmlns:a="http://schemas.openxmlformats.org/drawingml/2006/main" xmlns:p="http://schemas.openxmlformats.org/presentationml/2006/main" xmlns:r="http://schemas.openxmlformats.org/officeDocument/2006/relationships">
+  <p:cSld>
+    <p:spTree>
+      <p:nvGrpSpPr>
+        <p:cNvPr id="1" name=""/>
+        <p:cNvGrpSpPr/>
+        <p:nvPr/>
+      </p:nvGrpSpPr>
+      <p:grpSpPr>
+        <a:xfrm>
+          <a:off x="0" y="0"/>
+          <a:ext cx="0" cy="0"/>
+          <a:chOff x="0" y="0"/>
+          <a:chExt cx="0" cy="0"/>
+        </a:xfrm>
+      </p:grpSpPr>
+      <p:sp>
+        <p:nvSpPr>
+          <p:cNvPr id="2" name="Slide Image Placeholder 1"/>
+          <p:cNvSpPr>
+            <a:spLocks noGrp="1"/>
+          </p:cNvSpPr>
+          <p:nvPr>
+            <p:ph type="sldImg" idx="2"/>
+          </p:nvPr>
+        </p:nvSpPr>
+        <p:spPr/>
+      </p:sp>
+      <p:sp>
+        <p:nvSpPr>
+          <p:cNvPr id="3" name="Notes Placeholder 2"/>
+          <p:cNvSpPr>
+            <a:spLocks noGrp="1"/>
+          </p:cNvSpPr>
+          <p:nvPr>
+            <p:ph type="body" idx="3" sz="quarter"/>
+          </p:nvPr>
+        </p:nvSpPr>
+        <p:spPr/>
+        <p:txBody>
+          <a:bodyPr/>
+          <a:lstStyle/>
+          <a:p>
+            <a:r>
+              <a:t>Север — это не просто «очень холодно». Это сочетание факторов, которые усиливают друг друга. В Оймяконе зафиксирован минимум −67,7 °C. В Норильске полярная ночь длится около 45 суток. Ветер в 10 метров в секунду превращает −20 °C в ощущаемые примерно −33 °C. А помощь может быть в часах или сутках пути, поэтому при выезде нужен аварийный запас минимум на трое суток. Дальше по плану: карта зон, холод, полярная ночь, изоляция, одежда и график работ.</a:t>
+            </a:r>
+          </a:p>
+        </p:txBody>
+      </p:sp>
+      <p:sp>
+        <p:nvSpPr>
+          <p:cNvPr id="4" name="Slide Number Placeholder 3"/>
+          <p:cNvSpPr>
+            <a:spLocks noGrp="1"/>
+          </p:cNvSpPr>
+          <p:nvPr>
+            <p:ph type="sldNum" idx="5" sz="quarter"/>
+          </p:nvPr>
+        </p:nvSpPr>
+        <p:spPr/>
+      </p:sp>
+    </p:spTree>
+  </p:cSld>
+  <p:clrMapOvr>
+    <a:masterClrMapping/>
+  </p:clrMapOvr>
+</p:notes>
+</file>
+
+<file path=ppt/notesSlides/notesSlide16.xml><?xml version="1.0" encoding="utf-8"?>
+<p:notes xmlns:a="http://schemas.openxmlformats.org/drawingml/2006/main" xmlns:p="http://schemas.openxmlformats.org/presentationml/2006/main" xmlns:r="http://schemas.openxmlformats.org/officeDocument/2006/relationships">
+  <p:cSld>
+    <p:spTree>
+      <p:nvGrpSpPr>
+        <p:cNvPr id="1" name=""/>
+        <p:cNvGrpSpPr/>
+        <p:nvPr/>
+      </p:nvGrpSpPr>
+      <p:grpSpPr>
+        <a:xfrm>
+          <a:off x="0" y="0"/>
+          <a:ext cx="0" cy="0"/>
+          <a:chOff x="0" y="0"/>
+          <a:chExt cx="0" cy="0"/>
+        </a:xfrm>
+      </p:grpSpPr>
+      <p:sp>
+        <p:nvSpPr>
+          <p:cNvPr id="2" name="Slide Image Placeholder 1"/>
+          <p:cNvSpPr>
+            <a:spLocks noGrp="1"/>
+          </p:cNvSpPr>
+          <p:nvPr>
+            <p:ph type="sldImg" idx="2"/>
+          </p:nvPr>
+        </p:nvSpPr>
+        <p:spPr/>
+      </p:sp>
+      <p:sp>
+        <p:nvSpPr>
+          <p:cNvPr id="3" name="Notes Placeholder 2"/>
+          <p:cNvSpPr>
+            <a:spLocks noGrp="1"/>
+          </p:cNvSpPr>
+          <p:nvPr>
+            <p:ph type="body" idx="3" sz="quarter"/>
+          </p:nvPr>
+        </p:nvSpPr>
+        <p:spPr/>
+        <p:txBody>
+          <a:bodyPr/>
+          <a:lstStyle/>
+          <a:p>
+            <a:r>
+              <a:t>Это схема в проекции от Северного полюса: нуль меридиана внизу, Россия справа и сверху. Тёмный центр — Арктика с самыми суровыми условиями: полярная ночь больше ста суток, зимой до −40…−55 °C, пурга. Жёлтое кольцо — территории за Полярным кругом, 66,5° северной широты: там полярная ночь и полярный день. Светлое кольцо — районы Крайнего Севера и приравненные местности. Именно тут, в Якутии, бывает до −60 °C. Для сравнения серым показан умеренный пояс. Важно: это схема по широте. Реальный перечень районов Крайнего Севера задан постановлением Совмина СССР № 1029 и более поздними изменениями, и по нему положены гарантии по Трудовому кодексу. Границы климата зависят ещё от рельефа и удалённости от моря.</a:t>
+            </a:r>
+          </a:p>
+        </p:txBody>
+      </p:sp>
+      <p:sp>
+        <p:nvSpPr>
+          <p:cNvPr id="4" name="Slide Number Placeholder 3"/>
+          <p:cNvSpPr>
+            <a:spLocks noGrp="1"/>
+          </p:cNvSpPr>
+          <p:nvPr>
+            <p:ph type="sldNum" idx="5" sz="quarter"/>
+          </p:nvPr>
+        </p:nvSpPr>
+        <p:spPr/>
+      </p:sp>
+    </p:spTree>
+  </p:cSld>
+  <p:clrMapOvr>
+    <a:masterClrMapping/>
+  </p:clrMapOvr>
+</p:notes>
+</file>
+
+<file path=ppt/notesSlides/notesSlide17.xml><?xml version="1.0" encoding="utf-8"?>
+<p:notes xmlns:a="http://schemas.openxmlformats.org/drawingml/2006/main" xmlns:p="http://schemas.openxmlformats.org/presentationml/2006/main" xmlns:r="http://schemas.openxmlformats.org/officeDocument/2006/relationships">
+  <p:cSld>
+    <p:spTree>
+      <p:nvGrpSpPr>
+        <p:cNvPr id="1" name=""/>
+        <p:cNvGrpSpPr/>
+        <p:nvPr/>
+      </p:nvGrpSpPr>
+      <p:grpSpPr>
+        <a:xfrm>
+          <a:off x="0" y="0"/>
+          <a:ext cx="0" cy="0"/>
+          <a:chOff x="0" y="0"/>
+          <a:chExt cx="0" cy="0"/>
+        </a:xfrm>
+      </p:grpSpPr>
+      <p:sp>
+        <p:nvSpPr>
+          <p:cNvPr id="2" name="Slide Image Placeholder 1"/>
+          <p:cNvSpPr>
+            <a:spLocks noGrp="1"/>
+          </p:cNvSpPr>
+          <p:nvPr>
+            <p:ph type="sldImg" idx="2"/>
+          </p:nvPr>
+        </p:nvSpPr>
+        <p:spPr/>
+      </p:sp>
+      <p:sp>
+        <p:nvSpPr>
+          <p:cNvPr id="3" name="Notes Placeholder 2"/>
+          <p:cNvSpPr>
+            <a:spLocks noGrp="1"/>
+          </p:cNvSpPr>
+          <p:nvPr>
+            <p:ph type="body" idx="3" sz="quarter"/>
+          </p:nvPr>
+        </p:nvSpPr>
+        <p:spPr/>
+        <p:txBody>
+          <a:bodyPr/>
+          <a:lstStyle/>
+          <a:p>
+            <a:r>
+              <a:t>Холод опасен несколькими способами. Первое — переохлаждение: температура тела падает ниже 35 °C, появляются дрожь, апатия и спутанность сознания, потом человек теряет сознание. Второе — отморожения: чаще всего страдают нос, щёки, уши и пальцы, кожа белеет и перестаёт чувствовать. Третье — ветер и метель: ветер резко увеличивает потерю тепла, а в пургу пропадает видимость. Четвёртое — техника и материалы: металл прилипает к коже, сталь и пластик становятся хрупкими, батареи быстро садятся. В таблице справа видно, как ветер меняет ощущения: при −20 °C и ветре 10 м/с ощущается около −34 °C. Когда ощущаемая температура ниже −40 °C, открытая кожа может обморозиться за 10–30 минут.</a:t>
+            </a:r>
+          </a:p>
+        </p:txBody>
+      </p:sp>
+      <p:sp>
+        <p:nvSpPr>
+          <p:cNvPr id="4" name="Slide Number Placeholder 3"/>
+          <p:cNvSpPr>
+            <a:spLocks noGrp="1"/>
+          </p:cNvSpPr>
+          <p:nvPr>
+            <p:ph type="sldNum" idx="5" sz="quarter"/>
+          </p:nvPr>
+        </p:nvSpPr>
+        <p:spPr/>
+      </p:sp>
+    </p:spTree>
+  </p:cSld>
+  <p:clrMapOvr>
+    <a:masterClrMapping/>
+  </p:clrMapOvr>
+</p:notes>
+</file>
+
+<file path=ppt/notesSlides/notesSlide18.xml><?xml version="1.0" encoding="utf-8"?>
+<p:notes xmlns:a="http://schemas.openxmlformats.org/drawingml/2006/main" xmlns:p="http://schemas.openxmlformats.org/presentationml/2006/main" xmlns:r="http://schemas.openxmlformats.org/officeDocument/2006/relationships">
+  <p:cSld>
+    <p:spTree>
+      <p:nvGrpSpPr>
+        <p:cNvPr id="1" name=""/>
+        <p:cNvGrpSpPr/>
+        <p:nvPr/>
+      </p:nvGrpSpPr>
+      <p:grpSpPr>
+        <a:xfrm>
+          <a:off x="0" y="0"/>
+          <a:ext cx="0" cy="0"/>
+          <a:chOff x="0" y="0"/>
+          <a:chExt cx="0" cy="0"/>
+        </a:xfrm>
+      </p:grpSpPr>
+      <p:sp>
+        <p:nvSpPr>
+          <p:cNvPr id="2" name="Slide Image Placeholder 1"/>
+          <p:cNvSpPr>
+            <a:spLocks noGrp="1"/>
+          </p:cNvSpPr>
+          <p:nvPr>
+            <p:ph type="sldImg" idx="2"/>
+          </p:nvPr>
+        </p:nvSpPr>
+        <p:spPr/>
+      </p:sp>
+      <p:sp>
+        <p:nvSpPr>
+          <p:cNvPr id="3" name="Notes Placeholder 2"/>
+          <p:cNvSpPr>
+            <a:spLocks noGrp="1"/>
+          </p:cNvSpPr>
+          <p:nvPr>
+            <p:ph type="body" idx="3" sz="quarter"/>
+          </p:nvPr>
+        </p:nvSpPr>
+        <p:spPr/>
+        <p:txBody>
+          <a:bodyPr/>
+          <a:lstStyle/>
+          <a:p>
+            <a:r>
+              <a:t>Полярная ночь — это период, когда солнце не поднимается над горизонтом. В Мурманске она длится около 40 суток, в Норильске около 45, в Диксоне около 80, а на арктических островах может превышать 100. Опасность в том, что сбивается суточный ритм: человек сонлив, внимание падает. В темноте растёт число травм, падений и аварий, легко потерять ориентацию, особенно в пургу. Возможна сезонная депрессия и раздражительность. Что делать: иметь налобный фонарь и держать запасные батареи в тепле, использовать светоотражающие элементы и вешки на маршруте, соблюдать режим сна, обеспечить яркий свет в помещении. Витамин D и светотерапию применяют только по рекомендации врача.</a:t>
+            </a:r>
+          </a:p>
+        </p:txBody>
+      </p:sp>
+      <p:sp>
+        <p:nvSpPr>
+          <p:cNvPr id="4" name="Slide Number Placeholder 3"/>
+          <p:cNvSpPr>
+            <a:spLocks noGrp="1"/>
+          </p:cNvSpPr>
+          <p:nvPr>
+            <p:ph type="sldNum" idx="5" sz="quarter"/>
+          </p:nvPr>
+        </p:nvSpPr>
+        <p:spPr/>
+      </p:sp>
+    </p:spTree>
+  </p:cSld>
+  <p:clrMapOvr>
+    <a:masterClrMapping/>
+  </p:clrMapOvr>
+</p:notes>
+</file>
+
+<file path=ppt/notesSlides/notesSlide19.xml><?xml version="1.0" encoding="utf-8"?>
+<p:notes xmlns:a="http://schemas.openxmlformats.org/drawingml/2006/main" xmlns:p="http://schemas.openxmlformats.org/presentationml/2006/main" xmlns:r="http://schemas.openxmlformats.org/officeDocument/2006/relationships">
+  <p:cSld>
+    <p:spTree>
+      <p:nvGrpSpPr>
+        <p:cNvPr id="1" name=""/>
+        <p:cNvGrpSpPr/>
+        <p:nvPr/>
+      </p:nvGrpSpPr>
+      <p:grpSpPr>
+        <a:xfrm>
+          <a:off x="0" y="0"/>
+          <a:ext cx="0" cy="0"/>
+          <a:chOff x="0" y="0"/>
+          <a:chExt cx="0" cy="0"/>
+        </a:xfrm>
+      </p:grpSpPr>
+      <p:sp>
+        <p:nvSpPr>
+          <p:cNvPr id="2" name="Slide Image Placeholder 1"/>
+          <p:cNvSpPr>
+            <a:spLocks noGrp="1"/>
+          </p:cNvSpPr>
+          <p:nvPr>
+            <p:ph type="sldImg" idx="2"/>
+          </p:nvPr>
+        </p:nvSpPr>
+        <p:spPr/>
+      </p:sp>
+      <p:sp>
+        <p:nvSpPr>
+          <p:cNvPr id="3" name="Notes Placeholder 2"/>
+          <p:cNvSpPr>
+            <a:spLocks noGrp="1"/>
+          </p:cNvSpPr>
+          <p:nvPr>
+            <p:ph type="body" idx="3" sz="quarter"/>
+          </p:nvPr>
+        </p:nvSpPr>
+        <p:spPr/>
+        <p:txBody>
+          <a:bodyPr/>
+          <a:lstStyle/>
+          <a:p>
+            <a:r>
+              <a:t>Изоляция — это удалённость от помощи и от привычной жизни. Риски: рядом нет врача и спасателей, помощь идёт часами и сутками; нет сотовой связи, нужны рация и спутниковый телефон; в небольшой группе из-за тесноты, усталости и однообразия возникают конфликты; нарушается сон. Меры: правило «не один» — выезды и работа минимум вдвоём; план маршрута сдаётся диспетчеру, и связь идёт по графику; автономный запас еды, топлива и тепла и аптечка минимум на 72 часа; режим дня, распределение обязанностей и общение внутри группы. Главное правило: никто не выходит в одиночку, без связи и без сообщённого маршрута.</a:t>
+            </a:r>
+          </a:p>
+        </p:txBody>
+      </p:sp>
+      <p:sp>
+        <p:nvSpPr>
+          <p:cNvPr id="4" name="Slide Number Placeholder 3"/>
+          <p:cNvSpPr>
+            <a:spLocks noGrp="1"/>
+          </p:cNvSpPr>
+          <p:nvPr>
+            <p:ph type="sldNum" idx="5" sz="quarter"/>
+          </p:nvPr>
+        </p:nvSpPr>
+        <p:spPr/>
+      </p:sp>
+    </p:spTree>
+  </p:cSld>
+  <p:clrMapOvr>
+    <a:masterClrMapping/>
+  </p:clrMapOvr>
+</p:notes>
+</file>
+
+<file path=ppt/notesSlides/notesSlide20.xml><?xml version="1.0" encoding="utf-8"?>
+<p:notes xmlns:a="http://schemas.openxmlformats.org/drawingml/2006/main" xmlns:p="http://schemas.openxmlformats.org/presentationml/2006/main" xmlns:r="http://schemas.openxmlformats.org/officeDocument/2006/relationships">
+  <p:cSld>
+    <p:spTree>
+      <p:nvGrpSpPr>
+        <p:cNvPr id="1" name=""/>
+        <p:cNvGrpSpPr/>
+        <p:nvPr/>
+      </p:nvGrpSpPr>
+      <p:grpSpPr>
+        <a:xfrm>
+          <a:off x="0" y="0"/>
+          <a:ext cx="0" cy="0"/>
+          <a:chOff x="0" y="0"/>
+          <a:chExt cx="0" cy="0"/>
+        </a:xfrm>
+      </p:grpSpPr>
+      <p:sp>
+        <p:nvSpPr>
+          <p:cNvPr id="2" name="Slide Image Placeholder 1"/>
+          <p:cNvSpPr>
+            <a:spLocks noGrp="1"/>
+          </p:cNvSpPr>
+          <p:nvPr>
+            <p:ph type="sldImg" idx="2"/>
+          </p:nvPr>
+        </p:nvSpPr>
+        <p:spPr/>
+      </p:sp>
+      <p:sp>
+        <p:nvSpPr>
+          <p:cNvPr id="3" name="Notes Placeholder 2"/>
+          <p:cNvSpPr>
+            <a:spLocks noGrp="1"/>
+          </p:cNvSpPr>
+          <p:nvPr>
+            <p:ph type="body" idx="3" sz="quarter"/>
+          </p:nvPr>
+        </p:nvSpPr>
+        <p:spPr/>
+        <p:txBody>
+          <a:bodyPr/>
+          <a:lstStyle/>
+          <a:p>
+            <a:r>
+              <a:t>Основа защиты от холода — три слоя. Первый, базовый, отводит пот от кожи: синтетика или тонкая мериносовая шерсть плотно к телу. Хлопок не подходит: мокрый, он остывает. Второй слой утепляет, задерживая воздух: флис, шерсть, пух, синтетический утеплитель. Слоёв может быть несколько, но одежда не должна пережимать, потому что тепло — это воздух. Третий слой защищает от ветра и влаги: парка или комбинезон с капюшоном, регулируемыми манжетами и поясом. Важна вентиляция через молнии, чтобы не вспотеть. Лучше немного расстегнуться, чем намокнуть: мокрая одежда в мороз опаснее лёгкого озноба.</a:t>
+            </a:r>
+          </a:p>
+        </p:txBody>
+      </p:sp>
+      <p:sp>
+        <p:nvSpPr>
+          <p:cNvPr id="4" name="Slide Number Placeholder 3"/>
+          <p:cNvSpPr>
+            <a:spLocks noGrp="1"/>
+          </p:cNvSpPr>
+          <p:nvPr>
+            <p:ph type="sldNum" idx="5" sz="quarter"/>
+          </p:nvPr>
+        </p:nvSpPr>
+        <p:spPr/>
+      </p:sp>
+    </p:spTree>
+  </p:cSld>
+  <p:clrMapOvr>
+    <a:masterClrMapping/>
+  </p:clrMapOvr>
+</p:notes>
+</file>
+
+<file path=ppt/notesSlides/notesSlide21.xml><?xml version="1.0" encoding="utf-8"?>
+<p:notes xmlns:a="http://schemas.openxmlformats.org/drawingml/2006/main" xmlns:p="http://schemas.openxmlformats.org/presentationml/2006/main" xmlns:r="http://schemas.openxmlformats.org/officeDocument/2006/relationships">
+  <p:cSld>
+    <p:spTree>
+      <p:nvGrpSpPr>
+        <p:cNvPr id="1" name=""/>
+        <p:cNvGrpSpPr/>
+        <p:nvPr/>
+      </p:nvGrpSpPr>
+      <p:grpSpPr>
+        <a:xfrm>
+          <a:off x="0" y="0"/>
+          <a:ext cx="0" cy="0"/>
+          <a:chOff x="0" y="0"/>
+          <a:chExt cx="0" cy="0"/>
+        </a:xfrm>
+      </p:grpSpPr>
+      <p:sp>
+        <p:nvSpPr>
+          <p:cNvPr id="2" name="Slide Image Placeholder 1"/>
+          <p:cNvSpPr>
+            <a:spLocks noGrp="1"/>
+          </p:cNvSpPr>
+          <p:nvPr>
+            <p:ph type="sldImg" idx="2"/>
+          </p:nvPr>
+        </p:nvSpPr>
+        <p:spPr/>
+      </p:sp>
+      <p:sp>
+        <p:nvSpPr>
+          <p:cNvPr id="3" name="Notes Placeholder 2"/>
+          <p:cNvSpPr>
+            <a:spLocks noGrp="1"/>
+          </p:cNvSpPr>
+          <p:nvPr>
+            <p:ph type="body" idx="3" sz="quarter"/>
+          </p:nvPr>
+        </p:nvSpPr>
+        <p:spPr/>
+        <p:txBody>
+          <a:bodyPr/>
+          <a:lstStyle/>
+          <a:p>
+            <a:r>
+              <a:t>Теперь о специфике северной одежды. Голова и лицо: шапка с ветрозащитой или балаклава, капюшон с меховой оторочкой, она не обмерзает от дыхания, тёмные очки от снежной слепоты. Не оставлять уши открытыми. Руки: рукавицы тёплее перчаток, внутри тонкие перчатки-вкладыши, запасная пара обязательна. Нельзя трогать голой рукой металл. Ноги: обувь на 1–1,5 размера больше, тёплые стельки, две пары носков, не сдавливающих ногу. Тесная и влажная обувь ведёт к отморожению. Корпус: свободный крой, регулировка манжет, пояса и капюшона; джинсы и хлопок на морозе не подходят. И главное правило пота: раньше расстёгиваться, чем вспотеть.</a:t>
+            </a:r>
+          </a:p>
+        </p:txBody>
+      </p:sp>
+      <p:sp>
+        <p:nvSpPr>
+          <p:cNvPr id="4" name="Slide Number Placeholder 3"/>
+          <p:cNvSpPr>
+            <a:spLocks noGrp="1"/>
+          </p:cNvSpPr>
+          <p:nvPr>
+            <p:ph type="sldNum" idx="5" sz="quarter"/>
+          </p:nvPr>
+        </p:nvSpPr>
+        <p:spPr/>
+      </p:sp>
+    </p:spTree>
+  </p:cSld>
+  <p:clrMapOvr>
+    <a:masterClrMapping/>
+  </p:clrMapOvr>
+</p:notes>
+</file>
+
+<file path=ppt/notesSlides/notesSlide22.xml><?xml version="1.0" encoding="utf-8"?>
+<p:notes xmlns:a="http://schemas.openxmlformats.org/drawingml/2006/main" xmlns:p="http://schemas.openxmlformats.org/presentationml/2006/main" xmlns:r="http://schemas.openxmlformats.org/officeDocument/2006/relationships">
+  <p:cSld>
+    <p:spTree>
+      <p:nvGrpSpPr>
+        <p:cNvPr id="1" name=""/>
+        <p:cNvGrpSpPr/>
+        <p:nvPr/>
+      </p:nvGrpSpPr>
+      <p:grpSpPr>
+        <a:xfrm>
+          <a:off x="0" y="0"/>
+          <a:ext cx="0" cy="0"/>
+          <a:chOff x="0" y="0"/>
+          <a:chExt cx="0" cy="0"/>
+        </a:xfrm>
+      </p:grpSpPr>
+      <p:sp>
+        <p:nvSpPr>
+          <p:cNvPr id="2" name="Slide Image Placeholder 1"/>
+          <p:cNvSpPr>
+            <a:spLocks noGrp="1"/>
+          </p:cNvSpPr>
+          <p:nvPr>
+            <p:ph type="sldImg" idx="2"/>
+          </p:nvPr>
+        </p:nvSpPr>
+        <p:spPr/>
+      </p:sp>
+      <p:sp>
+        <p:nvSpPr>
+          <p:cNvPr id="3" name="Notes Placeholder 2"/>
+          <p:cNvSpPr>
+            <a:spLocks noGrp="1"/>
+          </p:cNvSpPr>
+          <p:nvPr>
+            <p:ph type="body" idx="3" sz="quarter"/>
+          </p:nvPr>
+        </p:nvSpPr>
+        <p:spPr/>
+        <p:txBody>
+          <a:bodyPr/>
+          <a:lstStyle/>
+          <a:p>
+            <a:r>
+              <a:t>Это ориентировочный график. При температуре от 0 до −10 °C можно работать около двух часов подряд и греться около 10 минут. От −10 до −20: 90 минут работы и 15 минут обогрева. От −20 до −30: час работы и 15 минут обогрева. От −30 до −40: 45 минут и 20 минут. От −40 до −50: около 30 минут работы и 20 минут в тепле. Ниже −50 °C открытые работы прекращают, кроме аварийных. Ниже −30 °C работают парами и следят друг за другом: лицо и руки. Если ветер 10 м/с и больше, температуру считают на ступень ниже. Тёплое помещение должно быть +21…+25 °C, с горячим питьём и сушкой одежды. Внизу пример смены при −30…−40 °C: четыре блока по 45 минут, между ними обогрев, а посередине час обеда в тепле. Точные режимы определяет МР 2.2.7.2129-06 и локальные акты предприятия.</a:t>
+            </a:r>
+          </a:p>
+        </p:txBody>
+      </p:sp>
+      <p:sp>
+        <p:nvSpPr>
+          <p:cNvPr id="4" name="Slide Number Placeholder 3"/>
+          <p:cNvSpPr>
+            <a:spLocks noGrp="1"/>
+          </p:cNvSpPr>
+          <p:nvPr>
+            <p:ph type="sldNum" idx="5" sz="quarter"/>
+          </p:nvPr>
+        </p:nvSpPr>
+        <p:spPr/>
+      </p:sp>
+    </p:spTree>
+  </p:cSld>
+  <p:clrMapOvr>
+    <a:masterClrMapping/>
+  </p:clrMapOvr>
+</p:notes>
+</file>
+
+<file path=ppt/notesSlides/notesSlide23.xml><?xml version="1.0" encoding="utf-8"?>
+<p:notes xmlns:a="http://schemas.openxmlformats.org/drawingml/2006/main" xmlns:p="http://schemas.openxmlformats.org/presentationml/2006/main" xmlns:r="http://schemas.openxmlformats.org/officeDocument/2006/relationships">
+  <p:cSld>
+    <p:spTree>
+      <p:nvGrpSpPr>
+        <p:cNvPr id="1" name=""/>
+        <p:cNvGrpSpPr/>
+        <p:nvPr/>
+      </p:nvGrpSpPr>
+      <p:grpSpPr>
+        <a:xfrm>
+          <a:off x="0" y="0"/>
+          <a:ext cx="0" cy="0"/>
+          <a:chOff x="0" y="0"/>
+          <a:chExt cx="0" cy="0"/>
+        </a:xfrm>
+      </p:grpSpPr>
+      <p:sp>
+        <p:nvSpPr>
+          <p:cNvPr id="2" name="Slide Image Placeholder 1"/>
+          <p:cNvSpPr>
+            <a:spLocks noGrp="1"/>
+          </p:cNvSpPr>
+          <p:nvPr>
+            <p:ph type="sldImg" idx="2"/>
+          </p:nvPr>
+        </p:nvSpPr>
+        <p:spPr/>
+      </p:sp>
+      <p:sp>
+        <p:nvSpPr>
+          <p:cNvPr id="3" name="Notes Placeholder 2"/>
+          <p:cNvSpPr>
+            <a:spLocks noGrp="1"/>
+          </p:cNvSpPr>
+          <p:nvPr>
+            <p:ph type="body" idx="3" sz="quarter"/>
+          </p:nvPr>
+        </p:nvSpPr>
+        <p:spPr/>
+        <p:txBody>
+          <a:bodyPr/>
+          <a:lstStyle/>
+          <a:p>
+            <a:r>
+              <a:t>Плакат собирает главное на одном слайде. Слева карта зон с типичными зимними температурами: около −55 °C в Арктике, −45 за Полярным кругом и до −60 в Якутии. В центре три слоя одежды: база, тепло, защита, и правило «сухо, свободно, слоями, без хлопка». Справа таблица режима работы и обогрева в минутах по диапазонам температур. Внизу девиз плаката: сухо, слоями, парами, по графику, на связи.</a:t>
+            </a:r>
+          </a:p>
+        </p:txBody>
+      </p:sp>
+      <p:sp>
+        <p:nvSpPr>
+          <p:cNvPr id="4" name="Slide Number Placeholder 3"/>
+          <p:cNvSpPr>
+            <a:spLocks noGrp="1"/>
+          </p:cNvSpPr>
+          <p:nvPr>
+            <p:ph type="sldNum" idx="5" sz="quarter"/>
+          </p:nvPr>
+        </p:nvSpPr>
+        <p:spPr/>
+      </p:sp>
+    </p:spTree>
+  </p:cSld>
+  <p:clrMapOvr>
+    <a:masterClrMapping/>
+  </p:clrMapOvr>
+</p:notes>
+</file>
+
+<file path=ppt/notesSlides/notesSlide24.xml><?xml version="1.0" encoding="utf-8"?>
+<p:notes xmlns:a="http://schemas.openxmlformats.org/drawingml/2006/main" xmlns:p="http://schemas.openxmlformats.org/presentationml/2006/main" xmlns:r="http://schemas.openxmlformats.org/officeDocument/2006/relationships">
+  <p:cSld>
+    <p:spTree>
+      <p:nvGrpSpPr>
+        <p:cNvPr id="1" name=""/>
+        <p:cNvGrpSpPr/>
+        <p:nvPr/>
+      </p:nvGrpSpPr>
+      <p:grpSpPr>
+        <a:xfrm>
+          <a:off x="0" y="0"/>
+          <a:ext cx="0" cy="0"/>
+          <a:chOff x="0" y="0"/>
+          <a:chExt cx="0" cy="0"/>
+        </a:xfrm>
+      </p:grpSpPr>
+      <p:sp>
+        <p:nvSpPr>
+          <p:cNvPr id="2" name="Slide Image Placeholder 1"/>
+          <p:cNvSpPr>
+            <a:spLocks noGrp="1"/>
+          </p:cNvSpPr>
+          <p:nvPr>
+            <p:ph type="sldImg" idx="2"/>
+          </p:nvPr>
+        </p:nvSpPr>
+        <p:spPr/>
+      </p:sp>
+      <p:sp>
+        <p:nvSpPr>
+          <p:cNvPr id="3" name="Notes Placeholder 2"/>
+          <p:cNvSpPr>
+            <a:spLocks noGrp="1"/>
+          </p:cNvSpPr>
+          <p:nvPr>
+            <p:ph type="body" idx="3" sz="quarter"/>
+          </p:nvPr>
+        </p:nvSpPr>
+        <p:spPr/>
+        <p:txBody>
+          <a:bodyPr/>
+          <a:lstStyle/>
+          <a:p>
+            <a:r>
+              <a:t>Первая помощь. При переохлаждении: отвести в тепло, снять мокрую одежду, укутать, дать тёплое сладкое питьё, если человек в сознании. Алкоголь не давать и не растирать. Если сознание нарушено — срочно вызывать помощь. При отморожении: уйти в тепло, снять кольца и тесную обувь, не растирать снегом и не греть у огня, согреть тёплой, но не горячей водой, наложить сухую повязку. Обязательно показать врачу, даже если боль прошла. Номер вызова помощи — 112. Не оставляйте пострадавшего одного и сообщите точное место и время холодового воздействия.</a:t>
+            </a:r>
+          </a:p>
+        </p:txBody>
+      </p:sp>
+      <p:sp>
+        <p:nvSpPr>
+          <p:cNvPr id="4" name="Slide Number Placeholder 3"/>
+          <p:cNvSpPr>
+            <a:spLocks noGrp="1"/>
+          </p:cNvSpPr>
+          <p:nvPr>
+            <p:ph type="sldNum" idx="5" sz="quarter"/>
+          </p:nvPr>
+        </p:nvSpPr>
+        <p:spPr/>
+      </p:sp>
+    </p:spTree>
+  </p:cSld>
+  <p:clrMapOvr>
+    <a:masterClrMapping/>
+  </p:clrMapOvr>
+</p:notes>
+</file>
+
+<file path=ppt/notesSlides/notesSlide25.xml><?xml version="1.0" encoding="utf-8"?>
+<p:notes xmlns:a="http://schemas.openxmlformats.org/drawingml/2006/main" xmlns:p="http://schemas.openxmlformats.org/presentationml/2006/main" xmlns:r="http://schemas.openxmlformats.org/officeDocument/2006/relationships">
+  <p:cSld>
+    <p:spTree>
+      <p:nvGrpSpPr>
+        <p:cNvPr id="1" name=""/>
+        <p:cNvGrpSpPr/>
+        <p:nvPr/>
+      </p:nvGrpSpPr>
+      <p:grpSpPr>
+        <a:xfrm>
+          <a:off x="0" y="0"/>
+          <a:ext cx="0" cy="0"/>
+          <a:chOff x="0" y="0"/>
+          <a:chExt cx="0" cy="0"/>
+        </a:xfrm>
+      </p:grpSpPr>
+      <p:sp>
+        <p:nvSpPr>
+          <p:cNvPr id="2" name="Slide Image Placeholder 1"/>
+          <p:cNvSpPr>
+            <a:spLocks noGrp="1"/>
+          </p:cNvSpPr>
+          <p:nvPr>
+            <p:ph type="sldImg" idx="2"/>
+          </p:nvPr>
+        </p:nvSpPr>
+        <p:spPr/>
+      </p:sp>
+      <p:sp>
+        <p:nvSpPr>
+          <p:cNvPr id="3" name="Notes Placeholder 2"/>
+          <p:cNvSpPr>
+            <a:spLocks noGrp="1"/>
+          </p:cNvSpPr>
+          <p:nvPr>
+            <p:ph type="body" idx="3" sz="quarter"/>
+          </p:nvPr>
+        </p:nvSpPr>
+        <p:spPr/>
+        <p:txBody>
+          <a:bodyPr/>
+          <a:lstStyle/>
+          <a:p>
+            <a:r>
+              <a:t>Подведу итоги. Первое: знайте свою зону, от неё зависят холод, полярная ночь и нормы труда. Второе: холод вместе с ветром опаснее, чем показывает термометр. Третье: одевайтесь слоями и держите тело сухим. Четвёртое: работайте по графику с обогревом и в паре. Пятое: в полярную ночь и в изоляции заботьтесь о свете, режиме, связи и запасе. Север не прощает ошибок, поэтому готовиться нужно заранее. Спасибо за внимание!</a:t>
+            </a:r>
+          </a:p>
+        </p:txBody>
+      </p:sp>
+      <p:sp>
+        <p:nvSpPr>
+          <p:cNvPr id="4" name="Slide Number Placeholder 3"/>
+          <p:cNvSpPr>
+            <a:spLocks noGrp="1"/>
+          </p:cNvSpPr>
+          <p:nvPr>
+            <p:ph type="sldNum" idx="5" sz="quarter"/>
+          </p:nvPr>
+        </p:nvSpPr>
+        <p:spPr/>
+      </p:sp>
+    </p:spTree>
+  </p:cSld>
+  <p:clrMapOvr>
+    <a:masterClrMapping/>
+  </p:clrMapOvr>
+</p:notes>
+</file>
+
+<file path=ppt/notesSlides/notesSlide26.xml><?xml version="1.0" encoding="utf-8"?>
+<p:notes xmlns:a="http://schemas.openxmlformats.org/drawingml/2006/main" xmlns:p="http://schemas.openxmlformats.org/presentationml/2006/main" xmlns:r="http://schemas.openxmlformats.org/officeDocument/2006/relationships">
+  <p:cSld>
+    <p:spTree>
+      <p:nvGrpSpPr>
+        <p:cNvPr id="1" name=""/>
+        <p:cNvGrpSpPr/>
+        <p:nvPr/>
+      </p:nvGrpSpPr>
+      <p:grpSpPr>
+        <a:xfrm>
+          <a:off x="0" y="0"/>
+          <a:ext cx="0" cy="0"/>
+          <a:chOff x="0" y="0"/>
+          <a:chExt cx="0" cy="0"/>
+        </a:xfrm>
+      </p:grpSpPr>
+      <p:sp>
+        <p:nvSpPr>
+          <p:cNvPr id="2" name="Slide Image Placeholder 1"/>
+          <p:cNvSpPr>
+            <a:spLocks noGrp="1"/>
+          </p:cNvSpPr>
+          <p:nvPr>
+            <p:ph type="sldImg" idx="2"/>
+          </p:nvPr>
+        </p:nvSpPr>
+        <p:spPr/>
+      </p:sp>
+      <p:sp>
+        <p:nvSpPr>
+          <p:cNvPr id="3" name="Notes Placeholder 2"/>
+          <p:cNvSpPr>
+            <a:spLocks noGrp="1"/>
+          </p:cNvSpPr>
+          <p:nvPr>
+            <p:ph type="body" idx="3" sz="quarter"/>
+          </p:nvPr>
+        </p:nvSpPr>
+        <p:spPr/>
+        <p:txBody>
+          <a:bodyPr/>
+          <a:lstStyle/>
+          <a:p>
+            <a:r>
+              <a:t>При подготовке я опирался на Трудовой кодекс, МР 2.2.7.2129-06 о режимах труда на холоде, перечень районов Крайнего Севера, индекс ветро-холодового охлаждения и данные Росгидромета. Числовые режимы на плакате ориентировочные, перед применением их нужно сверять с действующими нормами.</a:t>
+            </a:r>
+          </a:p>
+        </p:txBody>
+      </p:sp>
+      <p:sp>
+        <p:nvSpPr>
+          <p:cNvPr id="4" name="Slide Number Placeholder 3"/>
+          <p:cNvSpPr>
+            <a:spLocks noGrp="1"/>
+          </p:cNvSpPr>
+          <p:nvPr>
+            <p:ph type="sldNum" idx="5" sz="quarter"/>
+          </p:nvPr>
+        </p:nvSpPr>
+        <p:spPr/>
+      </p:sp>
+    </p:spTree>
+  </p:cSld>
+  <p:clrMapOvr>
+    <a:masterClrMapping/>
+  </p:clrMapOvr>
+</p:notes>
 </file>
 
 <file path=ppt/slideLayouts/slideLayout1.xml><?xml version="1.0" encoding="utf-8"?>

--- a/out/Безопасность_на_Крайнем_Севере.pptx
+++ b/out/Безопасность_на_Крайнем_Севере.pptx
@@ -927,7 +927,7 @@
           <a:lstStyle/>
           <a:p>
             <a:r>
-              <a:t>Это схема в проекции от Северного полюса: нуль меридиана внизу, Россия справа и сверху. Тёмный центр — Арктика с самыми суровыми условиями: полярная ночь больше ста суток, зимой до −40…−55 °C, пурга. Жёлтое кольцо — территории за Полярным кругом, 66,5° северной широты: там полярная ночь и полярный день. Светлое кольцо — районы Крайнего Севера и приравненные местности. Именно тут, в Якутии, бывает до −60 °C. Для сравнения серым показан умеренный пояс. Важно: это схема по широте. Реальный перечень районов Крайнего Севера задан постановлением Совмина СССР № 1029 и более поздними изменениями, и по нему положены гарантии по Трудовому кодексу. Границы климата зависят ещё от рельефа и удалённости от моря.</a:t>
+              <a:t>На слайде четыре зоны с севера на юг. Арктика: острова и побережье севернее 70-й параллели, зимой −40…−55 °C, полярная ночь 80–120 и более суток. За Полярным кругом, начиная с 66,5° северной широты: Мурманск, Воркута, Норильск, там ночь до 45 суток и полярный день летом. Районы Крайнего Севера, например Якутия и Чукотка, самые холодные: до −50…−67 °C. Приравненные местности расположены южнее, но зима там тоже долгая. Реальный перечень районов Крайнего Севера задан постановлением Совмина СССР № 1029 и более поздними изменениями, и по нему положены гарантии по Трудовому кодексу. Границы климата зависят ещё от рельефа и удалённости от моря.</a:t>
             </a:r>
           </a:p>
         </p:txBody>
@@ -1067,7 +1067,7 @@
           <a:lstStyle/>
           <a:p>
             <a:r>
-              <a:t>Полярная ночь — это период, когда солнце не поднимается над горизонтом. В Мурманске она длится около 40 суток, в Норильске около 45, в Диксоне около 80, а на арктических островах может превышать 100. Опасность в том, что сбивается суточный ритм: человек сонлив, внимание падает. В темноте растёт число травм, падений и аварий, легко потерять ориентацию, особенно в пургу. Возможна сезонная депрессия и раздражительность. Что делать: иметь налобный фонарь и держать запасные батареи в тепле, использовать светоотражающие элементы и вешки на маршруте, соблюдать режим сна, обеспечить яркий свет в помещении. Витамин D и светотерапию применяют только по рекомендации врача.</a:t>
+              <a:t>Полярная ночь — это период, когда солнце не поднимается над горизонтом. В таблице видно: в Мурманске она длится около 40 суток, в Норильске около 45, в Диксоне около 80, а на арктических островах может превышать 100. Опасность в том, что сбивается суточный ритм: человек сонлив, внимание падает. В темноте растёт число травм, падений и аварий, легко потерять ориентацию, особенно в пургу. Возможна сезонная депрессия и раздражительность. Что делать: иметь налобный фонарь и держать запасные батареи в тепле, использовать светоотражающие элементы и вешки на маршруте, соблюдать режим сна, обеспечить яркий свет в помещении. Витамин D и светотерапию применяют только по рекомендации врача.</a:t>
             </a:r>
           </a:p>
         </p:txBody>
@@ -1207,7 +1207,7 @@
           <a:lstStyle/>
           <a:p>
             <a:r>
-              <a:t>Основа защиты от холода — три слоя. Первый, базовый, отводит пот от кожи: синтетика или тонкая мериносовая шерсть плотно к телу. Хлопок не подходит: мокрый, он остывает. Второй слой утепляет, задерживая воздух: флис, шерсть, пух, синтетический утеплитель. Слоёв может быть несколько, но одежда не должна пережимать, потому что тепло — это воздух. Третий слой защищает от ветра и влаги: парка или комбинезон с капюшоном, регулируемыми манжетами и поясом. Важна вентиляция через молнии, чтобы не вспотеть. Лучше немного расстегнуться, чем намокнуть: мокрая одежда в мороз опаснее лёгкого озноба.</a:t>
+              <a:t>Основа защиты от холода — три слоя. Каждый слой я разобрал в отдельной колонке: задача, материалы и чего не допускать. Первый, базовый, отводит пот от кожи: синтетика или тонкая мериносовая шерсть плотно к телу. Хлопок не подходит: мокрый, он остывает. Второй слой утепляет, задерживая воздух: флис, шерсть, пух, синтетический утеплитель. Слоёв может быть несколько, но одежда не должна пережимать, потому что тепло — это воздух. Третий слой защищает от ветра и влаги: парка или комбинезон с капюшоном, регулируемыми манжетами и поясом. Важна вентиляция через молнии, чтобы не вспотеть. Лучше немного расстегнуться, чем намокнуть: мокрая одежда в мороз опаснее лёгкого озноба.</a:t>
             </a:r>
           </a:p>
         </p:txBody>
@@ -1347,7 +1347,7 @@
           <a:lstStyle/>
           <a:p>
             <a:r>
-              <a:t>Это ориентировочный график. При температуре от 0 до −10 °C можно работать около двух часов подряд и греться около 10 минут. От −10 до −20: 90 минут работы и 15 минут обогрева. От −20 до −30: час работы и 15 минут обогрева. От −30 до −40: 45 минут и 20 минут. От −40 до −50: около 30 минут работы и 20 минут в тепле. Ниже −50 °C открытые работы прекращают, кроме аварийных. Ниже −30 °C работают парами и следят друг за другом: лицо и руки. Если ветер 10 м/с и больше, температуру считают на ступень ниже. Тёплое помещение должно быть +21…+25 °C, с горячим питьём и сушкой одежды. Внизу пример смены при −30…−40 °C: четыре блока по 45 минут, между ними обогрев, а посередине час обеда в тепле. Точные режимы определяет МР 2.2.7.2129-06 и локальные акты предприятия.</a:t>
+              <a:t>Это ориентировочный график. При температуре от 0 до −10 °C можно работать около двух часов подряд и греться около 10 минут. От −10 до −20: 90 минут работы и 15 минут обогрева. От −20 до −30: час работы и 15 минут обогрева. От −30 до −40: 45 минут и 20 минут. От −40 до −50: около 30 минут работы и 20 минут в тепле. Ниже −50 °C открытые работы прекращают, кроме аварийных. Ниже −30 °C работают парами и следят друг за другом: лицо и руки. Если ветер 10 м/с и больше, температуру считают на ступень ниже. Тёплое помещение должно быть +21…+25 °C, с горячим питьём и сушкой одежды. Точные режимы определяет МР 2.2.7.2129-06 и локальные акты предприятия.</a:t>
             </a:r>
           </a:p>
         </p:txBody>
@@ -1417,7 +1417,7 @@
           <a:lstStyle/>
           <a:p>
             <a:r>
-              <a:t>Плакат собирает главное на одном слайде. Слева карта зон с типичными зимними температурами: около −55 °C в Арктике, −45 за Полярным кругом и до −60 в Якутии. В центре три слоя одежды: база, тепло, защита, и правило «сухо, свободно, слоями, без хлопка». Справа таблица режима работы и обогрева в минутах по диапазонам температур. Внизу девиз плаката: сухо, слоями, парами, по графику, на связи.</a:t>
+              <a:t>Плакат собирает главное на одном слайде. Слева карта зон с типичными зимними температурами: до −55 °C в Арктике, −45 за Полярным кругом, до −67 на Крайнем Севере. В центре три слоя одежды: база, тепло, защита, и правило «сухо, без хлопка». Справа таблица режима работы и обогрева в минутах по диапазонам температур. Внизу девиз плаката: сухо, слоями, парами, по графику, на связи.</a:t>
             </a:r>
           </a:p>
         </p:txBody>
@@ -6490,8 +6490,8 @@
         </p:nvSpPr>
         <p:spPr>
           <a:xfrm>
-            <a:off x="502920" y="1600200"/>
-            <a:ext cx="3611880" cy="3886200"/>
+            <a:off x="594360" y="1691640"/>
+            <a:ext cx="3474720" cy="3840480"/>
           </a:xfrm>
           <a:prstGeom prst="roundRect">
             <a:avLst>
@@ -6536,8 +6536,8 @@
         </p:nvSpPr>
         <p:spPr>
           <a:xfrm>
-            <a:off x="502920" y="1600200"/>
-            <a:ext cx="3611880" cy="457200"/>
+            <a:off x="594360" y="1691640"/>
+            <a:ext cx="3474720" cy="457200"/>
           </a:xfrm>
           <a:prstGeom prst="roundRect">
             <a:avLst>
@@ -6591,8 +6591,8 @@
         </p:nvSpPr>
         <p:spPr>
           <a:xfrm>
-            <a:off x="4288536" y="1600200"/>
-            <a:ext cx="3611880" cy="3886200"/>
+            <a:off x="4366260" y="1691640"/>
+            <a:ext cx="3474720" cy="3840480"/>
           </a:xfrm>
           <a:prstGeom prst="roundRect">
             <a:avLst>
@@ -6637,8 +6637,8 @@
         </p:nvSpPr>
         <p:spPr>
           <a:xfrm>
-            <a:off x="4288536" y="1600200"/>
-            <a:ext cx="3611880" cy="457200"/>
+            <a:off x="4366260" y="1691640"/>
+            <a:ext cx="3474720" cy="457200"/>
           </a:xfrm>
           <a:prstGeom prst="roundRect">
             <a:avLst>
@@ -6692,8 +6692,8 @@
         </p:nvSpPr>
         <p:spPr>
           <a:xfrm>
-            <a:off x="8074152" y="1600200"/>
-            <a:ext cx="3611880" cy="3886200"/>
+            <a:off x="8138160" y="1691640"/>
+            <a:ext cx="3474720" cy="3840480"/>
           </a:xfrm>
           <a:prstGeom prst="roundRect">
             <a:avLst>
@@ -6738,8 +6738,8 @@
         </p:nvSpPr>
         <p:spPr>
           <a:xfrm>
-            <a:off x="8074152" y="1600200"/>
-            <a:ext cx="3611880" cy="457200"/>
+            <a:off x="8138160" y="1691640"/>
+            <a:ext cx="3474720" cy="457200"/>
           </a:xfrm>
           <a:prstGeom prst="roundRect">
             <a:avLst>
@@ -6787,802 +6787,14 @@
       </p:sp>
       <p:sp>
         <p:nvSpPr>
-          <p:cNvPr id="16" name="Мини Кольцо 50°"/>
-          <p:cNvSpPr/>
-          <p:nvPr/>
-        </p:nvSpPr>
-        <p:spPr>
-          <a:xfrm>
-            <a:off x="548640" y="2514600"/>
-            <a:ext cx="2377440" cy="2377440"/>
-          </a:xfrm>
-          <a:prstGeom prst="ellipse">
-            <a:avLst/>
-          </a:prstGeom>
-          <a:solidFill>
-            <a:srgbClr val="E9E9E9"/>
-          </a:solidFill>
-          <a:ln w="19050">
-            <a:solidFill>
-              <a:srgbClr val="FFFFFF"/>
-            </a:solidFill>
-          </a:ln>
-          <a:effectLst/>
-        </p:spPr>
-        <p:style>
-          <a:lnRef idx="1">
-            <a:schemeClr val="accent1"/>
-          </a:lnRef>
-          <a:fillRef idx="3">
-            <a:schemeClr val="accent1"/>
-          </a:fillRef>
-          <a:effectRef idx="2">
-            <a:schemeClr val="accent1"/>
-          </a:effectRef>
-          <a:fontRef idx="minor">
-            <a:schemeClr val="lt1"/>
-          </a:fontRef>
-        </p:style>
-        <p:txBody>
-          <a:bodyPr rtlCol="0" anchor="ctr"/>
-          <a:lstStyle/>
-          <a:p>
-            <a:pPr algn="ctr"/>
-          </a:p>
-        </p:txBody>
-      </p:sp>
-      <p:sp>
-        <p:nvSpPr>
-          <p:cNvPr id="17" name="Мини Кольцо 60°"/>
-          <p:cNvSpPr/>
-          <p:nvPr/>
-        </p:nvSpPr>
-        <p:spPr>
-          <a:xfrm>
-            <a:off x="845820" y="2811779"/>
-            <a:ext cx="1783080" cy="1783080"/>
-          </a:xfrm>
-          <a:prstGeom prst="ellipse">
-            <a:avLst/>
-          </a:prstGeom>
-          <a:solidFill>
-            <a:srgbClr val="FFF7B0"/>
-          </a:solidFill>
-          <a:ln w="19050">
-            <a:solidFill>
-              <a:srgbClr val="FFFFFF"/>
-            </a:solidFill>
-          </a:ln>
-          <a:effectLst/>
-        </p:spPr>
-        <p:style>
-          <a:lnRef idx="1">
-            <a:schemeClr val="accent1"/>
-          </a:lnRef>
-          <a:fillRef idx="3">
-            <a:schemeClr val="accent1"/>
-          </a:fillRef>
-          <a:effectRef idx="2">
-            <a:schemeClr val="accent1"/>
-          </a:effectRef>
-          <a:fontRef idx="minor">
-            <a:schemeClr val="lt1"/>
-          </a:fontRef>
-        </p:style>
-        <p:txBody>
-          <a:bodyPr rtlCol="0" anchor="ctr"/>
-          <a:lstStyle/>
-          <a:p>
-            <a:pPr algn="ctr"/>
-          </a:p>
-        </p:txBody>
-      </p:sp>
-      <p:sp>
-        <p:nvSpPr>
-          <p:cNvPr id="18" name="Мини Кольцо 66.5°"/>
-          <p:cNvSpPr/>
-          <p:nvPr/>
-        </p:nvSpPr>
-        <p:spPr>
-          <a:xfrm>
-            <a:off x="1038987" y="3004947"/>
-            <a:ext cx="1396746" cy="1396746"/>
-          </a:xfrm>
-          <a:prstGeom prst="ellipse">
-            <a:avLst/>
-          </a:prstGeom>
-          <a:solidFill>
-            <a:srgbClr val="FFED00"/>
-          </a:solidFill>
-          <a:ln w="19050">
-            <a:solidFill>
-              <a:srgbClr val="FFFFFF"/>
-            </a:solidFill>
-          </a:ln>
-          <a:effectLst/>
-        </p:spPr>
-        <p:style>
-          <a:lnRef idx="1">
-            <a:schemeClr val="accent1"/>
-          </a:lnRef>
-          <a:fillRef idx="3">
-            <a:schemeClr val="accent1"/>
-          </a:fillRef>
-          <a:effectRef idx="2">
-            <a:schemeClr val="accent1"/>
-          </a:effectRef>
-          <a:fontRef idx="minor">
-            <a:schemeClr val="lt1"/>
-          </a:fontRef>
-        </p:style>
-        <p:txBody>
-          <a:bodyPr rtlCol="0" anchor="ctr"/>
-          <a:lstStyle/>
-          <a:p>
-            <a:pPr algn="ctr"/>
-          </a:p>
-        </p:txBody>
-      </p:sp>
-      <p:sp>
-        <p:nvSpPr>
-          <p:cNvPr id="19" name="Мини Кольцо 80°"/>
-          <p:cNvSpPr/>
-          <p:nvPr/>
-        </p:nvSpPr>
-        <p:spPr>
-          <a:xfrm>
-            <a:off x="1440180" y="3406139"/>
-            <a:ext cx="594360" cy="594360"/>
-          </a:xfrm>
-          <a:prstGeom prst="ellipse">
-            <a:avLst/>
-          </a:prstGeom>
-          <a:solidFill>
-            <a:srgbClr val="4B4B4B"/>
-          </a:solidFill>
-          <a:ln w="19050">
-            <a:solidFill>
-              <a:srgbClr val="FFFFFF"/>
-            </a:solidFill>
-          </a:ln>
-          <a:effectLst/>
-        </p:spPr>
-        <p:style>
-          <a:lnRef idx="1">
-            <a:schemeClr val="accent1"/>
-          </a:lnRef>
-          <a:fillRef idx="3">
-            <a:schemeClr val="accent1"/>
-          </a:fillRef>
-          <a:effectRef idx="2">
-            <a:schemeClr val="accent1"/>
-          </a:effectRef>
-          <a:fontRef idx="minor">
-            <a:schemeClr val="lt1"/>
-          </a:fontRef>
-        </p:style>
-        <p:txBody>
-          <a:bodyPr rtlCol="0" anchor="ctr"/>
-          <a:lstStyle/>
-          <a:p>
-            <a:pPr algn="ctr"/>
-          </a:p>
-        </p:txBody>
-      </p:sp>
-      <p:cxnSp>
-        <p:nvCxnSpPr>
-          <p:cNvPr id="20" name="Мини Меридиан 0"/>
-          <p:cNvCxnSpPr/>
-          <p:nvPr/>
-        </p:nvCxnSpPr>
-        <p:spPr>
-          <a:xfrm>
-            <a:off x="1737360" y="4000500"/>
-            <a:ext cx="0" cy="891540"/>
-          </a:xfrm>
-          <a:prstGeom prst="line">
-            <a:avLst/>
-          </a:prstGeom>
-          <a:ln w="6350">
-            <a:solidFill>
-              <a:srgbClr val="FFFFFF"/>
-            </a:solidFill>
-          </a:ln>
-        </p:spPr>
-        <p:style>
-          <a:lnRef idx="2">
-            <a:schemeClr val="accent1"/>
-          </a:lnRef>
-          <a:fillRef idx="0">
-            <a:schemeClr val="accent1"/>
-          </a:fillRef>
-          <a:effectRef idx="1">
-            <a:schemeClr val="accent1"/>
-          </a:effectRef>
-          <a:fontRef idx="minor">
-            <a:schemeClr val="tx1"/>
-          </a:fontRef>
-        </p:style>
-      </p:cxnSp>
-      <p:cxnSp>
-        <p:nvCxnSpPr>
-          <p:cNvPr id="21" name="Мини Меридиан 45"/>
-          <p:cNvCxnSpPr/>
-          <p:nvPr/>
-        </p:nvCxnSpPr>
-        <p:spPr>
-          <a:xfrm>
-            <a:off x="1947497" y="3913457"/>
-            <a:ext cx="630414" cy="630414"/>
-          </a:xfrm>
-          <a:prstGeom prst="line">
-            <a:avLst/>
-          </a:prstGeom>
-          <a:ln w="6350">
-            <a:solidFill>
-              <a:srgbClr val="FFFFFF"/>
-            </a:solidFill>
-          </a:ln>
-        </p:spPr>
-        <p:style>
-          <a:lnRef idx="2">
-            <a:schemeClr val="accent1"/>
-          </a:lnRef>
-          <a:fillRef idx="0">
-            <a:schemeClr val="accent1"/>
-          </a:fillRef>
-          <a:effectRef idx="1">
-            <a:schemeClr val="accent1"/>
-          </a:effectRef>
-          <a:fontRef idx="minor">
-            <a:schemeClr val="tx1"/>
-          </a:fontRef>
-        </p:style>
-      </p:cxnSp>
-      <p:cxnSp>
-        <p:nvCxnSpPr>
-          <p:cNvPr id="22" name="Мини Меридиан 90"/>
-          <p:cNvCxnSpPr/>
-          <p:nvPr/>
-        </p:nvCxnSpPr>
-        <p:spPr>
-          <a:xfrm>
-            <a:off x="2034540" y="3703320"/>
-            <a:ext cx="891540" cy="0"/>
-          </a:xfrm>
-          <a:prstGeom prst="line">
-            <a:avLst/>
-          </a:prstGeom>
-          <a:ln w="6350">
-            <a:solidFill>
-              <a:srgbClr val="FFFFFF"/>
-            </a:solidFill>
-          </a:ln>
-        </p:spPr>
-        <p:style>
-          <a:lnRef idx="2">
-            <a:schemeClr val="accent1"/>
-          </a:lnRef>
-          <a:fillRef idx="0">
-            <a:schemeClr val="accent1"/>
-          </a:fillRef>
-          <a:effectRef idx="1">
-            <a:schemeClr val="accent1"/>
-          </a:effectRef>
-          <a:fontRef idx="minor">
-            <a:schemeClr val="tx1"/>
-          </a:fontRef>
-        </p:style>
-      </p:cxnSp>
-      <p:cxnSp>
-        <p:nvCxnSpPr>
-          <p:cNvPr id="23" name="Мини Меридиан 135"/>
-          <p:cNvCxnSpPr/>
-          <p:nvPr/>
-        </p:nvCxnSpPr>
-        <p:spPr>
-          <a:xfrm flipV="1">
-            <a:off x="1947497" y="2862768"/>
-            <a:ext cx="630414" cy="630414"/>
-          </a:xfrm>
-          <a:prstGeom prst="line">
-            <a:avLst/>
-          </a:prstGeom>
-          <a:ln w="6350">
-            <a:solidFill>
-              <a:srgbClr val="FFFFFF"/>
-            </a:solidFill>
-          </a:ln>
-        </p:spPr>
-        <p:style>
-          <a:lnRef idx="2">
-            <a:schemeClr val="accent1"/>
-          </a:lnRef>
-          <a:fillRef idx="0">
-            <a:schemeClr val="accent1"/>
-          </a:fillRef>
-          <a:effectRef idx="1">
-            <a:schemeClr val="accent1"/>
-          </a:effectRef>
-          <a:fontRef idx="minor">
-            <a:schemeClr val="tx1"/>
-          </a:fontRef>
-        </p:style>
-      </p:cxnSp>
-      <p:cxnSp>
-        <p:nvCxnSpPr>
-          <p:cNvPr id="24" name="Мини Меридиан 180"/>
-          <p:cNvCxnSpPr/>
-          <p:nvPr/>
-        </p:nvCxnSpPr>
-        <p:spPr>
-          <a:xfrm flipV="1">
-            <a:off x="1737360" y="2514600"/>
-            <a:ext cx="0" cy="891539"/>
-          </a:xfrm>
-          <a:prstGeom prst="line">
-            <a:avLst/>
-          </a:prstGeom>
-          <a:ln w="6350">
-            <a:solidFill>
-              <a:srgbClr val="FFFFFF"/>
-            </a:solidFill>
-          </a:ln>
-        </p:spPr>
-        <p:style>
-          <a:lnRef idx="2">
-            <a:schemeClr val="accent1"/>
-          </a:lnRef>
-          <a:fillRef idx="0">
-            <a:schemeClr val="accent1"/>
-          </a:fillRef>
-          <a:effectRef idx="1">
-            <a:schemeClr val="accent1"/>
-          </a:effectRef>
-          <a:fontRef idx="minor">
-            <a:schemeClr val="tx1"/>
-          </a:fontRef>
-        </p:style>
-      </p:cxnSp>
-      <p:cxnSp>
-        <p:nvCxnSpPr>
-          <p:cNvPr id="25" name="Мини Меридиан 225"/>
-          <p:cNvCxnSpPr/>
-          <p:nvPr/>
-        </p:nvCxnSpPr>
-        <p:spPr>
-          <a:xfrm flipH="1" flipV="1">
-            <a:off x="896808" y="2862768"/>
-            <a:ext cx="630414" cy="630414"/>
-          </a:xfrm>
-          <a:prstGeom prst="line">
-            <a:avLst/>
-          </a:prstGeom>
-          <a:ln w="6350">
-            <a:solidFill>
-              <a:srgbClr val="FFFFFF"/>
-            </a:solidFill>
-          </a:ln>
-        </p:spPr>
-        <p:style>
-          <a:lnRef idx="2">
-            <a:schemeClr val="accent1"/>
-          </a:lnRef>
-          <a:fillRef idx="0">
-            <a:schemeClr val="accent1"/>
-          </a:fillRef>
-          <a:effectRef idx="1">
-            <a:schemeClr val="accent1"/>
-          </a:effectRef>
-          <a:fontRef idx="minor">
-            <a:schemeClr val="tx1"/>
-          </a:fontRef>
-        </p:style>
-      </p:cxnSp>
-      <p:cxnSp>
-        <p:nvCxnSpPr>
-          <p:cNvPr id="26" name="Мини Меридиан 270"/>
-          <p:cNvCxnSpPr/>
-          <p:nvPr/>
-        </p:nvCxnSpPr>
-        <p:spPr>
-          <a:xfrm flipH="1">
-            <a:off x="548640" y="3703320"/>
-            <a:ext cx="891540" cy="0"/>
-          </a:xfrm>
-          <a:prstGeom prst="line">
-            <a:avLst/>
-          </a:prstGeom>
-          <a:ln w="6350">
-            <a:solidFill>
-              <a:srgbClr val="FFFFFF"/>
-            </a:solidFill>
-          </a:ln>
-        </p:spPr>
-        <p:style>
-          <a:lnRef idx="2">
-            <a:schemeClr val="accent1"/>
-          </a:lnRef>
-          <a:fillRef idx="0">
-            <a:schemeClr val="accent1"/>
-          </a:fillRef>
-          <a:effectRef idx="1">
-            <a:schemeClr val="accent1"/>
-          </a:effectRef>
-          <a:fontRef idx="minor">
-            <a:schemeClr val="tx1"/>
-          </a:fontRef>
-        </p:style>
-      </p:cxnSp>
-      <p:cxnSp>
-        <p:nvCxnSpPr>
-          <p:cNvPr id="27" name="Мини Меридиан 315"/>
-          <p:cNvCxnSpPr/>
-          <p:nvPr/>
-        </p:nvCxnSpPr>
-        <p:spPr>
-          <a:xfrm flipH="1">
-            <a:off x="896808" y="3913457"/>
-            <a:ext cx="630414" cy="630414"/>
-          </a:xfrm>
-          <a:prstGeom prst="line">
-            <a:avLst/>
-          </a:prstGeom>
-          <a:ln w="6350">
-            <a:solidFill>
-              <a:srgbClr val="FFFFFF"/>
-            </a:solidFill>
-          </a:ln>
-        </p:spPr>
-        <p:style>
-          <a:lnRef idx="2">
-            <a:schemeClr val="accent1"/>
-          </a:lnRef>
-          <a:fillRef idx="0">
-            <a:schemeClr val="accent1"/>
-          </a:fillRef>
-          <a:effectRef idx="1">
-            <a:schemeClr val="accent1"/>
-          </a:effectRef>
-          <a:fontRef idx="minor">
-            <a:schemeClr val="tx1"/>
-          </a:fontRef>
-        </p:style>
-      </p:cxnSp>
-      <p:sp>
-        <p:nvSpPr>
-          <p:cNvPr id="28" name="Мини легенда 1"/>
-          <p:cNvSpPr/>
-          <p:nvPr/>
-        </p:nvSpPr>
-        <p:spPr>
-          <a:xfrm>
-            <a:off x="640080" y="5029200"/>
-            <a:ext cx="164592" cy="164592"/>
-          </a:xfrm>
-          <a:prstGeom prst="rect">
-            <a:avLst/>
-          </a:prstGeom>
-          <a:solidFill>
-            <a:srgbClr val="4B4B4B"/>
-          </a:solidFill>
-          <a:ln w="12700">
-            <a:solidFill>
-              <a:srgbClr val="8A8A8A"/>
-            </a:solidFill>
-          </a:ln>
-          <a:effectLst/>
-        </p:spPr>
-        <p:style>
-          <a:lnRef idx="1">
-            <a:schemeClr val="accent1"/>
-          </a:lnRef>
-          <a:fillRef idx="3">
-            <a:schemeClr val="accent1"/>
-          </a:fillRef>
-          <a:effectRef idx="2">
-            <a:schemeClr val="accent1"/>
-          </a:effectRef>
-          <a:fontRef idx="minor">
-            <a:schemeClr val="lt1"/>
-          </a:fontRef>
-        </p:style>
-        <p:txBody>
-          <a:bodyPr rtlCol="0" anchor="ctr"/>
-          <a:lstStyle/>
-          <a:p>
-            <a:pPr algn="ctr"/>
-          </a:p>
-        </p:txBody>
-      </p:sp>
-      <p:sp>
-        <p:nvSpPr>
-          <p:cNvPr id="29" name="Мини подпись 1"/>
+          <p:cNvPr id="16" name="Зоны на плакате"/>
           <p:cNvSpPr txBox="1"/>
           <p:nvPr/>
         </p:nvSpPr>
         <p:spPr>
           <a:xfrm>
-            <a:off x="841248" y="4983480"/>
-            <a:ext cx="1508760" cy="256032"/>
-          </a:xfrm>
-          <a:prstGeom prst="rect">
-            <a:avLst/>
-          </a:prstGeom>
-          <a:noFill/>
-        </p:spPr>
-        <p:txBody>
-          <a:bodyPr wrap="square" anchor="ctr" lIns="18288" rIns="18288" tIns="27432" bIns="27432">
-            <a:spAutoFit/>
-          </a:bodyPr>
-          <a:lstStyle/>
-          <a:p>
-            <a:pPr algn="l"/>
-            <a:r>
-              <a:rPr sz="1000" b="0">
-                <a:solidFill>
-                  <a:srgbClr val="2B2B2B"/>
-                </a:solidFill>
-                <a:latin typeface="Calibri"/>
-              </a:rPr>
-              <a:t>Арктика</a:t>
-            </a:r>
-          </a:p>
-        </p:txBody>
-      </p:sp>
-      <p:sp>
-        <p:nvSpPr>
-          <p:cNvPr id="30" name="Мини легенда 2"/>
-          <p:cNvSpPr/>
-          <p:nvPr/>
-        </p:nvSpPr>
-        <p:spPr>
-          <a:xfrm>
-            <a:off x="2377440" y="5029200"/>
-            <a:ext cx="164592" cy="164592"/>
-          </a:xfrm>
-          <a:prstGeom prst="rect">
-            <a:avLst/>
-          </a:prstGeom>
-          <a:solidFill>
-            <a:srgbClr val="FFED00"/>
-          </a:solidFill>
-          <a:ln w="12700">
-            <a:solidFill>
-              <a:srgbClr val="8A8A8A"/>
-            </a:solidFill>
-          </a:ln>
-          <a:effectLst/>
-        </p:spPr>
-        <p:style>
-          <a:lnRef idx="1">
-            <a:schemeClr val="accent1"/>
-          </a:lnRef>
-          <a:fillRef idx="3">
-            <a:schemeClr val="accent1"/>
-          </a:fillRef>
-          <a:effectRef idx="2">
-            <a:schemeClr val="accent1"/>
-          </a:effectRef>
-          <a:fontRef idx="minor">
-            <a:schemeClr val="lt1"/>
-          </a:fontRef>
-        </p:style>
-        <p:txBody>
-          <a:bodyPr rtlCol="0" anchor="ctr"/>
-          <a:lstStyle/>
-          <a:p>
-            <a:pPr algn="ctr"/>
-          </a:p>
-        </p:txBody>
-      </p:sp>
-      <p:sp>
-        <p:nvSpPr>
-          <p:cNvPr id="31" name="Мини подпись 2"/>
-          <p:cNvSpPr txBox="1"/>
-          <p:nvPr/>
-        </p:nvSpPr>
-        <p:spPr>
-          <a:xfrm>
-            <a:off x="2578608" y="4983480"/>
-            <a:ext cx="1508760" cy="256032"/>
-          </a:xfrm>
-          <a:prstGeom prst="rect">
-            <a:avLst/>
-          </a:prstGeom>
-          <a:noFill/>
-        </p:spPr>
-        <p:txBody>
-          <a:bodyPr wrap="square" anchor="ctr" lIns="18288" rIns="18288" tIns="27432" bIns="27432">
-            <a:spAutoFit/>
-          </a:bodyPr>
-          <a:lstStyle/>
-          <a:p>
-            <a:pPr algn="l"/>
-            <a:r>
-              <a:rPr sz="1000" b="0">
-                <a:solidFill>
-                  <a:srgbClr val="2B2B2B"/>
-                </a:solidFill>
-                <a:latin typeface="Calibri"/>
-              </a:rPr>
-              <a:t>За Полярным кругом</a:t>
-            </a:r>
-          </a:p>
-        </p:txBody>
-      </p:sp>
-      <p:sp>
-        <p:nvSpPr>
-          <p:cNvPr id="32" name="Мини легенда 3"/>
-          <p:cNvSpPr/>
-          <p:nvPr/>
-        </p:nvSpPr>
-        <p:spPr>
-          <a:xfrm>
-            <a:off x="640080" y="5285232"/>
-            <a:ext cx="164592" cy="164592"/>
-          </a:xfrm>
-          <a:prstGeom prst="rect">
-            <a:avLst/>
-          </a:prstGeom>
-          <a:solidFill>
-            <a:srgbClr val="FFF7B0"/>
-          </a:solidFill>
-          <a:ln w="12700">
-            <a:solidFill>
-              <a:srgbClr val="8A8A8A"/>
-            </a:solidFill>
-          </a:ln>
-          <a:effectLst/>
-        </p:spPr>
-        <p:style>
-          <a:lnRef idx="1">
-            <a:schemeClr val="accent1"/>
-          </a:lnRef>
-          <a:fillRef idx="3">
-            <a:schemeClr val="accent1"/>
-          </a:fillRef>
-          <a:effectRef idx="2">
-            <a:schemeClr val="accent1"/>
-          </a:effectRef>
-          <a:fontRef idx="minor">
-            <a:schemeClr val="lt1"/>
-          </a:fontRef>
-        </p:style>
-        <p:txBody>
-          <a:bodyPr rtlCol="0" anchor="ctr"/>
-          <a:lstStyle/>
-          <a:p>
-            <a:pPr algn="ctr"/>
-          </a:p>
-        </p:txBody>
-      </p:sp>
-      <p:sp>
-        <p:nvSpPr>
-          <p:cNvPr id="33" name="Мини подпись 3"/>
-          <p:cNvSpPr txBox="1"/>
-          <p:nvPr/>
-        </p:nvSpPr>
-        <p:spPr>
-          <a:xfrm>
-            <a:off x="841248" y="5239512"/>
-            <a:ext cx="1508760" cy="256032"/>
-          </a:xfrm>
-          <a:prstGeom prst="rect">
-            <a:avLst/>
-          </a:prstGeom>
-          <a:noFill/>
-        </p:spPr>
-        <p:txBody>
-          <a:bodyPr wrap="square" anchor="ctr" lIns="18288" rIns="18288" tIns="27432" bIns="27432">
-            <a:spAutoFit/>
-          </a:bodyPr>
-          <a:lstStyle/>
-          <a:p>
-            <a:pPr algn="l"/>
-            <a:r>
-              <a:rPr sz="1000" b="0">
-                <a:solidFill>
-                  <a:srgbClr val="2B2B2B"/>
-                </a:solidFill>
-                <a:latin typeface="Calibri"/>
-              </a:rPr>
-              <a:t>РКС и приравненные</a:t>
-            </a:r>
-          </a:p>
-        </p:txBody>
-      </p:sp>
-      <p:sp>
-        <p:nvSpPr>
-          <p:cNvPr id="34" name="Мини легенда 4"/>
-          <p:cNvSpPr/>
-          <p:nvPr/>
-        </p:nvSpPr>
-        <p:spPr>
-          <a:xfrm>
-            <a:off x="2377440" y="5285232"/>
-            <a:ext cx="164592" cy="164592"/>
-          </a:xfrm>
-          <a:prstGeom prst="rect">
-            <a:avLst/>
-          </a:prstGeom>
-          <a:solidFill>
-            <a:srgbClr val="E9E9E9"/>
-          </a:solidFill>
-          <a:ln w="12700">
-            <a:solidFill>
-              <a:srgbClr val="8A8A8A"/>
-            </a:solidFill>
-          </a:ln>
-          <a:effectLst/>
-        </p:spPr>
-        <p:style>
-          <a:lnRef idx="1">
-            <a:schemeClr val="accent1"/>
-          </a:lnRef>
-          <a:fillRef idx="3">
-            <a:schemeClr val="accent1"/>
-          </a:fillRef>
-          <a:effectRef idx="2">
-            <a:schemeClr val="accent1"/>
-          </a:effectRef>
-          <a:fontRef idx="minor">
-            <a:schemeClr val="lt1"/>
-          </a:fontRef>
-        </p:style>
-        <p:txBody>
-          <a:bodyPr rtlCol="0" anchor="ctr"/>
-          <a:lstStyle/>
-          <a:p>
-            <a:pPr algn="ctr"/>
-          </a:p>
-        </p:txBody>
-      </p:sp>
-      <p:sp>
-        <p:nvSpPr>
-          <p:cNvPr id="35" name="Мини подпись 4"/>
-          <p:cNvSpPr txBox="1"/>
-          <p:nvPr/>
-        </p:nvSpPr>
-        <p:spPr>
-          <a:xfrm>
-            <a:off x="2578608" y="5239512"/>
-            <a:ext cx="1508760" cy="256032"/>
-          </a:xfrm>
-          <a:prstGeom prst="rect">
-            <a:avLst/>
-          </a:prstGeom>
-          <a:noFill/>
-        </p:spPr>
-        <p:txBody>
-          <a:bodyPr wrap="square" anchor="ctr" lIns="18288" rIns="18288" tIns="27432" bIns="27432">
-            <a:spAutoFit/>
-          </a:bodyPr>
-          <a:lstStyle/>
-          <a:p>
-            <a:pPr algn="l"/>
-            <a:r>
-              <a:rPr sz="1000" b="0">
-                <a:solidFill>
-                  <a:srgbClr val="2B2B2B"/>
-                </a:solidFill>
-                <a:latin typeface="Calibri"/>
-              </a:rPr>
-              <a:t>Умеренный пояс</a:t>
-            </a:r>
-          </a:p>
-        </p:txBody>
-      </p:sp>
-      <p:sp>
-        <p:nvSpPr>
-          <p:cNvPr id="36" name="Мини температуры"/>
-          <p:cNvSpPr txBox="1"/>
-          <p:nvPr/>
-        </p:nvSpPr>
-        <p:spPr>
-          <a:xfrm>
-            <a:off x="3017520" y="2286000"/>
-            <a:ext cx="1051560" cy="2743200"/>
+            <a:off x="731520" y="2286000"/>
+            <a:ext cx="3200400" cy="3108960"/>
           </a:xfrm>
           <a:prstGeom prst="rect">
             <a:avLst/>
@@ -7595,429 +6807,117 @@
           </a:bodyPr>
           <a:lstStyle/>
           <a:p>
-            <a:pPr algn="l"/>
-            <a:r>
-              <a:rPr sz="1600" b="1">
+            <a:pPr algn="l">
+              <a:spcAft>
+                <a:spcPts val="1200"/>
+              </a:spcAft>
+            </a:pPr>
+            <a:r>
+              <a:rPr sz="1400" b="1">
                 <a:solidFill>
                   <a:srgbClr val="2B2B2B"/>
                 </a:solidFill>
                 <a:latin typeface="Calibri"/>
               </a:rPr>
-              <a:t>−55</a:t>
-            </a:r>
-          </a:p>
-          <a:p>
-            <a:pPr algn="l"/>
-            <a:r>
-              <a:rPr sz="1000" b="0">
+              <a:t>Арктика: </a:t>
+            </a:r>
+            <a:r>
+              <a:rPr sz="1400" b="0">
                 <a:solidFill>
                   <a:srgbClr val="4B4B4B"/>
                 </a:solidFill>
                 <a:latin typeface="Calibri"/>
               </a:rPr>
-              <a:t>Арктика</a:t>
-            </a:r>
-          </a:p>
-          <a:p>
-            <a:pPr algn="l"/>
-            <a:r>
-              <a:rPr sz="1200" b="0">
+              <a:t>−40…−55 °C, ночь 80–120 сут</a:t>
+            </a:r>
+          </a:p>
+          <a:p>
+            <a:pPr algn="l">
+              <a:spcAft>
+                <a:spcPts val="1200"/>
+              </a:spcAft>
+            </a:pPr>
+            <a:r>
+              <a:rPr sz="1400" b="1">
                 <a:solidFill>
                   <a:srgbClr val="2B2B2B"/>
                 </a:solidFill>
                 <a:latin typeface="Calibri"/>
               </a:rPr>
-              <a:t/>
-            </a:r>
-          </a:p>
-          <a:p>
-            <a:pPr algn="l"/>
-            <a:r>
-              <a:rPr sz="1600" b="1">
+              <a:t>За Полярным кругом: </a:t>
+            </a:r>
+            <a:r>
+              <a:rPr sz="1400" b="0">
+                <a:solidFill>
+                  <a:srgbClr val="4B4B4B"/>
+                </a:solidFill>
+                <a:latin typeface="Calibri"/>
+              </a:rPr>
+              <a:t>−30…−45 °C, ночь до 45 сут</a:t>
+            </a:r>
+          </a:p>
+          <a:p>
+            <a:pPr algn="l">
+              <a:spcAft>
+                <a:spcPts val="1200"/>
+              </a:spcAft>
+            </a:pPr>
+            <a:r>
+              <a:rPr sz="1400" b="1">
                 <a:solidFill>
                   <a:srgbClr val="2B2B2B"/>
                 </a:solidFill>
                 <a:latin typeface="Calibri"/>
               </a:rPr>
-              <a:t>−45</a:t>
-            </a:r>
-          </a:p>
-          <a:p>
-            <a:pPr algn="l"/>
-            <a:r>
-              <a:rPr sz="1000" b="0">
+              <a:t>Крайний Север: </a:t>
+            </a:r>
+            <a:r>
+              <a:rPr sz="1400" b="0">
                 <a:solidFill>
                   <a:srgbClr val="4B4B4B"/>
                 </a:solidFill>
                 <a:latin typeface="Calibri"/>
               </a:rPr>
-              <a:t>за Полярным кругом</a:t>
-            </a:r>
-          </a:p>
-          <a:p>
-            <a:pPr algn="l"/>
-            <a:r>
-              <a:rPr sz="1200" b="0">
+              <a:t>до −50…−67 °C</a:t>
+            </a:r>
+          </a:p>
+          <a:p>
+            <a:pPr algn="l">
+              <a:spcAft>
+                <a:spcPts val="1200"/>
+              </a:spcAft>
+            </a:pPr>
+            <a:r>
+              <a:rPr sz="1400" b="1">
                 <a:solidFill>
                   <a:srgbClr val="2B2B2B"/>
                 </a:solidFill>
                 <a:latin typeface="Calibri"/>
               </a:rPr>
-              <a:t/>
-            </a:r>
-          </a:p>
-          <a:p>
-            <a:pPr algn="l"/>
-            <a:r>
-              <a:rPr sz="1600" b="1">
-                <a:solidFill>
-                  <a:srgbClr val="2B2B2B"/>
+              <a:t>Приравненные: </a:t>
+            </a:r>
+            <a:r>
+              <a:rPr sz="1400" b="0">
+                <a:solidFill>
+                  <a:srgbClr val="4B4B4B"/>
                 </a:solidFill>
                 <a:latin typeface="Calibri"/>
               </a:rPr>
-              <a:t>−60</a:t>
-            </a:r>
-          </a:p>
-          <a:p>
-            <a:pPr algn="l"/>
-            <a:r>
-              <a:rPr sz="1000" b="0">
-                <a:solidFill>
-                  <a:srgbClr val="4B4B4B"/>
-                </a:solidFill>
-                <a:latin typeface="Calibri"/>
-              </a:rPr>
-              <a:t>Якутия</a:t>
-            </a:r>
-          </a:p>
-        </p:txBody>
-      </p:sp>
-      <p:sp>
-        <p:nvSpPr>
-          <p:cNvPr id="37" name="Мини слой 3"/>
-          <p:cNvSpPr/>
-          <p:nvPr/>
-        </p:nvSpPr>
-        <p:spPr>
-          <a:xfrm>
-            <a:off x="4814316" y="2468879"/>
-            <a:ext cx="2560320" cy="2560320"/>
-          </a:xfrm>
-          <a:prstGeom prst="ellipse">
-            <a:avLst/>
-          </a:prstGeom>
-          <a:solidFill>
-            <a:srgbClr val="2B2B2B"/>
-          </a:solidFill>
-          <a:ln>
-            <a:noFill/>
-          </a:ln>
-          <a:effectLst/>
-        </p:spPr>
-        <p:style>
-          <a:lnRef idx="1">
-            <a:schemeClr val="accent1"/>
-          </a:lnRef>
-          <a:fillRef idx="3">
-            <a:schemeClr val="accent1"/>
-          </a:fillRef>
-          <a:effectRef idx="2">
-            <a:schemeClr val="accent1"/>
-          </a:effectRef>
-          <a:fontRef idx="minor">
-            <a:schemeClr val="lt1"/>
-          </a:fontRef>
-        </p:style>
-        <p:txBody>
-          <a:bodyPr rtlCol="0" anchor="ctr"/>
-          <a:lstStyle/>
-          <a:p>
-            <a:pPr algn="ctr"/>
-          </a:p>
-        </p:txBody>
-      </p:sp>
-      <p:sp>
-        <p:nvSpPr>
-          <p:cNvPr id="38" name="Мини слой 2"/>
-          <p:cNvSpPr/>
-          <p:nvPr/>
-        </p:nvSpPr>
-        <p:spPr>
-          <a:xfrm>
-            <a:off x="5180076" y="2834639"/>
-            <a:ext cx="1828800" cy="1828800"/>
-          </a:xfrm>
-          <a:prstGeom prst="ellipse">
-            <a:avLst/>
-          </a:prstGeom>
-          <a:solidFill>
-            <a:srgbClr val="4B4B4B"/>
-          </a:solidFill>
-          <a:ln>
-            <a:noFill/>
-          </a:ln>
-          <a:effectLst/>
-        </p:spPr>
-        <p:style>
-          <a:lnRef idx="1">
-            <a:schemeClr val="accent1"/>
-          </a:lnRef>
-          <a:fillRef idx="3">
-            <a:schemeClr val="accent1"/>
-          </a:fillRef>
-          <a:effectRef idx="2">
-            <a:schemeClr val="accent1"/>
-          </a:effectRef>
-          <a:fontRef idx="minor">
-            <a:schemeClr val="lt1"/>
-          </a:fontRef>
-        </p:style>
-        <p:txBody>
-          <a:bodyPr rtlCol="0" anchor="ctr"/>
-          <a:lstStyle/>
-          <a:p>
-            <a:pPr algn="ctr"/>
-          </a:p>
-        </p:txBody>
-      </p:sp>
-      <p:sp>
-        <p:nvSpPr>
-          <p:cNvPr id="39" name="Мини слой 1"/>
-          <p:cNvSpPr/>
-          <p:nvPr/>
-        </p:nvSpPr>
-        <p:spPr>
-          <a:xfrm>
-            <a:off x="5527548" y="3182111"/>
-            <a:ext cx="1133856" cy="1133856"/>
-          </a:xfrm>
-          <a:prstGeom prst="ellipse">
-            <a:avLst/>
-          </a:prstGeom>
-          <a:solidFill>
-            <a:srgbClr val="FFF7B0"/>
-          </a:solidFill>
-          <a:ln>
-            <a:noFill/>
-          </a:ln>
-          <a:effectLst/>
-        </p:spPr>
-        <p:style>
-          <a:lnRef idx="1">
-            <a:schemeClr val="accent1"/>
-          </a:lnRef>
-          <a:fillRef idx="3">
-            <a:schemeClr val="accent1"/>
-          </a:fillRef>
-          <a:effectRef idx="2">
-            <a:schemeClr val="accent1"/>
-          </a:effectRef>
-          <a:fontRef idx="minor">
-            <a:schemeClr val="lt1"/>
-          </a:fontRef>
-        </p:style>
-        <p:txBody>
-          <a:bodyPr rtlCol="0" anchor="ctr"/>
-          <a:lstStyle/>
-          <a:p>
-            <a:pPr algn="ctr"/>
-          </a:p>
-        </p:txBody>
-      </p:sp>
-      <p:sp>
-        <p:nvSpPr>
-          <p:cNvPr id="40" name="Мини тело"/>
-          <p:cNvSpPr/>
-          <p:nvPr/>
-        </p:nvSpPr>
-        <p:spPr>
-          <a:xfrm>
-            <a:off x="5838444" y="3493007"/>
-            <a:ext cx="512064" cy="512064"/>
-          </a:xfrm>
-          <a:prstGeom prst="ellipse">
-            <a:avLst/>
-          </a:prstGeom>
-          <a:solidFill>
-            <a:srgbClr val="FFED00"/>
-          </a:solidFill>
-          <a:ln>
-            <a:noFill/>
-          </a:ln>
-          <a:effectLst/>
-        </p:spPr>
-        <p:style>
-          <a:lnRef idx="1">
-            <a:schemeClr val="accent1"/>
-          </a:lnRef>
-          <a:fillRef idx="3">
-            <a:schemeClr val="accent1"/>
-          </a:fillRef>
-          <a:effectRef idx="2">
-            <a:schemeClr val="accent1"/>
-          </a:effectRef>
-          <a:fontRef idx="minor">
-            <a:schemeClr val="lt1"/>
-          </a:fontRef>
-        </p:style>
-        <p:txBody>
-          <a:bodyPr rtlCol="0" anchor="ctr"/>
-          <a:lstStyle/>
-          <a:p>
-            <a:pPr algn="ctr"/>
-          </a:p>
-        </p:txBody>
-      </p:sp>
-      <p:sp>
-        <p:nvSpPr>
-          <p:cNvPr id="41" name="TextBox 40"/>
+              <a:t>−25…−40 °C, долгая зима</a:t>
+            </a:r>
+          </a:p>
+        </p:txBody>
+      </p:sp>
+      <p:sp>
+        <p:nvSpPr>
+          <p:cNvPr id="17" name="Слои на плакате"/>
           <p:cNvSpPr txBox="1"/>
           <p:nvPr/>
         </p:nvSpPr>
         <p:spPr>
           <a:xfrm>
-            <a:off x="5545836" y="3621023"/>
-            <a:ext cx="1097280" cy="256032"/>
-          </a:xfrm>
-          <a:prstGeom prst="rect">
-            <a:avLst/>
-          </a:prstGeom>
-          <a:noFill/>
-        </p:spPr>
-        <p:txBody>
-          <a:bodyPr wrap="square" anchor="ctr" lIns="0" rIns="0" tIns="27432" bIns="27432">
-            <a:spAutoFit/>
-          </a:bodyPr>
-          <a:lstStyle/>
-          <a:p>
-            <a:pPr algn="ctr"/>
-            <a:r>
-              <a:rPr sz="1000" b="1">
-                <a:solidFill>
-                  <a:srgbClr val="2B2B2B"/>
-                </a:solidFill>
-                <a:latin typeface="Calibri"/>
-              </a:rPr>
-              <a:t>ТЕЛО</a:t>
-            </a:r>
-          </a:p>
-        </p:txBody>
-      </p:sp>
-      <p:sp>
-        <p:nvSpPr>
-          <p:cNvPr id="42" name="Мини подпись 1 · база"/>
-          <p:cNvSpPr txBox="1"/>
-          <p:nvPr/>
-        </p:nvSpPr>
-        <p:spPr>
-          <a:xfrm>
-            <a:off x="5545836" y="3227831"/>
-            <a:ext cx="1097280" cy="228600"/>
-          </a:xfrm>
-          <a:prstGeom prst="rect">
-            <a:avLst/>
-          </a:prstGeom>
-          <a:noFill/>
-        </p:spPr>
-        <p:txBody>
-          <a:bodyPr wrap="square" anchor="ctr" lIns="0" rIns="0" tIns="27432" bIns="27432">
-            <a:spAutoFit/>
-          </a:bodyPr>
-          <a:lstStyle/>
-          <a:p>
-            <a:pPr algn="ctr"/>
-            <a:r>
-              <a:rPr sz="1000" b="1">
-                <a:solidFill>
-                  <a:srgbClr val="2B2B2B"/>
-                </a:solidFill>
-                <a:latin typeface="Calibri"/>
-              </a:rPr>
-              <a:t>1 · база</a:t>
-            </a:r>
-          </a:p>
-        </p:txBody>
-      </p:sp>
-      <p:sp>
-        <p:nvSpPr>
-          <p:cNvPr id="43" name="Мини подпись 2 · тепло"/>
-          <p:cNvSpPr txBox="1"/>
-          <p:nvPr/>
-        </p:nvSpPr>
-        <p:spPr>
-          <a:xfrm>
-            <a:off x="5545836" y="2898647"/>
-            <a:ext cx="1097280" cy="228600"/>
-          </a:xfrm>
-          <a:prstGeom prst="rect">
-            <a:avLst/>
-          </a:prstGeom>
-          <a:noFill/>
-        </p:spPr>
-        <p:txBody>
-          <a:bodyPr wrap="square" anchor="ctr" lIns="0" rIns="0" tIns="27432" bIns="27432">
-            <a:spAutoFit/>
-          </a:bodyPr>
-          <a:lstStyle/>
-          <a:p>
-            <a:pPr algn="ctr"/>
-            <a:r>
-              <a:rPr sz="1000" b="1">
-                <a:solidFill>
-                  <a:srgbClr val="FFFFFF"/>
-                </a:solidFill>
-                <a:latin typeface="Calibri"/>
-              </a:rPr>
-              <a:t>2 · тепло</a:t>
-            </a:r>
-          </a:p>
-        </p:txBody>
-      </p:sp>
-      <p:sp>
-        <p:nvSpPr>
-          <p:cNvPr id="44" name="Мини подпись 3 · защита"/>
-          <p:cNvSpPr txBox="1"/>
-          <p:nvPr/>
-        </p:nvSpPr>
-        <p:spPr>
-          <a:xfrm>
-            <a:off x="5545836" y="2542031"/>
-            <a:ext cx="1097280" cy="228600"/>
-          </a:xfrm>
-          <a:prstGeom prst="rect">
-            <a:avLst/>
-          </a:prstGeom>
-          <a:noFill/>
-        </p:spPr>
-        <p:txBody>
-          <a:bodyPr wrap="square" anchor="ctr" lIns="0" rIns="0" tIns="27432" bIns="27432">
-            <a:spAutoFit/>
-          </a:bodyPr>
-          <a:lstStyle/>
-          <a:p>
-            <a:pPr algn="ctr"/>
-            <a:r>
-              <a:rPr sz="1000" b="1">
-                <a:solidFill>
-                  <a:srgbClr val="FFFFFF"/>
-                </a:solidFill>
-                <a:latin typeface="Calibri"/>
-              </a:rPr>
-              <a:t>3 · защита</a:t>
-            </a:r>
-          </a:p>
-        </p:txBody>
-      </p:sp>
-      <p:sp>
-        <p:nvSpPr>
-          <p:cNvPr id="45" name="Мини вывод слоёв"/>
-          <p:cNvSpPr txBox="1"/>
-          <p:nvPr/>
-        </p:nvSpPr>
-        <p:spPr>
-          <a:xfrm>
-            <a:off x="4425696" y="5074920"/>
-            <a:ext cx="3337560" cy="365760"/>
+            <a:off x="4503420" y="2286000"/>
+            <a:ext cx="3200400" cy="3108960"/>
           </a:xfrm>
           <a:prstGeom prst="rect">
             <a:avLst/>
@@ -8030,30 +6930,143 @@
           </a:bodyPr>
           <a:lstStyle/>
           <a:p>
-            <a:pPr algn="ctr"/>
-            <a:r>
-              <a:rPr sz="1200" b="1">
+            <a:pPr algn="l">
+              <a:spcAft>
+                <a:spcPts val="1000"/>
+              </a:spcAft>
+            </a:pPr>
+            <a:r>
+              <a:rPr sz="1400" b="1">
                 <a:solidFill>
                   <a:srgbClr val="2B2B2B"/>
                 </a:solidFill>
                 <a:latin typeface="Calibri"/>
               </a:rPr>
-              <a:t>Сухо, свободно, слоями; без хлопка</a:t>
+              <a:t>1 · база: </a:t>
+            </a:r>
+            <a:r>
+              <a:rPr sz="1400" b="0">
+                <a:solidFill>
+                  <a:srgbClr val="4B4B4B"/>
+                </a:solidFill>
+                <a:latin typeface="Calibri"/>
+              </a:rPr>
+              <a:t>синтетика или шерсть</a:t>
+            </a:r>
+          </a:p>
+          <a:p>
+            <a:pPr algn="l">
+              <a:spcAft>
+                <a:spcPts val="1000"/>
+              </a:spcAft>
+            </a:pPr>
+            <a:r>
+              <a:rPr sz="1400" b="1">
+                <a:solidFill>
+                  <a:srgbClr val="2B2B2B"/>
+                </a:solidFill>
+                <a:latin typeface="Calibri"/>
+              </a:rPr>
+              <a:t>2 · тепло: </a:t>
+            </a:r>
+            <a:r>
+              <a:rPr sz="1400" b="0">
+                <a:solidFill>
+                  <a:srgbClr val="4B4B4B"/>
+                </a:solidFill>
+                <a:latin typeface="Calibri"/>
+              </a:rPr>
+              <a:t>флис, пух, шерсть</a:t>
+            </a:r>
+          </a:p>
+          <a:p>
+            <a:pPr algn="l">
+              <a:spcAft>
+                <a:spcPts val="1000"/>
+              </a:spcAft>
+            </a:pPr>
+            <a:r>
+              <a:rPr sz="1400" b="1">
+                <a:solidFill>
+                  <a:srgbClr val="2B2B2B"/>
+                </a:solidFill>
+                <a:latin typeface="Calibri"/>
+              </a:rPr>
+              <a:t>3 · защита: </a:t>
+            </a:r>
+            <a:r>
+              <a:rPr sz="1400" b="0">
+                <a:solidFill>
+                  <a:srgbClr val="4B4B4B"/>
+                </a:solidFill>
+                <a:latin typeface="Calibri"/>
+              </a:rPr>
+              <a:t>ветро- и влагозащита</a:t>
+            </a:r>
+          </a:p>
+          <a:p>
+            <a:pPr algn="l">
+              <a:spcAft>
+                <a:spcPts val="1000"/>
+              </a:spcAft>
+            </a:pPr>
+            <a:r>
+              <a:rPr sz="1400" b="1">
+                <a:solidFill>
+                  <a:srgbClr val="2B2B2B"/>
+                </a:solidFill>
+                <a:latin typeface="Calibri"/>
+              </a:rPr>
+              <a:t>Руки и ноги: </a:t>
+            </a:r>
+            <a:r>
+              <a:rPr sz="1400" b="0">
+                <a:solidFill>
+                  <a:srgbClr val="4B4B4B"/>
+                </a:solidFill>
+                <a:latin typeface="Calibri"/>
+              </a:rPr>
+              <a:t>рукавицы, обувь на размер больше</a:t>
+            </a:r>
+          </a:p>
+          <a:p>
+            <a:pPr algn="l">
+              <a:spcAft>
+                <a:spcPts val="1000"/>
+              </a:spcAft>
+            </a:pPr>
+            <a:r>
+              <a:rPr sz="1400" b="1">
+                <a:solidFill>
+                  <a:srgbClr val="2B2B2B"/>
+                </a:solidFill>
+                <a:latin typeface="Calibri"/>
+              </a:rPr>
+              <a:t>Правило: </a:t>
+            </a:r>
+            <a:r>
+              <a:rPr sz="1400" b="0">
+                <a:solidFill>
+                  <a:srgbClr val="4B4B4B"/>
+                </a:solidFill>
+                <a:latin typeface="Calibri"/>
+              </a:rPr>
+              <a:t>сухо, без хлопка, не потеть</a:t>
             </a:r>
           </a:p>
         </p:txBody>
       </p:sp>
       <p:graphicFrame>
         <p:nvGraphicFramePr>
-          <p:cNvPr id="46" name="Мини таблица режимов"/>
+          <p:cNvPr id="18" name="Мини таблица режимов"/>
           <p:cNvGraphicFramePr>
             <a:graphicFrameLocks noGrp="1"/>
           </p:cNvGraphicFramePr>
           <p:nvPr/>
         </p:nvGraphicFramePr>
         <p:xfrm>
-          <a:off x="8211312" y="2194560"/>
-          <a:ext cx="3337560" cy="2743200"/>
+          <a:off x="8275320" y="2286000"/>
+          <a:ext cx="3200400" cy="2743200"/>
         </p:xfrm>
         <a:graphic>
           <a:graphicData uri="http://schemas.openxmlformats.org/drawingml/2006/table">
@@ -8062,9 +7075,9 @@
                 <a:tableStyleId>{5C22544A-7EE6-4342-B048-85BDC9FD1C3A}</a:tableStyleId>
               </a:tblPr>
               <a:tblGrid>
-                <a:gridCol w="1325880"/>
-                <a:gridCol w="1005840"/>
-                <a:gridCol w="1005840"/>
+                <a:gridCol w="1280160"/>
+                <a:gridCol w="960120"/>
+                <a:gridCol w="960120"/>
               </a:tblGrid>
               <a:tr h="457200">
                 <a:tc>
@@ -8074,7 +7087,7 @@
                     <a:p>
                       <a:pPr algn="ctr"/>
                       <a:r>
-                        <a:rPr sz="1100" b="1">
+                        <a:rPr sz="1200" b="1">
                           <a:solidFill>
                             <a:srgbClr val="FFED00"/>
                           </a:solidFill>
@@ -8097,7 +7110,7 @@
                     <a:p>
                       <a:pPr algn="ctr"/>
                       <a:r>
-                        <a:rPr sz="1100" b="1">
+                        <a:rPr sz="1200" b="1">
                           <a:solidFill>
                             <a:srgbClr val="FFED00"/>
                           </a:solidFill>
@@ -8120,7 +7133,7 @@
                     <a:p>
                       <a:pPr algn="ctr"/>
                       <a:r>
-                        <a:rPr sz="1100" b="1">
+                        <a:rPr sz="1200" b="1">
                           <a:solidFill>
                             <a:srgbClr val="FFED00"/>
                           </a:solidFill>
@@ -8145,7 +7158,7 @@
                     <a:p>
                       <a:pPr algn="ctr"/>
                       <a:r>
-                        <a:rPr sz="1200" b="1">
+                        <a:rPr sz="1300" b="1">
                           <a:solidFill>
                             <a:srgbClr val="2B2B2B"/>
                           </a:solidFill>
@@ -8168,7 +7181,7 @@
                     <a:p>
                       <a:pPr algn="ctr"/>
                       <a:r>
-                        <a:rPr sz="1200" b="0">
+                        <a:rPr sz="1300" b="0">
                           <a:solidFill>
                             <a:srgbClr val="2B2B2B"/>
                           </a:solidFill>
@@ -8191,7 +7204,7 @@
                     <a:p>
                       <a:pPr algn="ctr"/>
                       <a:r>
-                        <a:rPr sz="1200" b="0">
+                        <a:rPr sz="1300" b="0">
                           <a:solidFill>
                             <a:srgbClr val="2B2B2B"/>
                           </a:solidFill>
@@ -8216,7 +7229,7 @@
                     <a:p>
                       <a:pPr algn="ctr"/>
                       <a:r>
-                        <a:rPr sz="1200" b="1">
+                        <a:rPr sz="1300" b="1">
                           <a:solidFill>
                             <a:srgbClr val="2B2B2B"/>
                           </a:solidFill>
@@ -8239,7 +7252,7 @@
                     <a:p>
                       <a:pPr algn="ctr"/>
                       <a:r>
-                        <a:rPr sz="1200" b="0">
+                        <a:rPr sz="1300" b="0">
                           <a:solidFill>
                             <a:srgbClr val="2B2B2B"/>
                           </a:solidFill>
@@ -8262,7 +7275,7 @@
                     <a:p>
                       <a:pPr algn="ctr"/>
                       <a:r>
-                        <a:rPr sz="1200" b="0">
+                        <a:rPr sz="1300" b="0">
                           <a:solidFill>
                             <a:srgbClr val="2B2B2B"/>
                           </a:solidFill>
@@ -8287,7 +7300,7 @@
                     <a:p>
                       <a:pPr algn="ctr"/>
                       <a:r>
-                        <a:rPr sz="1200" b="1">
+                        <a:rPr sz="1300" b="1">
                           <a:solidFill>
                             <a:srgbClr val="2B2B2B"/>
                           </a:solidFill>
@@ -8310,7 +7323,7 @@
                     <a:p>
                       <a:pPr algn="ctr"/>
                       <a:r>
-                        <a:rPr sz="1200" b="0">
+                        <a:rPr sz="1300" b="0">
                           <a:solidFill>
                             <a:srgbClr val="2B2B2B"/>
                           </a:solidFill>
@@ -8333,7 +7346,7 @@
                     <a:p>
                       <a:pPr algn="ctr"/>
                       <a:r>
-                        <a:rPr sz="1200" b="0">
+                        <a:rPr sz="1300" b="0">
                           <a:solidFill>
                             <a:srgbClr val="2B2B2B"/>
                           </a:solidFill>
@@ -8358,7 +7371,7 @@
                     <a:p>
                       <a:pPr algn="ctr"/>
                       <a:r>
-                        <a:rPr sz="1200" b="1">
+                        <a:rPr sz="1300" b="1">
                           <a:solidFill>
                             <a:srgbClr val="2B2B2B"/>
                           </a:solidFill>
@@ -8381,7 +7394,7 @@
                     <a:p>
                       <a:pPr algn="ctr"/>
                       <a:r>
-                        <a:rPr sz="1200" b="0">
+                        <a:rPr sz="1300" b="0">
                           <a:solidFill>
                             <a:srgbClr val="2B2B2B"/>
                           </a:solidFill>
@@ -8404,7 +7417,7 @@
                     <a:p>
                       <a:pPr algn="ctr"/>
                       <a:r>
-                        <a:rPr sz="1200" b="0">
+                        <a:rPr sz="1300" b="0">
                           <a:solidFill>
                             <a:srgbClr val="2B2B2B"/>
                           </a:solidFill>
@@ -8429,7 +7442,7 @@
                     <a:p>
                       <a:pPr algn="ctr"/>
                       <a:r>
-                        <a:rPr sz="1200" b="1">
+                        <a:rPr sz="1300" b="1">
                           <a:solidFill>
                             <a:srgbClr val="2B2B2B"/>
                           </a:solidFill>
@@ -8452,7 +7465,7 @@
                     <a:p>
                       <a:pPr algn="ctr"/>
                       <a:r>
-                        <a:rPr sz="1200" b="0">
+                        <a:rPr sz="1300" b="0">
                           <a:solidFill>
                             <a:srgbClr val="2B2B2B"/>
                           </a:solidFill>
@@ -8475,7 +7488,7 @@
                     <a:p>
                       <a:pPr algn="ctr"/>
                       <a:r>
-                        <a:rPr sz="1200" b="0">
+                        <a:rPr sz="1300" b="0">
                           <a:solidFill>
                             <a:srgbClr val="2B2B2B"/>
                           </a:solidFill>
@@ -8498,14 +7511,14 @@
       </p:graphicFrame>
       <p:sp>
         <p:nvSpPr>
-          <p:cNvPr id="47" name="Мини примечание"/>
+          <p:cNvPr id="19" name="Мини примечание"/>
           <p:cNvSpPr txBox="1"/>
           <p:nvPr/>
         </p:nvSpPr>
         <p:spPr>
           <a:xfrm>
-            <a:off x="8211312" y="5029200"/>
-            <a:ext cx="3337560" cy="411480"/>
+            <a:off x="8275320" y="5120640"/>
+            <a:ext cx="3200400" cy="365760"/>
           </a:xfrm>
           <a:prstGeom prst="rect">
             <a:avLst/>
@@ -8533,14 +7546,14 @@
       </p:sp>
       <p:sp>
         <p:nvSpPr>
-          <p:cNvPr id="48" name="Девиз плаката"/>
+          <p:cNvPr id="20" name="Девиз плаката"/>
           <p:cNvSpPr/>
           <p:nvPr/>
         </p:nvSpPr>
         <p:spPr>
           <a:xfrm>
-            <a:off x="502920" y="5669280"/>
-            <a:ext cx="11155680" cy="685800"/>
+            <a:off x="594360" y="5715000"/>
+            <a:ext cx="11018520" cy="640080"/>
           </a:xfrm>
           <a:prstGeom prst="roundRect">
             <a:avLst>
@@ -11890,27 +10903,525 @@
           </a:prstGeom>
         </p:spPr>
       </p:pic>
-      <p:sp>
-        <p:nvSpPr>
-          <p:cNvPr id="10" name="Кольцо 50°"/>
+      <p:graphicFrame>
+        <p:nvGraphicFramePr>
+          <p:cNvPr id="10" name="Таблица зон"/>
+          <p:cNvGraphicFramePr>
+            <a:graphicFrameLocks noGrp="1"/>
+          </p:cNvGraphicFramePr>
+          <p:nvPr/>
+        </p:nvGraphicFramePr>
+        <p:xfrm>
+          <a:off x="594360" y="1691640"/>
+          <a:ext cx="11018520" cy="4005072"/>
+        </p:xfrm>
+        <a:graphic>
+          <a:graphicData uri="http://schemas.openxmlformats.org/drawingml/2006/table">
+            <a:tbl>
+              <a:tblPr firstRow="1" bandRow="1">
+                <a:tableStyleId>{5C22544A-7EE6-4342-B048-85BDC9FD1C3A}</a:tableStyleId>
+              </a:tblPr>
+              <a:tblGrid>
+                <a:gridCol w="2286000"/>
+                <a:gridCol w="3566160"/>
+                <a:gridCol w="1600200"/>
+                <a:gridCol w="3566160"/>
+              </a:tblGrid>
+              <a:tr h="457200">
+                <a:tc>
+                  <a:txBody>
+                    <a:bodyPr/>
+                    <a:lstStyle/>
+                    <a:p>
+                      <a:pPr algn="l"/>
+                      <a:r>
+                        <a:rPr sz="1500" b="1">
+                          <a:solidFill>
+                            <a:srgbClr val="FFED00"/>
+                          </a:solidFill>
+                          <a:latin typeface="Calibri"/>
+                        </a:rPr>
+                        <a:t>Зона</a:t>
+                      </a:r>
+                    </a:p>
+                  </a:txBody>
+                  <a:tcPr anchor="ctr">
+                    <a:solidFill>
+                      <a:srgbClr val="2B2B2B"/>
+                    </a:solidFill>
+                  </a:tcPr>
+                </a:tc>
+                <a:tc>
+                  <a:txBody>
+                    <a:bodyPr/>
+                    <a:lstStyle/>
+                    <a:p>
+                      <a:pPr algn="l"/>
+                      <a:r>
+                        <a:rPr sz="1500" b="1">
+                          <a:solidFill>
+                            <a:srgbClr val="FFED00"/>
+                          </a:solidFill>
+                          <a:latin typeface="Calibri"/>
+                        </a:rPr>
+                        <a:t>Где находится</a:t>
+                      </a:r>
+                    </a:p>
+                  </a:txBody>
+                  <a:tcPr anchor="ctr">
+                    <a:solidFill>
+                      <a:srgbClr val="2B2B2B"/>
+                    </a:solidFill>
+                  </a:tcPr>
+                </a:tc>
+                <a:tc>
+                  <a:txBody>
+                    <a:bodyPr/>
+                    <a:lstStyle/>
+                    <a:p>
+                      <a:pPr algn="l"/>
+                      <a:r>
+                        <a:rPr sz="1500" b="1">
+                          <a:solidFill>
+                            <a:srgbClr val="FFED00"/>
+                          </a:solidFill>
+                          <a:latin typeface="Calibri"/>
+                        </a:rPr>
+                        <a:t>Зимой</a:t>
+                      </a:r>
+                    </a:p>
+                  </a:txBody>
+                  <a:tcPr anchor="ctr">
+                    <a:solidFill>
+                      <a:srgbClr val="2B2B2B"/>
+                    </a:solidFill>
+                  </a:tcPr>
+                </a:tc>
+                <a:tc>
+                  <a:txBody>
+                    <a:bodyPr/>
+                    <a:lstStyle/>
+                    <a:p>
+                      <a:pPr algn="l"/>
+                      <a:r>
+                        <a:rPr sz="1500" b="1">
+                          <a:solidFill>
+                            <a:srgbClr val="FFED00"/>
+                          </a:solidFill>
+                          <a:latin typeface="Calibri"/>
+                        </a:rPr>
+                        <a:t>Особенности</a:t>
+                      </a:r>
+                    </a:p>
+                  </a:txBody>
+                  <a:tcPr anchor="ctr">
+                    <a:solidFill>
+                      <a:srgbClr val="2B2B2B"/>
+                    </a:solidFill>
+                  </a:tcPr>
+                </a:tc>
+              </a:tr>
+              <a:tr h="886968">
+                <a:tc>
+                  <a:txBody>
+                    <a:bodyPr/>
+                    <a:lstStyle/>
+                    <a:p>
+                      <a:pPr algn="l"/>
+                      <a:r>
+                        <a:rPr sz="1400" b="1">
+                          <a:solidFill>
+                            <a:srgbClr val="2B2B2B"/>
+                          </a:solidFill>
+                          <a:latin typeface="Calibri"/>
+                        </a:rPr>
+                        <a:t>Арктика</a:t>
+                      </a:r>
+                    </a:p>
+                  </a:txBody>
+                  <a:tcPr anchor="ctr">
+                    <a:solidFill>
+                      <a:srgbClr val="F1F1F1"/>
+                    </a:solidFill>
+                  </a:tcPr>
+                </a:tc>
+                <a:tc>
+                  <a:txBody>
+                    <a:bodyPr/>
+                    <a:lstStyle/>
+                    <a:p>
+                      <a:pPr algn="l"/>
+                      <a:r>
+                        <a:rPr sz="1400" b="0">
+                          <a:solidFill>
+                            <a:srgbClr val="2B2B2B"/>
+                          </a:solidFill>
+                          <a:latin typeface="Calibri"/>
+                        </a:rPr>
+                        <a:t>Арктические острова и побережье севернее ≈ 70° с. ш.</a:t>
+                      </a:r>
+                    </a:p>
+                  </a:txBody>
+                  <a:tcPr anchor="ctr">
+                    <a:solidFill>
+                      <a:srgbClr val="F1F1F1"/>
+                    </a:solidFill>
+                  </a:tcPr>
+                </a:tc>
+                <a:tc>
+                  <a:txBody>
+                    <a:bodyPr/>
+                    <a:lstStyle/>
+                    <a:p>
+                      <a:pPr algn="l"/>
+                      <a:r>
+                        <a:rPr sz="1400" b="1">
+                          <a:solidFill>
+                            <a:srgbClr val="2B2B2B"/>
+                          </a:solidFill>
+                          <a:latin typeface="Calibri"/>
+                        </a:rPr>
+                        <a:t>−40…−55 °C</a:t>
+                      </a:r>
+                    </a:p>
+                  </a:txBody>
+                  <a:tcPr anchor="ctr">
+                    <a:solidFill>
+                      <a:srgbClr val="F1F1F1"/>
+                    </a:solidFill>
+                  </a:tcPr>
+                </a:tc>
+                <a:tc>
+                  <a:txBody>
+                    <a:bodyPr/>
+                    <a:lstStyle/>
+                    <a:p>
+                      <a:pPr algn="l"/>
+                      <a:r>
+                        <a:rPr sz="1400" b="0">
+                          <a:solidFill>
+                            <a:srgbClr val="2B2B2B"/>
+                          </a:solidFill>
+                          <a:latin typeface="Calibri"/>
+                        </a:rPr>
+                        <a:t>Полярная ночь 80–120 и более суток, штормовые ветра, лёд, белые медведи</a:t>
+                      </a:r>
+                    </a:p>
+                  </a:txBody>
+                  <a:tcPr anchor="ctr">
+                    <a:solidFill>
+                      <a:srgbClr val="F1F1F1"/>
+                    </a:solidFill>
+                  </a:tcPr>
+                </a:tc>
+              </a:tr>
+              <a:tr h="886968">
+                <a:tc>
+                  <a:txBody>
+                    <a:bodyPr/>
+                    <a:lstStyle/>
+                    <a:p>
+                      <a:pPr algn="l"/>
+                      <a:r>
+                        <a:rPr sz="1400" b="1">
+                          <a:solidFill>
+                            <a:srgbClr val="2B2B2B"/>
+                          </a:solidFill>
+                          <a:latin typeface="Calibri"/>
+                        </a:rPr>
+                        <a:t>За Полярным кругом</a:t>
+                      </a:r>
+                    </a:p>
+                  </a:txBody>
+                  <a:tcPr anchor="ctr">
+                    <a:solidFill>
+                      <a:srgbClr val="FFFFFF"/>
+                    </a:solidFill>
+                  </a:tcPr>
+                </a:tc>
+                <a:tc>
+                  <a:txBody>
+                    <a:bodyPr/>
+                    <a:lstStyle/>
+                    <a:p>
+                      <a:pPr algn="l"/>
+                      <a:r>
+                        <a:rPr sz="1400" b="0">
+                          <a:solidFill>
+                            <a:srgbClr val="2B2B2B"/>
+                          </a:solidFill>
+                          <a:latin typeface="Calibri"/>
+                        </a:rPr>
+                        <a:t>66,5–70° с. ш.: Мурманск, Воркута, Салехард, Норильск</a:t>
+                      </a:r>
+                    </a:p>
+                  </a:txBody>
+                  <a:tcPr anchor="ctr">
+                    <a:solidFill>
+                      <a:srgbClr val="FFFFFF"/>
+                    </a:solidFill>
+                  </a:tcPr>
+                </a:tc>
+                <a:tc>
+                  <a:txBody>
+                    <a:bodyPr/>
+                    <a:lstStyle/>
+                    <a:p>
+                      <a:pPr algn="l"/>
+                      <a:r>
+                        <a:rPr sz="1400" b="1">
+                          <a:solidFill>
+                            <a:srgbClr val="2B2B2B"/>
+                          </a:solidFill>
+                          <a:latin typeface="Calibri"/>
+                        </a:rPr>
+                        <a:t>−30…−45 °C</a:t>
+                      </a:r>
+                    </a:p>
+                  </a:txBody>
+                  <a:tcPr anchor="ctr">
+                    <a:solidFill>
+                      <a:srgbClr val="FFFFFF"/>
+                    </a:solidFill>
+                  </a:tcPr>
+                </a:tc>
+                <a:tc>
+                  <a:txBody>
+                    <a:bodyPr/>
+                    <a:lstStyle/>
+                    <a:p>
+                      <a:pPr algn="l"/>
+                      <a:r>
+                        <a:rPr sz="1400" b="0">
+                          <a:solidFill>
+                            <a:srgbClr val="2B2B2B"/>
+                          </a:solidFill>
+                          <a:latin typeface="Calibri"/>
+                        </a:rPr>
+                        <a:t>Полярная ночь от 1 до 45 суток, полярный день летом, частые пурги</a:t>
+                      </a:r>
+                    </a:p>
+                  </a:txBody>
+                  <a:tcPr anchor="ctr">
+                    <a:solidFill>
+                      <a:srgbClr val="FFFFFF"/>
+                    </a:solidFill>
+                  </a:tcPr>
+                </a:tc>
+              </a:tr>
+              <a:tr h="886968">
+                <a:tc>
+                  <a:txBody>
+                    <a:bodyPr/>
+                    <a:lstStyle/>
+                    <a:p>
+                      <a:pPr algn="l"/>
+                      <a:r>
+                        <a:rPr sz="1400" b="1">
+                          <a:solidFill>
+                            <a:srgbClr val="2B2B2B"/>
+                          </a:solidFill>
+                          <a:latin typeface="Calibri"/>
+                        </a:rPr>
+                        <a:t>Крайний Север (РКС)</a:t>
+                      </a:r>
+                    </a:p>
+                  </a:txBody>
+                  <a:tcPr anchor="ctr">
+                    <a:solidFill>
+                      <a:srgbClr val="F1F1F1"/>
+                    </a:solidFill>
+                  </a:tcPr>
+                </a:tc>
+                <a:tc>
+                  <a:txBody>
+                    <a:bodyPr/>
+                    <a:lstStyle/>
+                    <a:p>
+                      <a:pPr algn="l"/>
+                      <a:r>
+                        <a:rPr sz="1400" b="0">
+                          <a:solidFill>
+                            <a:srgbClr val="2B2B2B"/>
+                          </a:solidFill>
+                          <a:latin typeface="Calibri"/>
+                        </a:rPr>
+                        <a:t>Якутия, Чукотка, Магадан, север Сибири и Дальнего Востока</a:t>
+                      </a:r>
+                    </a:p>
+                  </a:txBody>
+                  <a:tcPr anchor="ctr">
+                    <a:solidFill>
+                      <a:srgbClr val="F1F1F1"/>
+                    </a:solidFill>
+                  </a:tcPr>
+                </a:tc>
+                <a:tc>
+                  <a:txBody>
+                    <a:bodyPr/>
+                    <a:lstStyle/>
+                    <a:p>
+                      <a:pPr algn="l"/>
+                      <a:r>
+                        <a:rPr sz="1400" b="1">
+                          <a:solidFill>
+                            <a:srgbClr val="2B2B2B"/>
+                          </a:solidFill>
+                          <a:latin typeface="Calibri"/>
+                        </a:rPr>
+                        <a:t>до −50…−67 °C</a:t>
+                      </a:r>
+                    </a:p>
+                  </a:txBody>
+                  <a:tcPr anchor="ctr">
+                    <a:solidFill>
+                      <a:srgbClr val="F1F1F1"/>
+                    </a:solidFill>
+                  </a:tcPr>
+                </a:tc>
+                <a:tc>
+                  <a:txBody>
+                    <a:bodyPr/>
+                    <a:lstStyle/>
+                    <a:p>
+                      <a:pPr algn="l"/>
+                      <a:r>
+                        <a:rPr sz="1400" b="0">
+                          <a:solidFill>
+                            <a:srgbClr val="2B2B2B"/>
+                          </a:solidFill>
+                          <a:latin typeface="Calibri"/>
+                        </a:rPr>
+                        <a:t>Самые низкие температуры в обитаемых местах, резкий континентальный климат</a:t>
+                      </a:r>
+                    </a:p>
+                  </a:txBody>
+                  <a:tcPr anchor="ctr">
+                    <a:solidFill>
+                      <a:srgbClr val="F1F1F1"/>
+                    </a:solidFill>
+                  </a:tcPr>
+                </a:tc>
+              </a:tr>
+              <a:tr h="886968">
+                <a:tc>
+                  <a:txBody>
+                    <a:bodyPr/>
+                    <a:lstStyle/>
+                    <a:p>
+                      <a:pPr algn="l"/>
+                      <a:r>
+                        <a:rPr sz="1400" b="1">
+                          <a:solidFill>
+                            <a:srgbClr val="2B2B2B"/>
+                          </a:solidFill>
+                          <a:latin typeface="Calibri"/>
+                        </a:rPr>
+                        <a:t>Приравненные местности</a:t>
+                      </a:r>
+                    </a:p>
+                  </a:txBody>
+                  <a:tcPr anchor="ctr">
+                    <a:solidFill>
+                      <a:srgbClr val="FFFFFF"/>
+                    </a:solidFill>
+                  </a:tcPr>
+                </a:tc>
+                <a:tc>
+                  <a:txBody>
+                    <a:bodyPr/>
+                    <a:lstStyle/>
+                    <a:p>
+                      <a:pPr algn="l"/>
+                      <a:r>
+                        <a:rPr sz="1400" b="0">
+                          <a:solidFill>
+                            <a:srgbClr val="2B2B2B"/>
+                          </a:solidFill>
+                          <a:latin typeface="Calibri"/>
+                        </a:rPr>
+                        <a:t>Южнее РКС: часть Сибири, Дальнего Востока, севера европейской части</a:t>
+                      </a:r>
+                    </a:p>
+                  </a:txBody>
+                  <a:tcPr anchor="ctr">
+                    <a:solidFill>
+                      <a:srgbClr val="FFFFFF"/>
+                    </a:solidFill>
+                  </a:tcPr>
+                </a:tc>
+                <a:tc>
+                  <a:txBody>
+                    <a:bodyPr/>
+                    <a:lstStyle/>
+                    <a:p>
+                      <a:pPr algn="l"/>
+                      <a:r>
+                        <a:rPr sz="1400" b="1">
+                          <a:solidFill>
+                            <a:srgbClr val="2B2B2B"/>
+                          </a:solidFill>
+                          <a:latin typeface="Calibri"/>
+                        </a:rPr>
+                        <a:t>−25…−40 °C</a:t>
+                      </a:r>
+                    </a:p>
+                  </a:txBody>
+                  <a:tcPr anchor="ctr">
+                    <a:solidFill>
+                      <a:srgbClr val="FFFFFF"/>
+                    </a:solidFill>
+                  </a:tcPr>
+                </a:tc>
+                <a:tc>
+                  <a:txBody>
+                    <a:bodyPr/>
+                    <a:lstStyle/>
+                    <a:p>
+                      <a:pPr algn="l"/>
+                      <a:r>
+                        <a:rPr sz="1400" b="0">
+                          <a:solidFill>
+                            <a:srgbClr val="2B2B2B"/>
+                          </a:solidFill>
+                          <a:latin typeface="Calibri"/>
+                        </a:rPr>
+                        <a:t>Долгая холодная зима, те же гарантии по Трудовому кодексу РФ</a:t>
+                      </a:r>
+                    </a:p>
+                  </a:txBody>
+                  <a:tcPr anchor="ctr">
+                    <a:solidFill>
+                      <a:srgbClr val="FFFFFF"/>
+                    </a:solidFill>
+                  </a:tcPr>
+                </a:tc>
+              </a:tr>
+            </a:tbl>
+          </a:graphicData>
+        </a:graphic>
+      </p:graphicFrame>
+      <p:sp>
+        <p:nvSpPr>
+          <p:cNvPr id="11" name="Пояснение"/>
           <p:cNvSpPr/>
           <p:nvPr/>
         </p:nvSpPr>
         <p:spPr>
           <a:xfrm>
-            <a:off x="640080" y="1691640"/>
-            <a:ext cx="4663440" cy="4663440"/>
-          </a:xfrm>
-          <a:prstGeom prst="ellipse">
-            <a:avLst/>
+            <a:off x="594360" y="5852160"/>
+            <a:ext cx="11018520" cy="502920"/>
+          </a:xfrm>
+          <a:prstGeom prst="roundRect">
+            <a:avLst>
+              <a:gd name="adj" fmla="val 8000"/>
+            </a:avLst>
           </a:prstGeom>
           <a:solidFill>
-            <a:srgbClr val="E9E9E9"/>
+            <a:srgbClr val="FFED00"/>
           </a:solidFill>
-          <a:ln w="19050">
-            <a:solidFill>
-              <a:srgbClr val="FFFFFF"/>
-            </a:solidFill>
+          <a:ln>
+            <a:noFill/>
           </a:ln>
           <a:effectLst/>
         </p:spPr>
@@ -11929,1653 +11440,18 @@
           </a:fontRef>
         </p:style>
         <p:txBody>
-          <a:bodyPr rtlCol="0" anchor="ctr"/>
+          <a:bodyPr rtlCol="0" anchor="ctr" wrap="square" lIns="109728" rIns="109728" tIns="27432" bIns="27432"/>
           <a:lstStyle/>
           <a:p>
             <a:pPr algn="ctr"/>
-          </a:p>
-        </p:txBody>
-      </p:sp>
-      <p:sp>
-        <p:nvSpPr>
-          <p:cNvPr id="11" name="Кольцо 60°"/>
-          <p:cNvSpPr/>
-          <p:nvPr/>
-        </p:nvSpPr>
-        <p:spPr>
-          <a:xfrm>
-            <a:off x="1223010" y="2274570"/>
-            <a:ext cx="3497579" cy="3497579"/>
-          </a:xfrm>
-          <a:prstGeom prst="ellipse">
-            <a:avLst/>
-          </a:prstGeom>
-          <a:solidFill>
-            <a:srgbClr val="FFF7B0"/>
-          </a:solidFill>
-          <a:ln w="19050">
-            <a:solidFill>
-              <a:srgbClr val="FFFFFF"/>
-            </a:solidFill>
-          </a:ln>
-          <a:effectLst/>
-        </p:spPr>
-        <p:style>
-          <a:lnRef idx="1">
-            <a:schemeClr val="accent1"/>
-          </a:lnRef>
-          <a:fillRef idx="3">
-            <a:schemeClr val="accent1"/>
-          </a:fillRef>
-          <a:effectRef idx="2">
-            <a:schemeClr val="accent1"/>
-          </a:effectRef>
-          <a:fontRef idx="minor">
-            <a:schemeClr val="lt1"/>
-          </a:fontRef>
-        </p:style>
-        <p:txBody>
-          <a:bodyPr rtlCol="0" anchor="ctr"/>
-          <a:lstStyle/>
-          <a:p>
-            <a:pPr algn="ctr"/>
-          </a:p>
-        </p:txBody>
-      </p:sp>
-      <p:sp>
-        <p:nvSpPr>
-          <p:cNvPr id="12" name="Кольцо 66.5°"/>
-          <p:cNvSpPr/>
-          <p:nvPr/>
-        </p:nvSpPr>
-        <p:spPr>
-          <a:xfrm>
-            <a:off x="1601914" y="2653474"/>
-            <a:ext cx="2739771" cy="2739771"/>
-          </a:xfrm>
-          <a:prstGeom prst="ellipse">
-            <a:avLst/>
-          </a:prstGeom>
-          <a:solidFill>
-            <a:srgbClr val="FFED00"/>
-          </a:solidFill>
-          <a:ln w="19050">
-            <a:solidFill>
-              <a:srgbClr val="FFFFFF"/>
-            </a:solidFill>
-          </a:ln>
-          <a:effectLst/>
-        </p:spPr>
-        <p:style>
-          <a:lnRef idx="1">
-            <a:schemeClr val="accent1"/>
-          </a:lnRef>
-          <a:fillRef idx="3">
-            <a:schemeClr val="accent1"/>
-          </a:fillRef>
-          <a:effectRef idx="2">
-            <a:schemeClr val="accent1"/>
-          </a:effectRef>
-          <a:fontRef idx="minor">
-            <a:schemeClr val="lt1"/>
-          </a:fontRef>
-        </p:style>
-        <p:txBody>
-          <a:bodyPr rtlCol="0" anchor="ctr"/>
-          <a:lstStyle/>
-          <a:p>
-            <a:pPr algn="ctr"/>
-          </a:p>
-        </p:txBody>
-      </p:sp>
-      <p:sp>
-        <p:nvSpPr>
-          <p:cNvPr id="13" name="Кольцо 80°"/>
-          <p:cNvSpPr/>
-          <p:nvPr/>
-        </p:nvSpPr>
-        <p:spPr>
-          <a:xfrm>
-            <a:off x="2388870" y="3440430"/>
-            <a:ext cx="1165860" cy="1165860"/>
-          </a:xfrm>
-          <a:prstGeom prst="ellipse">
-            <a:avLst/>
-          </a:prstGeom>
-          <a:solidFill>
-            <a:srgbClr val="4B4B4B"/>
-          </a:solidFill>
-          <a:ln w="19050">
-            <a:solidFill>
-              <a:srgbClr val="FFFFFF"/>
-            </a:solidFill>
-          </a:ln>
-          <a:effectLst/>
-        </p:spPr>
-        <p:style>
-          <a:lnRef idx="1">
-            <a:schemeClr val="accent1"/>
-          </a:lnRef>
-          <a:fillRef idx="3">
-            <a:schemeClr val="accent1"/>
-          </a:fillRef>
-          <a:effectRef idx="2">
-            <a:schemeClr val="accent1"/>
-          </a:effectRef>
-          <a:fontRef idx="minor">
-            <a:schemeClr val="lt1"/>
-          </a:fontRef>
-        </p:style>
-        <p:txBody>
-          <a:bodyPr rtlCol="0" anchor="ctr"/>
-          <a:lstStyle/>
-          <a:p>
-            <a:pPr algn="ctr"/>
-          </a:p>
-        </p:txBody>
-      </p:sp>
-      <p:cxnSp>
-        <p:nvCxnSpPr>
-          <p:cNvPr id="14" name="Меридиан 0"/>
-          <p:cNvCxnSpPr/>
-          <p:nvPr/>
-        </p:nvCxnSpPr>
-        <p:spPr>
-          <a:xfrm>
-            <a:off x="2971800" y="4606290"/>
-            <a:ext cx="0" cy="1748790"/>
-          </a:xfrm>
-          <a:prstGeom prst="line">
-            <a:avLst/>
-          </a:prstGeom>
-          <a:ln w="6350">
-            <a:solidFill>
-              <a:srgbClr val="FFFFFF"/>
-            </a:solidFill>
-          </a:ln>
-        </p:spPr>
-        <p:style>
-          <a:lnRef idx="2">
-            <a:schemeClr val="accent1"/>
-          </a:lnRef>
-          <a:fillRef idx="0">
-            <a:schemeClr val="accent1"/>
-          </a:fillRef>
-          <a:effectRef idx="1">
-            <a:schemeClr val="accent1"/>
-          </a:effectRef>
-          <a:fontRef idx="minor">
-            <a:schemeClr val="tx1"/>
-          </a:fontRef>
-        </p:style>
-      </p:cxnSp>
-      <p:cxnSp>
-        <p:nvCxnSpPr>
-          <p:cNvPr id="15" name="Меридиан 45"/>
-          <p:cNvCxnSpPr/>
-          <p:nvPr/>
-        </p:nvCxnSpPr>
-        <p:spPr>
-          <a:xfrm>
-            <a:off x="3383993" y="4435553"/>
-            <a:ext cx="1236582" cy="1236582"/>
-          </a:xfrm>
-          <a:prstGeom prst="line">
-            <a:avLst/>
-          </a:prstGeom>
-          <a:ln w="6350">
-            <a:solidFill>
-              <a:srgbClr val="FFFFFF"/>
-            </a:solidFill>
-          </a:ln>
-        </p:spPr>
-        <p:style>
-          <a:lnRef idx="2">
-            <a:schemeClr val="accent1"/>
-          </a:lnRef>
-          <a:fillRef idx="0">
-            <a:schemeClr val="accent1"/>
-          </a:fillRef>
-          <a:effectRef idx="1">
-            <a:schemeClr val="accent1"/>
-          </a:effectRef>
-          <a:fontRef idx="minor">
-            <a:schemeClr val="tx1"/>
-          </a:fontRef>
-        </p:style>
-      </p:cxnSp>
-      <p:cxnSp>
-        <p:nvCxnSpPr>
-          <p:cNvPr id="16" name="Меридиан 90"/>
-          <p:cNvCxnSpPr/>
-          <p:nvPr/>
-        </p:nvCxnSpPr>
-        <p:spPr>
-          <a:xfrm>
-            <a:off x="3554730" y="4023360"/>
-            <a:ext cx="1748790" cy="0"/>
-          </a:xfrm>
-          <a:prstGeom prst="line">
-            <a:avLst/>
-          </a:prstGeom>
-          <a:ln w="6350">
-            <a:solidFill>
-              <a:srgbClr val="FFFFFF"/>
-            </a:solidFill>
-          </a:ln>
-        </p:spPr>
-        <p:style>
-          <a:lnRef idx="2">
-            <a:schemeClr val="accent1"/>
-          </a:lnRef>
-          <a:fillRef idx="0">
-            <a:schemeClr val="accent1"/>
-          </a:fillRef>
-          <a:effectRef idx="1">
-            <a:schemeClr val="accent1"/>
-          </a:effectRef>
-          <a:fontRef idx="minor">
-            <a:schemeClr val="tx1"/>
-          </a:fontRef>
-        </p:style>
-      </p:cxnSp>
-      <p:cxnSp>
-        <p:nvCxnSpPr>
-          <p:cNvPr id="17" name="Меридиан 135"/>
-          <p:cNvCxnSpPr/>
-          <p:nvPr/>
-        </p:nvCxnSpPr>
-        <p:spPr>
-          <a:xfrm flipV="1">
-            <a:off x="3383993" y="2374584"/>
-            <a:ext cx="1236582" cy="1236582"/>
-          </a:xfrm>
-          <a:prstGeom prst="line">
-            <a:avLst/>
-          </a:prstGeom>
-          <a:ln w="6350">
-            <a:solidFill>
-              <a:srgbClr val="FFFFFF"/>
-            </a:solidFill>
-          </a:ln>
-        </p:spPr>
-        <p:style>
-          <a:lnRef idx="2">
-            <a:schemeClr val="accent1"/>
-          </a:lnRef>
-          <a:fillRef idx="0">
-            <a:schemeClr val="accent1"/>
-          </a:fillRef>
-          <a:effectRef idx="1">
-            <a:schemeClr val="accent1"/>
-          </a:effectRef>
-          <a:fontRef idx="minor">
-            <a:schemeClr val="tx1"/>
-          </a:fontRef>
-        </p:style>
-      </p:cxnSp>
-      <p:cxnSp>
-        <p:nvCxnSpPr>
-          <p:cNvPr id="18" name="Меридиан 180"/>
-          <p:cNvCxnSpPr/>
-          <p:nvPr/>
-        </p:nvCxnSpPr>
-        <p:spPr>
-          <a:xfrm flipV="1">
-            <a:off x="2971800" y="1691640"/>
-            <a:ext cx="0" cy="1748790"/>
-          </a:xfrm>
-          <a:prstGeom prst="line">
-            <a:avLst/>
-          </a:prstGeom>
-          <a:ln w="6350">
-            <a:solidFill>
-              <a:srgbClr val="FFFFFF"/>
-            </a:solidFill>
-          </a:ln>
-        </p:spPr>
-        <p:style>
-          <a:lnRef idx="2">
-            <a:schemeClr val="accent1"/>
-          </a:lnRef>
-          <a:fillRef idx="0">
-            <a:schemeClr val="accent1"/>
-          </a:fillRef>
-          <a:effectRef idx="1">
-            <a:schemeClr val="accent1"/>
-          </a:effectRef>
-          <a:fontRef idx="minor">
-            <a:schemeClr val="tx1"/>
-          </a:fontRef>
-        </p:style>
-      </p:cxnSp>
-      <p:cxnSp>
-        <p:nvCxnSpPr>
-          <p:cNvPr id="19" name="Меридиан 225"/>
-          <p:cNvCxnSpPr/>
-          <p:nvPr/>
-        </p:nvCxnSpPr>
-        <p:spPr>
-          <a:xfrm flipH="1" flipV="1">
-            <a:off x="1323024" y="2374584"/>
-            <a:ext cx="1236582" cy="1236582"/>
-          </a:xfrm>
-          <a:prstGeom prst="line">
-            <a:avLst/>
-          </a:prstGeom>
-          <a:ln w="6350">
-            <a:solidFill>
-              <a:srgbClr val="FFFFFF"/>
-            </a:solidFill>
-          </a:ln>
-        </p:spPr>
-        <p:style>
-          <a:lnRef idx="2">
-            <a:schemeClr val="accent1"/>
-          </a:lnRef>
-          <a:fillRef idx="0">
-            <a:schemeClr val="accent1"/>
-          </a:fillRef>
-          <a:effectRef idx="1">
-            <a:schemeClr val="accent1"/>
-          </a:effectRef>
-          <a:fontRef idx="minor">
-            <a:schemeClr val="tx1"/>
-          </a:fontRef>
-        </p:style>
-      </p:cxnSp>
-      <p:cxnSp>
-        <p:nvCxnSpPr>
-          <p:cNvPr id="20" name="Меридиан 270"/>
-          <p:cNvCxnSpPr/>
-          <p:nvPr/>
-        </p:nvCxnSpPr>
-        <p:spPr>
-          <a:xfrm flipH="1" flipV="1">
-            <a:off x="640080" y="4023359"/>
-            <a:ext cx="1748790" cy="1"/>
-          </a:xfrm>
-          <a:prstGeom prst="line">
-            <a:avLst/>
-          </a:prstGeom>
-          <a:ln w="6350">
-            <a:solidFill>
-              <a:srgbClr val="FFFFFF"/>
-            </a:solidFill>
-          </a:ln>
-        </p:spPr>
-        <p:style>
-          <a:lnRef idx="2">
-            <a:schemeClr val="accent1"/>
-          </a:lnRef>
-          <a:fillRef idx="0">
-            <a:schemeClr val="accent1"/>
-          </a:fillRef>
-          <a:effectRef idx="1">
-            <a:schemeClr val="accent1"/>
-          </a:effectRef>
-          <a:fontRef idx="minor">
-            <a:schemeClr val="tx1"/>
-          </a:fontRef>
-        </p:style>
-      </p:cxnSp>
-      <p:cxnSp>
-        <p:nvCxnSpPr>
-          <p:cNvPr id="21" name="Меридиан 315"/>
-          <p:cNvCxnSpPr/>
-          <p:nvPr/>
-        </p:nvCxnSpPr>
-        <p:spPr>
-          <a:xfrm flipH="1">
-            <a:off x="1323024" y="4435553"/>
-            <a:ext cx="1236582" cy="1236582"/>
-          </a:xfrm>
-          <a:prstGeom prst="line">
-            <a:avLst/>
-          </a:prstGeom>
-          <a:ln w="6350">
-            <a:solidFill>
-              <a:srgbClr val="FFFFFF"/>
-            </a:solidFill>
-          </a:ln>
-        </p:spPr>
-        <p:style>
-          <a:lnRef idx="2">
-            <a:schemeClr val="accent1"/>
-          </a:lnRef>
-          <a:fillRef idx="0">
-            <a:schemeClr val="accent1"/>
-          </a:fillRef>
-          <a:effectRef idx="1">
-            <a:schemeClr val="accent1"/>
-          </a:effectRef>
-          <a:fontRef idx="minor">
-            <a:schemeClr val="tx1"/>
-          </a:fontRef>
-        </p:style>
-      </p:cxnSp>
-      <p:sp>
-        <p:nvSpPr>
-          <p:cNvPr id="22" name="Точка Мурманск"/>
-          <p:cNvSpPr/>
-          <p:nvPr/>
-        </p:nvSpPr>
-        <p:spPr>
-          <a:xfrm>
-            <a:off x="3586403" y="4995456"/>
-            <a:ext cx="109728" cy="109728"/>
-          </a:xfrm>
-          <a:prstGeom prst="ellipse">
-            <a:avLst/>
-          </a:prstGeom>
-          <a:solidFill>
-            <a:srgbClr val="2B2B2B"/>
-          </a:solidFill>
-          <a:ln w="12700">
-            <a:solidFill>
-              <a:srgbClr val="FFFFFF"/>
-            </a:solidFill>
-          </a:ln>
-          <a:effectLst/>
-        </p:spPr>
-        <p:style>
-          <a:lnRef idx="1">
-            <a:schemeClr val="accent1"/>
-          </a:lnRef>
-          <a:fillRef idx="3">
-            <a:schemeClr val="accent1"/>
-          </a:fillRef>
-          <a:effectRef idx="2">
-            <a:schemeClr val="accent1"/>
-          </a:effectRef>
-          <a:fontRef idx="minor">
-            <a:schemeClr val="lt1"/>
-          </a:fontRef>
-        </p:style>
-        <p:txBody>
-          <a:bodyPr rtlCol="0" anchor="ctr"/>
-          <a:lstStyle/>
-          <a:p>
-            <a:pPr algn="ctr"/>
-          </a:p>
-        </p:txBody>
-      </p:sp>
-      <p:sp>
-        <p:nvSpPr>
-          <p:cNvPr id="23" name="Подпись Мурманск"/>
-          <p:cNvSpPr txBox="1"/>
-          <p:nvPr/>
-        </p:nvSpPr>
-        <p:spPr>
-          <a:xfrm>
-            <a:off x="3705275" y="4940592"/>
-            <a:ext cx="676656" cy="219456"/>
-          </a:xfrm>
-          <a:prstGeom prst="rect">
-            <a:avLst/>
-          </a:prstGeom>
-          <a:noFill/>
-        </p:spPr>
-        <p:txBody>
-          <a:bodyPr wrap="square" anchor="t" lIns="18288" rIns="18288" tIns="27432" bIns="27432">
-            <a:spAutoFit/>
-          </a:bodyPr>
-          <a:lstStyle/>
-          <a:p>
-            <a:pPr algn="l"/>
-            <a:r>
-              <a:rPr sz="1000" b="1">
+            <a:r>
+              <a:rPr sz="1300" b="1">
                 <a:solidFill>
                   <a:srgbClr val="2B2B2B"/>
                 </a:solidFill>
                 <a:latin typeface="Calibri"/>
               </a:rPr>
-              <a:t>Мурманск</a:t>
-            </a:r>
-          </a:p>
-        </p:txBody>
-      </p:sp>
-      <p:sp>
-        <p:nvSpPr>
-          <p:cNvPr id="24" name="Точка Архангельск"/>
-          <p:cNvSpPr/>
-          <p:nvPr/>
-        </p:nvSpPr>
-        <p:spPr>
-          <a:xfrm>
-            <a:off x="3882322" y="5098817"/>
-            <a:ext cx="109728" cy="109728"/>
-          </a:xfrm>
-          <a:prstGeom prst="ellipse">
-            <a:avLst/>
-          </a:prstGeom>
-          <a:solidFill>
-            <a:srgbClr val="2B2B2B"/>
-          </a:solidFill>
-          <a:ln w="12700">
-            <a:solidFill>
-              <a:srgbClr val="FFFFFF"/>
-            </a:solidFill>
-          </a:ln>
-          <a:effectLst/>
-        </p:spPr>
-        <p:style>
-          <a:lnRef idx="1">
-            <a:schemeClr val="accent1"/>
-          </a:lnRef>
-          <a:fillRef idx="3">
-            <a:schemeClr val="accent1"/>
-          </a:fillRef>
-          <a:effectRef idx="2">
-            <a:schemeClr val="accent1"/>
-          </a:effectRef>
-          <a:fontRef idx="minor">
-            <a:schemeClr val="lt1"/>
-          </a:fontRef>
-        </p:style>
-        <p:txBody>
-          <a:bodyPr rtlCol="0" anchor="ctr"/>
-          <a:lstStyle/>
-          <a:p>
-            <a:pPr algn="ctr"/>
-          </a:p>
-        </p:txBody>
-      </p:sp>
-      <p:sp>
-        <p:nvSpPr>
-          <p:cNvPr id="25" name="Подпись Архангельск"/>
-          <p:cNvSpPr txBox="1"/>
-          <p:nvPr/>
-        </p:nvSpPr>
-        <p:spPr>
-          <a:xfrm>
-            <a:off x="4001194" y="5043953"/>
-            <a:ext cx="896112" cy="219456"/>
-          </a:xfrm>
-          <a:prstGeom prst="rect">
-            <a:avLst/>
-          </a:prstGeom>
-          <a:noFill/>
-        </p:spPr>
-        <p:txBody>
-          <a:bodyPr wrap="square" anchor="t" lIns="18288" rIns="18288" tIns="27432" bIns="27432">
-            <a:spAutoFit/>
-          </a:bodyPr>
-          <a:lstStyle/>
-          <a:p>
-            <a:pPr algn="l"/>
-            <a:r>
-              <a:rPr sz="1000" b="1">
-                <a:solidFill>
-                  <a:srgbClr val="2B2B2B"/>
-                </a:solidFill>
-                <a:latin typeface="Calibri"/>
-              </a:rPr>
-              <a:t>Архангельск</a:t>
-            </a:r>
-          </a:p>
-        </p:txBody>
-      </p:sp>
-      <p:sp>
-        <p:nvSpPr>
-          <p:cNvPr id="26" name="Точка Воркута"/>
-          <p:cNvSpPr/>
-          <p:nvPr/>
-        </p:nvSpPr>
-        <p:spPr>
-          <a:xfrm>
-            <a:off x="4095787" y="4543460"/>
-            <a:ext cx="109728" cy="109728"/>
-          </a:xfrm>
-          <a:prstGeom prst="ellipse">
-            <a:avLst/>
-          </a:prstGeom>
-          <a:solidFill>
-            <a:srgbClr val="2B2B2B"/>
-          </a:solidFill>
-          <a:ln w="12700">
-            <a:solidFill>
-              <a:srgbClr val="FFFFFF"/>
-            </a:solidFill>
-          </a:ln>
-          <a:effectLst/>
-        </p:spPr>
-        <p:style>
-          <a:lnRef idx="1">
-            <a:schemeClr val="accent1"/>
-          </a:lnRef>
-          <a:fillRef idx="3">
-            <a:schemeClr val="accent1"/>
-          </a:fillRef>
-          <a:effectRef idx="2">
-            <a:schemeClr val="accent1"/>
-          </a:effectRef>
-          <a:fontRef idx="minor">
-            <a:schemeClr val="lt1"/>
-          </a:fontRef>
-        </p:style>
-        <p:txBody>
-          <a:bodyPr rtlCol="0" anchor="ctr"/>
-          <a:lstStyle/>
-          <a:p>
-            <a:pPr algn="ctr"/>
-          </a:p>
-        </p:txBody>
-      </p:sp>
-      <p:sp>
-        <p:nvSpPr>
-          <p:cNvPr id="27" name="Подпись Воркута"/>
-          <p:cNvSpPr txBox="1"/>
-          <p:nvPr/>
-        </p:nvSpPr>
-        <p:spPr>
-          <a:xfrm>
-            <a:off x="4214659" y="4488596"/>
-            <a:ext cx="603504" cy="219456"/>
-          </a:xfrm>
-          <a:prstGeom prst="rect">
-            <a:avLst/>
-          </a:prstGeom>
-          <a:noFill/>
-        </p:spPr>
-        <p:txBody>
-          <a:bodyPr wrap="square" anchor="t" lIns="18288" rIns="18288" tIns="27432" bIns="27432">
-            <a:spAutoFit/>
-          </a:bodyPr>
-          <a:lstStyle/>
-          <a:p>
-            <a:pPr algn="l"/>
-            <a:r>
-              <a:rPr sz="1000" b="1">
-                <a:solidFill>
-                  <a:srgbClr val="2B2B2B"/>
-                </a:solidFill>
-                <a:latin typeface="Calibri"/>
-              </a:rPr>
-              <a:t>Воркута</a:t>
-            </a:r>
-          </a:p>
-        </p:txBody>
-      </p:sp>
-      <p:sp>
-        <p:nvSpPr>
-          <p:cNvPr id="28" name="Точка Диксон"/>
-          <p:cNvSpPr/>
-          <p:nvPr/>
-        </p:nvSpPr>
-        <p:spPr>
-          <a:xfrm>
-            <a:off x="3865579" y="4127244"/>
-            <a:ext cx="109728" cy="109728"/>
-          </a:xfrm>
-          <a:prstGeom prst="ellipse">
-            <a:avLst/>
-          </a:prstGeom>
-          <a:solidFill>
-            <a:srgbClr val="2B2B2B"/>
-          </a:solidFill>
-          <a:ln w="12700">
-            <a:solidFill>
-              <a:srgbClr val="FFFFFF"/>
-            </a:solidFill>
-          </a:ln>
-          <a:effectLst/>
-        </p:spPr>
-        <p:style>
-          <a:lnRef idx="1">
-            <a:schemeClr val="accent1"/>
-          </a:lnRef>
-          <a:fillRef idx="3">
-            <a:schemeClr val="accent1"/>
-          </a:fillRef>
-          <a:effectRef idx="2">
-            <a:schemeClr val="accent1"/>
-          </a:effectRef>
-          <a:fontRef idx="minor">
-            <a:schemeClr val="lt1"/>
-          </a:fontRef>
-        </p:style>
-        <p:txBody>
-          <a:bodyPr rtlCol="0" anchor="ctr"/>
-          <a:lstStyle/>
-          <a:p>
-            <a:pPr algn="ctr"/>
-          </a:p>
-        </p:txBody>
-      </p:sp>
-      <p:sp>
-        <p:nvSpPr>
-          <p:cNvPr id="29" name="Подпись Диксон"/>
-          <p:cNvSpPr txBox="1"/>
-          <p:nvPr/>
-        </p:nvSpPr>
-        <p:spPr>
-          <a:xfrm>
-            <a:off x="3984451" y="4072380"/>
-            <a:ext cx="530352" cy="219456"/>
-          </a:xfrm>
-          <a:prstGeom prst="rect">
-            <a:avLst/>
-          </a:prstGeom>
-          <a:noFill/>
-        </p:spPr>
-        <p:txBody>
-          <a:bodyPr wrap="square" anchor="t" lIns="18288" rIns="18288" tIns="27432" bIns="27432">
-            <a:spAutoFit/>
-          </a:bodyPr>
-          <a:lstStyle/>
-          <a:p>
-            <a:pPr algn="l"/>
-            <a:r>
-              <a:rPr sz="1000" b="1">
-                <a:solidFill>
-                  <a:srgbClr val="2B2B2B"/>
-                </a:solidFill>
-                <a:latin typeface="Calibri"/>
-              </a:rPr>
-              <a:t>Диксон</a:t>
-            </a:r>
-          </a:p>
-        </p:txBody>
-      </p:sp>
-      <p:sp>
-        <p:nvSpPr>
-          <p:cNvPr id="30" name="Точка Норильск"/>
-          <p:cNvSpPr/>
-          <p:nvPr/>
-        </p:nvSpPr>
-        <p:spPr>
-          <a:xfrm>
-            <a:off x="4120092" y="4006306"/>
-            <a:ext cx="109728" cy="109728"/>
-          </a:xfrm>
-          <a:prstGeom prst="ellipse">
-            <a:avLst/>
-          </a:prstGeom>
-          <a:solidFill>
-            <a:srgbClr val="2B2B2B"/>
-          </a:solidFill>
-          <a:ln w="12700">
-            <a:solidFill>
-              <a:srgbClr val="FFFFFF"/>
-            </a:solidFill>
-          </a:ln>
-          <a:effectLst/>
-        </p:spPr>
-        <p:style>
-          <a:lnRef idx="1">
-            <a:schemeClr val="accent1"/>
-          </a:lnRef>
-          <a:fillRef idx="3">
-            <a:schemeClr val="accent1"/>
-          </a:fillRef>
-          <a:effectRef idx="2">
-            <a:schemeClr val="accent1"/>
-          </a:effectRef>
-          <a:fontRef idx="minor">
-            <a:schemeClr val="lt1"/>
-          </a:fontRef>
-        </p:style>
-        <p:txBody>
-          <a:bodyPr rtlCol="0" anchor="ctr"/>
-          <a:lstStyle/>
-          <a:p>
-            <a:pPr algn="ctr"/>
-          </a:p>
-        </p:txBody>
-      </p:sp>
-      <p:sp>
-        <p:nvSpPr>
-          <p:cNvPr id="31" name="Подпись Норильск"/>
-          <p:cNvSpPr txBox="1"/>
-          <p:nvPr/>
-        </p:nvSpPr>
-        <p:spPr>
-          <a:xfrm>
-            <a:off x="4238964" y="3951442"/>
-            <a:ext cx="676656" cy="219456"/>
-          </a:xfrm>
-          <a:prstGeom prst="rect">
-            <a:avLst/>
-          </a:prstGeom>
-          <a:noFill/>
-        </p:spPr>
-        <p:txBody>
-          <a:bodyPr wrap="square" anchor="t" lIns="18288" rIns="18288" tIns="27432" bIns="27432">
-            <a:spAutoFit/>
-          </a:bodyPr>
-          <a:lstStyle/>
-          <a:p>
-            <a:pPr algn="l"/>
-            <a:r>
-              <a:rPr sz="1000" b="1">
-                <a:solidFill>
-                  <a:srgbClr val="2B2B2B"/>
-                </a:solidFill>
-                <a:latin typeface="Calibri"/>
-              </a:rPr>
-              <a:t>Норильск</a:t>
-            </a:r>
-          </a:p>
-        </p:txBody>
-      </p:sp>
-      <p:sp>
-        <p:nvSpPr>
-          <p:cNvPr id="32" name="Точка Тикси"/>
-          <p:cNvSpPr/>
-          <p:nvPr/>
-        </p:nvSpPr>
-        <p:spPr>
-          <a:xfrm>
-            <a:off x="3751672" y="3294948"/>
-            <a:ext cx="109728" cy="109728"/>
-          </a:xfrm>
-          <a:prstGeom prst="ellipse">
-            <a:avLst/>
-          </a:prstGeom>
-          <a:solidFill>
-            <a:srgbClr val="2B2B2B"/>
-          </a:solidFill>
-          <a:ln w="12700">
-            <a:solidFill>
-              <a:srgbClr val="FFFFFF"/>
-            </a:solidFill>
-          </a:ln>
-          <a:effectLst/>
-        </p:spPr>
-        <p:style>
-          <a:lnRef idx="1">
-            <a:schemeClr val="accent1"/>
-          </a:lnRef>
-          <a:fillRef idx="3">
-            <a:schemeClr val="accent1"/>
-          </a:fillRef>
-          <a:effectRef idx="2">
-            <a:schemeClr val="accent1"/>
-          </a:effectRef>
-          <a:fontRef idx="minor">
-            <a:schemeClr val="lt1"/>
-          </a:fontRef>
-        </p:style>
-        <p:txBody>
-          <a:bodyPr rtlCol="0" anchor="ctr"/>
-          <a:lstStyle/>
-          <a:p>
-            <a:pPr algn="ctr"/>
-          </a:p>
-        </p:txBody>
-      </p:sp>
-      <p:sp>
-        <p:nvSpPr>
-          <p:cNvPr id="33" name="Подпись Тикси"/>
-          <p:cNvSpPr txBox="1"/>
-          <p:nvPr/>
-        </p:nvSpPr>
-        <p:spPr>
-          <a:xfrm>
-            <a:off x="3870544" y="3240084"/>
-            <a:ext cx="457200" cy="219456"/>
-          </a:xfrm>
-          <a:prstGeom prst="rect">
-            <a:avLst/>
-          </a:prstGeom>
-          <a:noFill/>
-        </p:spPr>
-        <p:txBody>
-          <a:bodyPr wrap="square" anchor="t" lIns="18288" rIns="18288" tIns="27432" bIns="27432">
-            <a:spAutoFit/>
-          </a:bodyPr>
-          <a:lstStyle/>
-          <a:p>
-            <a:pPr algn="l"/>
-            <a:r>
-              <a:rPr sz="1000" b="1">
-                <a:solidFill>
-                  <a:srgbClr val="2B2B2B"/>
-                </a:solidFill>
-                <a:latin typeface="Calibri"/>
-              </a:rPr>
-              <a:t>Тикси</a:t>
-            </a:r>
-          </a:p>
-        </p:txBody>
-      </p:sp>
-      <p:sp>
-        <p:nvSpPr>
-          <p:cNvPr id="34" name="Точка Якутск"/>
-          <p:cNvSpPr/>
-          <p:nvPr/>
-        </p:nvSpPr>
-        <p:spPr>
-          <a:xfrm>
-            <a:off x="4172753" y="2925896"/>
-            <a:ext cx="109728" cy="109728"/>
-          </a:xfrm>
-          <a:prstGeom prst="ellipse">
-            <a:avLst/>
-          </a:prstGeom>
-          <a:solidFill>
-            <a:srgbClr val="2B2B2B"/>
-          </a:solidFill>
-          <a:ln w="12700">
-            <a:solidFill>
-              <a:srgbClr val="FFFFFF"/>
-            </a:solidFill>
-          </a:ln>
-          <a:effectLst/>
-        </p:spPr>
-        <p:style>
-          <a:lnRef idx="1">
-            <a:schemeClr val="accent1"/>
-          </a:lnRef>
-          <a:fillRef idx="3">
-            <a:schemeClr val="accent1"/>
-          </a:fillRef>
-          <a:effectRef idx="2">
-            <a:schemeClr val="accent1"/>
-          </a:effectRef>
-          <a:fontRef idx="minor">
-            <a:schemeClr val="lt1"/>
-          </a:fontRef>
-        </p:style>
-        <p:txBody>
-          <a:bodyPr rtlCol="0" anchor="ctr"/>
-          <a:lstStyle/>
-          <a:p>
-            <a:pPr algn="ctr"/>
-          </a:p>
-        </p:txBody>
-      </p:sp>
-      <p:sp>
-        <p:nvSpPr>
-          <p:cNvPr id="35" name="Подпись Якутск"/>
-          <p:cNvSpPr txBox="1"/>
-          <p:nvPr/>
-        </p:nvSpPr>
-        <p:spPr>
-          <a:xfrm>
-            <a:off x="4291625" y="2871032"/>
-            <a:ext cx="530352" cy="219456"/>
-          </a:xfrm>
-          <a:prstGeom prst="rect">
-            <a:avLst/>
-          </a:prstGeom>
-          <a:noFill/>
-        </p:spPr>
-        <p:txBody>
-          <a:bodyPr wrap="square" anchor="t" lIns="18288" rIns="18288" tIns="27432" bIns="27432">
-            <a:spAutoFit/>
-          </a:bodyPr>
-          <a:lstStyle/>
-          <a:p>
-            <a:pPr algn="l"/>
-            <a:r>
-              <a:rPr sz="1000" b="1">
-                <a:solidFill>
-                  <a:srgbClr val="2B2B2B"/>
-                </a:solidFill>
-                <a:latin typeface="Calibri"/>
-              </a:rPr>
-              <a:t>Якутск</a:t>
-            </a:r>
-          </a:p>
-        </p:txBody>
-      </p:sp>
-      <p:sp>
-        <p:nvSpPr>
-          <p:cNvPr id="36" name="Точка Оймякон"/>
-          <p:cNvSpPr/>
-          <p:nvPr/>
-        </p:nvSpPr>
-        <p:spPr>
-          <a:xfrm>
-            <a:off x="3850899" y="2738044"/>
-            <a:ext cx="109728" cy="109728"/>
-          </a:xfrm>
-          <a:prstGeom prst="ellipse">
-            <a:avLst/>
-          </a:prstGeom>
-          <a:solidFill>
-            <a:srgbClr val="2B2B2B"/>
-          </a:solidFill>
-          <a:ln w="12700">
-            <a:solidFill>
-              <a:srgbClr val="FFFFFF"/>
-            </a:solidFill>
-          </a:ln>
-          <a:effectLst/>
-        </p:spPr>
-        <p:style>
-          <a:lnRef idx="1">
-            <a:schemeClr val="accent1"/>
-          </a:lnRef>
-          <a:fillRef idx="3">
-            <a:schemeClr val="accent1"/>
-          </a:fillRef>
-          <a:effectRef idx="2">
-            <a:schemeClr val="accent1"/>
-          </a:effectRef>
-          <a:fontRef idx="minor">
-            <a:schemeClr val="lt1"/>
-          </a:fontRef>
-        </p:style>
-        <p:txBody>
-          <a:bodyPr rtlCol="0" anchor="ctr"/>
-          <a:lstStyle/>
-          <a:p>
-            <a:pPr algn="ctr"/>
-          </a:p>
-        </p:txBody>
-      </p:sp>
-      <p:sp>
-        <p:nvSpPr>
-          <p:cNvPr id="37" name="Подпись Оймякон"/>
-          <p:cNvSpPr txBox="1"/>
-          <p:nvPr/>
-        </p:nvSpPr>
-        <p:spPr>
-          <a:xfrm>
-            <a:off x="3969771" y="2683180"/>
-            <a:ext cx="603504" cy="219456"/>
-          </a:xfrm>
-          <a:prstGeom prst="rect">
-            <a:avLst/>
-          </a:prstGeom>
-          <a:noFill/>
-        </p:spPr>
-        <p:txBody>
-          <a:bodyPr wrap="square" anchor="t" lIns="18288" rIns="18288" tIns="27432" bIns="27432">
-            <a:spAutoFit/>
-          </a:bodyPr>
-          <a:lstStyle/>
-          <a:p>
-            <a:pPr algn="l"/>
-            <a:r>
-              <a:rPr sz="1000" b="1">
-                <a:solidFill>
-                  <a:srgbClr val="2B2B2B"/>
-                </a:solidFill>
-                <a:latin typeface="Calibri"/>
-              </a:rPr>
-              <a:t>Оймякон</a:t>
-            </a:r>
-          </a:p>
-        </p:txBody>
-      </p:sp>
-      <p:sp>
-        <p:nvSpPr>
-          <p:cNvPr id="38" name="Точка Певек"/>
-          <p:cNvSpPr/>
-          <p:nvPr/>
-        </p:nvSpPr>
-        <p:spPr>
-          <a:xfrm>
-            <a:off x="3116317" y="2802065"/>
-            <a:ext cx="109728" cy="109728"/>
-          </a:xfrm>
-          <a:prstGeom prst="ellipse">
-            <a:avLst/>
-          </a:prstGeom>
-          <a:solidFill>
-            <a:srgbClr val="2B2B2B"/>
-          </a:solidFill>
-          <a:ln w="12700">
-            <a:solidFill>
-              <a:srgbClr val="FFFFFF"/>
-            </a:solidFill>
-          </a:ln>
-          <a:effectLst/>
-        </p:spPr>
-        <p:style>
-          <a:lnRef idx="1">
-            <a:schemeClr val="accent1"/>
-          </a:lnRef>
-          <a:fillRef idx="3">
-            <a:schemeClr val="accent1"/>
-          </a:fillRef>
-          <a:effectRef idx="2">
-            <a:schemeClr val="accent1"/>
-          </a:effectRef>
-          <a:fontRef idx="minor">
-            <a:schemeClr val="lt1"/>
-          </a:fontRef>
-        </p:style>
-        <p:txBody>
-          <a:bodyPr rtlCol="0" anchor="ctr"/>
-          <a:lstStyle/>
-          <a:p>
-            <a:pPr algn="ctr"/>
-          </a:p>
-        </p:txBody>
-      </p:sp>
-      <p:sp>
-        <p:nvSpPr>
-          <p:cNvPr id="39" name="Подпись Певек"/>
-          <p:cNvSpPr txBox="1"/>
-          <p:nvPr/>
-        </p:nvSpPr>
-        <p:spPr>
-          <a:xfrm>
-            <a:off x="2649973" y="2747201"/>
-            <a:ext cx="457200" cy="219456"/>
-          </a:xfrm>
-          <a:prstGeom prst="rect">
-            <a:avLst/>
-          </a:prstGeom>
-          <a:noFill/>
-        </p:spPr>
-        <p:txBody>
-          <a:bodyPr wrap="square" anchor="t" lIns="18288" rIns="18288" tIns="27432" bIns="27432">
-            <a:spAutoFit/>
-          </a:bodyPr>
-          <a:lstStyle/>
-          <a:p>
-            <a:pPr algn="r"/>
-            <a:r>
-              <a:rPr sz="1000" b="1">
-                <a:solidFill>
-                  <a:srgbClr val="2B2B2B"/>
-                </a:solidFill>
-                <a:latin typeface="Calibri"/>
-              </a:rPr>
-              <a:t>Певек</a:t>
-            </a:r>
-          </a:p>
-        </p:txBody>
-      </p:sp>
-      <p:sp>
-        <p:nvSpPr>
-          <p:cNvPr id="40" name="Примечание"/>
-          <p:cNvSpPr txBox="1"/>
-          <p:nvPr/>
-        </p:nvSpPr>
-        <p:spPr>
-          <a:xfrm>
-            <a:off x="457200" y="6291072"/>
-            <a:ext cx="5029200" cy="274320"/>
-          </a:xfrm>
-          <a:prstGeom prst="rect">
-            <a:avLst/>
-          </a:prstGeom>
-          <a:noFill/>
-        </p:spPr>
-        <p:txBody>
-          <a:bodyPr wrap="square" anchor="t" lIns="45720" rIns="45720" tIns="27432" bIns="27432">
-            <a:spAutoFit/>
-          </a:bodyPr>
-          <a:lstStyle/>
-          <a:p>
-            <a:pPr algn="l"/>
-            <a:r>
-              <a:rPr sz="1000" b="0">
-                <a:solidFill>
-                  <a:srgbClr val="8A8A8A"/>
-                </a:solidFill>
-                <a:latin typeface="Calibri"/>
-              </a:rPr>
-              <a:t>Схема в проекции от Северного полюса, не в масштабе. Нуль меридиана — внизу, 90° в. д. — справа.</a:t>
-            </a:r>
-          </a:p>
-        </p:txBody>
-      </p:sp>
-      <p:sp>
-        <p:nvSpPr>
-          <p:cNvPr id="41" name="Легенда 1"/>
-          <p:cNvSpPr/>
-          <p:nvPr/>
-        </p:nvSpPr>
-        <p:spPr>
-          <a:xfrm>
-            <a:off x="5943600" y="1737360"/>
-            <a:ext cx="457200" cy="457200"/>
-          </a:xfrm>
-          <a:prstGeom prst="rect">
-            <a:avLst/>
-          </a:prstGeom>
-          <a:solidFill>
-            <a:srgbClr val="4B4B4B"/>
-          </a:solidFill>
-          <a:ln>
-            <a:noFill/>
-          </a:ln>
-          <a:effectLst/>
-        </p:spPr>
-        <p:style>
-          <a:lnRef idx="1">
-            <a:schemeClr val="accent1"/>
-          </a:lnRef>
-          <a:fillRef idx="3">
-            <a:schemeClr val="accent1"/>
-          </a:fillRef>
-          <a:effectRef idx="2">
-            <a:schemeClr val="accent1"/>
-          </a:effectRef>
-          <a:fontRef idx="minor">
-            <a:schemeClr val="lt1"/>
-          </a:fontRef>
-        </p:style>
-        <p:txBody>
-          <a:bodyPr rtlCol="0" anchor="ctr"/>
-          <a:lstStyle/>
-          <a:p>
-            <a:pPr algn="ctr"/>
-          </a:p>
-        </p:txBody>
-      </p:sp>
-      <p:sp>
-        <p:nvSpPr>
-          <p:cNvPr id="42" name="Зона 1"/>
-          <p:cNvSpPr txBox="1"/>
-          <p:nvPr/>
-        </p:nvSpPr>
-        <p:spPr>
-          <a:xfrm>
-            <a:off x="6583680" y="1673352"/>
-            <a:ext cx="5029200" cy="320040"/>
-          </a:xfrm>
-          <a:prstGeom prst="rect">
-            <a:avLst/>
-          </a:prstGeom>
-          <a:noFill/>
-        </p:spPr>
-        <p:txBody>
-          <a:bodyPr wrap="square" anchor="t" lIns="18288" rIns="18288" tIns="27432" bIns="27432">
-            <a:spAutoFit/>
-          </a:bodyPr>
-          <a:lstStyle/>
-          <a:p>
-            <a:pPr algn="l"/>
-            <a:r>
-              <a:rPr sz="1500" b="1">
-                <a:solidFill>
-                  <a:srgbClr val="2B2B2B"/>
-                </a:solidFill>
-                <a:latin typeface="Calibri"/>
-              </a:rPr>
-              <a:t>Арктика (севернее ≈ 80° с. ш. и арктические острова)</a:t>
-            </a:r>
-          </a:p>
-        </p:txBody>
-      </p:sp>
-      <p:sp>
-        <p:nvSpPr>
-          <p:cNvPr id="43" name="Описание зоны 1"/>
-          <p:cNvSpPr txBox="1"/>
-          <p:nvPr/>
-        </p:nvSpPr>
-        <p:spPr>
-          <a:xfrm>
-            <a:off x="6583680" y="2148840"/>
-            <a:ext cx="5029200" cy="594360"/>
-          </a:xfrm>
-          <a:prstGeom prst="rect">
-            <a:avLst/>
-          </a:prstGeom>
-          <a:noFill/>
-        </p:spPr>
-        <p:txBody>
-          <a:bodyPr wrap="square" anchor="t" lIns="18288" rIns="18288" tIns="27432" bIns="27432">
-            <a:spAutoFit/>
-          </a:bodyPr>
-          <a:lstStyle/>
-          <a:p>
-            <a:pPr algn="l"/>
-            <a:r>
-              <a:rPr sz="1400" b="0">
-                <a:solidFill>
-                  <a:srgbClr val="4B4B4B"/>
-                </a:solidFill>
-                <a:latin typeface="Calibri"/>
-              </a:rPr>
-              <a:t>Полярная ночь 100+ суток, зимой −40…−55 °C, ветра и пурга</a:t>
-            </a:r>
-          </a:p>
-        </p:txBody>
-      </p:sp>
-      <p:sp>
-        <p:nvSpPr>
-          <p:cNvPr id="44" name="Легенда 2"/>
-          <p:cNvSpPr/>
-          <p:nvPr/>
-        </p:nvSpPr>
-        <p:spPr>
-          <a:xfrm>
-            <a:off x="5943600" y="2880360"/>
-            <a:ext cx="457200" cy="457200"/>
-          </a:xfrm>
-          <a:prstGeom prst="rect">
-            <a:avLst/>
-          </a:prstGeom>
-          <a:solidFill>
-            <a:srgbClr val="FFED00"/>
-          </a:solidFill>
-          <a:ln w="12700">
-            <a:solidFill>
-              <a:srgbClr val="8A8A8A"/>
-            </a:solidFill>
-          </a:ln>
-          <a:effectLst/>
-        </p:spPr>
-        <p:style>
-          <a:lnRef idx="1">
-            <a:schemeClr val="accent1"/>
-          </a:lnRef>
-          <a:fillRef idx="3">
-            <a:schemeClr val="accent1"/>
-          </a:fillRef>
-          <a:effectRef idx="2">
-            <a:schemeClr val="accent1"/>
-          </a:effectRef>
-          <a:fontRef idx="minor">
-            <a:schemeClr val="lt1"/>
-          </a:fontRef>
-        </p:style>
-        <p:txBody>
-          <a:bodyPr rtlCol="0" anchor="ctr"/>
-          <a:lstStyle/>
-          <a:p>
-            <a:pPr algn="ctr"/>
-          </a:p>
-        </p:txBody>
-      </p:sp>
-      <p:sp>
-        <p:nvSpPr>
-          <p:cNvPr id="45" name="Зона 2"/>
-          <p:cNvSpPr txBox="1"/>
-          <p:nvPr/>
-        </p:nvSpPr>
-        <p:spPr>
-          <a:xfrm>
-            <a:off x="6583680" y="2816352"/>
-            <a:ext cx="5029200" cy="320040"/>
-          </a:xfrm>
-          <a:prstGeom prst="rect">
-            <a:avLst/>
-          </a:prstGeom>
-          <a:noFill/>
-        </p:spPr>
-        <p:txBody>
-          <a:bodyPr wrap="square" anchor="t" lIns="18288" rIns="18288" tIns="27432" bIns="27432">
-            <a:spAutoFit/>
-          </a:bodyPr>
-          <a:lstStyle/>
-          <a:p>
-            <a:pPr algn="l"/>
-            <a:r>
-              <a:rPr sz="1500" b="1">
-                <a:solidFill>
-                  <a:srgbClr val="2B2B2B"/>
-                </a:solidFill>
-                <a:latin typeface="Calibri"/>
-              </a:rPr>
-              <a:t>За Полярным кругом (66,5–80° с. ш.)</a:t>
-            </a:r>
-          </a:p>
-        </p:txBody>
-      </p:sp>
-      <p:sp>
-        <p:nvSpPr>
-          <p:cNvPr id="46" name="Описание зоны 2"/>
-          <p:cNvSpPr txBox="1"/>
-          <p:nvPr/>
-        </p:nvSpPr>
-        <p:spPr>
-          <a:xfrm>
-            <a:off x="6583680" y="3291840"/>
-            <a:ext cx="5029200" cy="594360"/>
-          </a:xfrm>
-          <a:prstGeom prst="rect">
-            <a:avLst/>
-          </a:prstGeom>
-          <a:noFill/>
-        </p:spPr>
-        <p:txBody>
-          <a:bodyPr wrap="square" anchor="t" lIns="18288" rIns="18288" tIns="27432" bIns="27432">
-            <a:spAutoFit/>
-          </a:bodyPr>
-          <a:lstStyle/>
-          <a:p>
-            <a:pPr algn="l"/>
-            <a:r>
-              <a:rPr sz="1400" b="0">
-                <a:solidFill>
-                  <a:srgbClr val="4B4B4B"/>
-                </a:solidFill>
-                <a:latin typeface="Calibri"/>
-              </a:rPr>
-              <a:t>Полярная ночь 1–100 суток, зимой −30…−45 °C, полярный день летом</a:t>
-            </a:r>
-          </a:p>
-        </p:txBody>
-      </p:sp>
-      <p:sp>
-        <p:nvSpPr>
-          <p:cNvPr id="47" name="Легенда 3"/>
-          <p:cNvSpPr/>
-          <p:nvPr/>
-        </p:nvSpPr>
-        <p:spPr>
-          <a:xfrm>
-            <a:off x="5943600" y="4023359"/>
-            <a:ext cx="457200" cy="457200"/>
-          </a:xfrm>
-          <a:prstGeom prst="rect">
-            <a:avLst/>
-          </a:prstGeom>
-          <a:solidFill>
-            <a:srgbClr val="FFF7B0"/>
-          </a:solidFill>
-          <a:ln w="12700">
-            <a:solidFill>
-              <a:srgbClr val="8A8A8A"/>
-            </a:solidFill>
-          </a:ln>
-          <a:effectLst/>
-        </p:spPr>
-        <p:style>
-          <a:lnRef idx="1">
-            <a:schemeClr val="accent1"/>
-          </a:lnRef>
-          <a:fillRef idx="3">
-            <a:schemeClr val="accent1"/>
-          </a:fillRef>
-          <a:effectRef idx="2">
-            <a:schemeClr val="accent1"/>
-          </a:effectRef>
-          <a:fontRef idx="minor">
-            <a:schemeClr val="lt1"/>
-          </a:fontRef>
-        </p:style>
-        <p:txBody>
-          <a:bodyPr rtlCol="0" anchor="ctr"/>
-          <a:lstStyle/>
-          <a:p>
-            <a:pPr algn="ctr"/>
-          </a:p>
-        </p:txBody>
-      </p:sp>
-      <p:sp>
-        <p:nvSpPr>
-          <p:cNvPr id="48" name="Зона 3"/>
-          <p:cNvSpPr txBox="1"/>
-          <p:nvPr/>
-        </p:nvSpPr>
-        <p:spPr>
-          <a:xfrm>
-            <a:off x="6583680" y="3959352"/>
-            <a:ext cx="5029200" cy="320040"/>
-          </a:xfrm>
-          <a:prstGeom prst="rect">
-            <a:avLst/>
-          </a:prstGeom>
-          <a:noFill/>
-        </p:spPr>
-        <p:txBody>
-          <a:bodyPr wrap="square" anchor="t" lIns="18288" rIns="18288" tIns="27432" bIns="27432">
-            <a:spAutoFit/>
-          </a:bodyPr>
-          <a:lstStyle/>
-          <a:p>
-            <a:pPr algn="l"/>
-            <a:r>
-              <a:rPr sz="1500" b="1">
-                <a:solidFill>
-                  <a:srgbClr val="2B2B2B"/>
-                </a:solidFill>
-                <a:latin typeface="Calibri"/>
-              </a:rPr>
-              <a:t>Крайний Север и приравненные местности (≈ 60–66,5°)</a:t>
-            </a:r>
-          </a:p>
-        </p:txBody>
-      </p:sp>
-      <p:sp>
-        <p:nvSpPr>
-          <p:cNvPr id="49" name="Описание зоны 3"/>
-          <p:cNvSpPr txBox="1"/>
-          <p:nvPr/>
-        </p:nvSpPr>
-        <p:spPr>
-          <a:xfrm>
-            <a:off x="6583680" y="4434840"/>
-            <a:ext cx="5029200" cy="594360"/>
-          </a:xfrm>
-          <a:prstGeom prst="rect">
-            <a:avLst/>
-          </a:prstGeom>
-          <a:noFill/>
-        </p:spPr>
-        <p:txBody>
-          <a:bodyPr wrap="square" anchor="t" lIns="18288" rIns="18288" tIns="27432" bIns="27432">
-            <a:spAutoFit/>
-          </a:bodyPr>
-          <a:lstStyle/>
-          <a:p>
-            <a:pPr algn="l"/>
-            <a:r>
-              <a:rPr sz="1400" b="0">
-                <a:solidFill>
-                  <a:srgbClr val="4B4B4B"/>
-                </a:solidFill>
-                <a:latin typeface="Calibri"/>
-              </a:rPr>
-              <a:t>Зимой до −50…−60 °C (Якутия), длинная холодная зима, гарантии по ТК РФ</a:t>
-            </a:r>
-          </a:p>
-        </p:txBody>
-      </p:sp>
-      <p:sp>
-        <p:nvSpPr>
-          <p:cNvPr id="50" name="Легенда 4"/>
-          <p:cNvSpPr/>
-          <p:nvPr/>
-        </p:nvSpPr>
-        <p:spPr>
-          <a:xfrm>
-            <a:off x="5943600" y="5166359"/>
-            <a:ext cx="457200" cy="457200"/>
-          </a:xfrm>
-          <a:prstGeom prst="rect">
-            <a:avLst/>
-          </a:prstGeom>
-          <a:solidFill>
-            <a:srgbClr val="E9E9E9"/>
-          </a:solidFill>
-          <a:ln w="12700">
-            <a:solidFill>
-              <a:srgbClr val="8A8A8A"/>
-            </a:solidFill>
-          </a:ln>
-          <a:effectLst/>
-        </p:spPr>
-        <p:style>
-          <a:lnRef idx="1">
-            <a:schemeClr val="accent1"/>
-          </a:lnRef>
-          <a:fillRef idx="3">
-            <a:schemeClr val="accent1"/>
-          </a:fillRef>
-          <a:effectRef idx="2">
-            <a:schemeClr val="accent1"/>
-          </a:effectRef>
-          <a:fontRef idx="minor">
-            <a:schemeClr val="lt1"/>
-          </a:fontRef>
-        </p:style>
-        <p:txBody>
-          <a:bodyPr rtlCol="0" anchor="ctr"/>
-          <a:lstStyle/>
-          <a:p>
-            <a:pPr algn="ctr"/>
-          </a:p>
-        </p:txBody>
-      </p:sp>
-      <p:sp>
-        <p:nvSpPr>
-          <p:cNvPr id="51" name="Зона 4"/>
-          <p:cNvSpPr txBox="1"/>
-          <p:nvPr/>
-        </p:nvSpPr>
-        <p:spPr>
-          <a:xfrm>
-            <a:off x="6583680" y="5102352"/>
-            <a:ext cx="5029200" cy="320040"/>
-          </a:xfrm>
-          <a:prstGeom prst="rect">
-            <a:avLst/>
-          </a:prstGeom>
-          <a:noFill/>
-        </p:spPr>
-        <p:txBody>
-          <a:bodyPr wrap="square" anchor="t" lIns="18288" rIns="18288" tIns="27432" bIns="27432">
-            <a:spAutoFit/>
-          </a:bodyPr>
-          <a:lstStyle/>
-          <a:p>
-            <a:pPr algn="l"/>
-            <a:r>
-              <a:rPr sz="1500" b="1">
-                <a:solidFill>
-                  <a:srgbClr val="2B2B2B"/>
-                </a:solidFill>
-                <a:latin typeface="Calibri"/>
-              </a:rPr>
-              <a:t>Умеренный пояс (для сравнения)</a:t>
-            </a:r>
-          </a:p>
-        </p:txBody>
-      </p:sp>
-      <p:sp>
-        <p:nvSpPr>
-          <p:cNvPr id="52" name="Описание зоны 4"/>
-          <p:cNvSpPr txBox="1"/>
-          <p:nvPr/>
-        </p:nvSpPr>
-        <p:spPr>
-          <a:xfrm>
-            <a:off x="6583680" y="5577840"/>
-            <a:ext cx="5029200" cy="594360"/>
-          </a:xfrm>
-          <a:prstGeom prst="rect">
-            <a:avLst/>
-          </a:prstGeom>
-          <a:noFill/>
-        </p:spPr>
-        <p:txBody>
-          <a:bodyPr wrap="square" anchor="t" lIns="18288" rIns="18288" tIns="27432" bIns="27432">
-            <a:spAutoFit/>
-          </a:bodyPr>
-          <a:lstStyle/>
-          <a:p>
-            <a:pPr algn="l"/>
-            <a:r>
-              <a:rPr sz="1400" b="0">
-                <a:solidFill>
-                  <a:srgbClr val="4B4B4B"/>
-                </a:solidFill>
-                <a:latin typeface="Calibri"/>
-              </a:rPr>
-              <a:t>Холод опасен, но режим стандартный</a:t>
+              <a:t>Перечень районов Крайнего Севера и приравненных местностей задан законодательно, климатические значения указаны как типичные</a:t>
             </a:r>
           </a:p>
         </p:txBody>
@@ -15182,51 +13058,282 @@
           </a:p>
         </p:txBody>
       </p:sp>
-      <p:sp>
-        <p:nvSpPr>
-          <p:cNvPr id="29" name="Заголовок диаграммы"/>
+      <p:graphicFrame>
+        <p:nvGraphicFramePr>
+          <p:cNvPr id="29" name="Таблица полярной ночи"/>
+          <p:cNvGraphicFramePr>
+            <a:graphicFrameLocks noGrp="1"/>
+          </p:cNvGraphicFramePr>
+          <p:nvPr/>
+        </p:nvGraphicFramePr>
+        <p:xfrm>
+          <a:off x="594360" y="1783080"/>
+          <a:ext cx="5303520" cy="2743200"/>
+        </p:xfrm>
+        <a:graphic>
+          <a:graphicData uri="http://schemas.openxmlformats.org/drawingml/2006/table">
+            <a:tbl>
+              <a:tblPr firstRow="1" bandRow="1">
+                <a:tableStyleId>{5C22544A-7EE6-4342-B048-85BDC9FD1C3A}</a:tableStyleId>
+              </a:tblPr>
+              <a:tblGrid>
+                <a:gridCol w="3291840"/>
+                <a:gridCol w="2011680"/>
+              </a:tblGrid>
+              <a:tr h="548640">
+                <a:tc>
+                  <a:txBody>
+                    <a:bodyPr/>
+                    <a:lstStyle/>
+                    <a:p>
+                      <a:pPr algn="l"/>
+                      <a:r>
+                        <a:rPr sz="1500" b="1">
+                          <a:solidFill>
+                            <a:srgbClr val="2B2B2B"/>
+                          </a:solidFill>
+                          <a:latin typeface="Calibri"/>
+                        </a:rPr>
+                        <a:t>Место</a:t>
+                      </a:r>
+                    </a:p>
+                  </a:txBody>
+                  <a:tcPr anchor="ctr">
+                    <a:solidFill>
+                      <a:srgbClr val="FFED00"/>
+                    </a:solidFill>
+                  </a:tcPr>
+                </a:tc>
+                <a:tc>
+                  <a:txBody>
+                    <a:bodyPr/>
+                    <a:lstStyle/>
+                    <a:p>
+                      <a:pPr algn="ctr"/>
+                      <a:r>
+                        <a:rPr sz="1500" b="1">
+                          <a:solidFill>
+                            <a:srgbClr val="2B2B2B"/>
+                          </a:solidFill>
+                          <a:latin typeface="Calibri"/>
+                        </a:rPr>
+                        <a:t>Суток</a:t>
+                      </a:r>
+                    </a:p>
+                  </a:txBody>
+                  <a:tcPr anchor="ctr">
+                    <a:solidFill>
+                      <a:srgbClr val="FFED00"/>
+                    </a:solidFill>
+                  </a:tcPr>
+                </a:tc>
+              </a:tr>
+              <a:tr h="548640">
+                <a:tc>
+                  <a:txBody>
+                    <a:bodyPr/>
+                    <a:lstStyle/>
+                    <a:p>
+                      <a:pPr algn="l"/>
+                      <a:r>
+                        <a:rPr sz="1500" b="0">
+                          <a:solidFill>
+                            <a:srgbClr val="FFFFFF"/>
+                          </a:solidFill>
+                          <a:latin typeface="Calibri"/>
+                        </a:rPr>
+                        <a:t>Мурманск</a:t>
+                      </a:r>
+                    </a:p>
+                  </a:txBody>
+                  <a:tcPr anchor="ctr">
+                    <a:solidFill>
+                      <a:srgbClr val="4B4B4B"/>
+                    </a:solidFill>
+                  </a:tcPr>
+                </a:tc>
+                <a:tc>
+                  <a:txBody>
+                    <a:bodyPr/>
+                    <a:lstStyle/>
+                    <a:p>
+                      <a:pPr algn="ctr"/>
+                      <a:r>
+                        <a:rPr sz="1500" b="1">
+                          <a:solidFill>
+                            <a:srgbClr val="FFFFFF"/>
+                          </a:solidFill>
+                          <a:latin typeface="Calibri"/>
+                        </a:rPr>
+                        <a:t>≈ 40</a:t>
+                      </a:r>
+                    </a:p>
+                  </a:txBody>
+                  <a:tcPr anchor="ctr">
+                    <a:solidFill>
+                      <a:srgbClr val="4B4B4B"/>
+                    </a:solidFill>
+                  </a:tcPr>
+                </a:tc>
+              </a:tr>
+              <a:tr h="548640">
+                <a:tc>
+                  <a:txBody>
+                    <a:bodyPr/>
+                    <a:lstStyle/>
+                    <a:p>
+                      <a:pPr algn="l"/>
+                      <a:r>
+                        <a:rPr sz="1500" b="0">
+                          <a:solidFill>
+                            <a:srgbClr val="FFFFFF"/>
+                          </a:solidFill>
+                          <a:latin typeface="Calibri"/>
+                        </a:rPr>
+                        <a:t>Норильск</a:t>
+                      </a:r>
+                    </a:p>
+                  </a:txBody>
+                  <a:tcPr anchor="ctr">
+                    <a:solidFill>
+                      <a:srgbClr val="5A5A5A"/>
+                    </a:solidFill>
+                  </a:tcPr>
+                </a:tc>
+                <a:tc>
+                  <a:txBody>
+                    <a:bodyPr/>
+                    <a:lstStyle/>
+                    <a:p>
+                      <a:pPr algn="ctr"/>
+                      <a:r>
+                        <a:rPr sz="1500" b="1">
+                          <a:solidFill>
+                            <a:srgbClr val="FFFFFF"/>
+                          </a:solidFill>
+                          <a:latin typeface="Calibri"/>
+                        </a:rPr>
+                        <a:t>≈ 45</a:t>
+                      </a:r>
+                    </a:p>
+                  </a:txBody>
+                  <a:tcPr anchor="ctr">
+                    <a:solidFill>
+                      <a:srgbClr val="5A5A5A"/>
+                    </a:solidFill>
+                  </a:tcPr>
+                </a:tc>
+              </a:tr>
+              <a:tr h="548640">
+                <a:tc>
+                  <a:txBody>
+                    <a:bodyPr/>
+                    <a:lstStyle/>
+                    <a:p>
+                      <a:pPr algn="l"/>
+                      <a:r>
+                        <a:rPr sz="1500" b="0">
+                          <a:solidFill>
+                            <a:srgbClr val="FFFFFF"/>
+                          </a:solidFill>
+                          <a:latin typeface="Calibri"/>
+                        </a:rPr>
+                        <a:t>Диксон</a:t>
+                      </a:r>
+                    </a:p>
+                  </a:txBody>
+                  <a:tcPr anchor="ctr">
+                    <a:solidFill>
+                      <a:srgbClr val="4B4B4B"/>
+                    </a:solidFill>
+                  </a:tcPr>
+                </a:tc>
+                <a:tc>
+                  <a:txBody>
+                    <a:bodyPr/>
+                    <a:lstStyle/>
+                    <a:p>
+                      <a:pPr algn="ctr"/>
+                      <a:r>
+                        <a:rPr sz="1500" b="1">
+                          <a:solidFill>
+                            <a:srgbClr val="FFFFFF"/>
+                          </a:solidFill>
+                          <a:latin typeface="Calibri"/>
+                        </a:rPr>
+                        <a:t>≈ 80</a:t>
+                      </a:r>
+                    </a:p>
+                  </a:txBody>
+                  <a:tcPr anchor="ctr">
+                    <a:solidFill>
+                      <a:srgbClr val="4B4B4B"/>
+                    </a:solidFill>
+                  </a:tcPr>
+                </a:tc>
+              </a:tr>
+              <a:tr h="548640">
+                <a:tc>
+                  <a:txBody>
+                    <a:bodyPr/>
+                    <a:lstStyle/>
+                    <a:p>
+                      <a:pPr algn="l"/>
+                      <a:r>
+                        <a:rPr sz="1500" b="0">
+                          <a:solidFill>
+                            <a:srgbClr val="FFFFFF"/>
+                          </a:solidFill>
+                          <a:latin typeface="Calibri"/>
+                        </a:rPr>
+                        <a:t>Арктические острова</a:t>
+                      </a:r>
+                    </a:p>
+                  </a:txBody>
+                  <a:tcPr anchor="ctr">
+                    <a:solidFill>
+                      <a:srgbClr val="5A5A5A"/>
+                    </a:solidFill>
+                  </a:tcPr>
+                </a:tc>
+                <a:tc>
+                  <a:txBody>
+                    <a:bodyPr/>
+                    <a:lstStyle/>
+                    <a:p>
+                      <a:pPr algn="ctr"/>
+                      <a:r>
+                        <a:rPr sz="1500" b="1">
+                          <a:solidFill>
+                            <a:srgbClr val="FFFFFF"/>
+                          </a:solidFill>
+                          <a:latin typeface="Calibri"/>
+                        </a:rPr>
+                        <a:t>100 и более</a:t>
+                      </a:r>
+                    </a:p>
+                  </a:txBody>
+                  <a:tcPr anchor="ctr">
+                    <a:solidFill>
+                      <a:srgbClr val="5A5A5A"/>
+                    </a:solidFill>
+                  </a:tcPr>
+                </a:tc>
+              </a:tr>
+            </a:tbl>
+          </a:graphicData>
+        </a:graphic>
+      </p:graphicFrame>
+      <p:sp>
+        <p:nvSpPr>
+          <p:cNvPr id="30" name="Пояснение полярной ночи"/>
           <p:cNvSpPr txBox="1"/>
           <p:nvPr/>
         </p:nvSpPr>
         <p:spPr>
           <a:xfrm>
-            <a:off x="594360" y="1783080"/>
-            <a:ext cx="5303520" cy="365760"/>
-          </a:xfrm>
-          <a:prstGeom prst="rect">
-            <a:avLst/>
-          </a:prstGeom>
-          <a:noFill/>
-        </p:spPr>
-        <p:txBody>
-          <a:bodyPr wrap="square" anchor="t" lIns="45720" rIns="45720" tIns="27432" bIns="27432">
-            <a:spAutoFit/>
-          </a:bodyPr>
-          <a:lstStyle/>
-          <a:p>
-            <a:pPr algn="l"/>
-            <a:r>
-              <a:rPr sz="1500" b="1">
-                <a:solidFill>
-                  <a:srgbClr val="FFED00"/>
-                </a:solidFill>
-                <a:latin typeface="Calibri"/>
-              </a:rPr>
-              <a:t>Продолжительность, суток (ориентир)</a:t>
-            </a:r>
-          </a:p>
-        </p:txBody>
-      </p:sp>
-      <p:sp>
-        <p:nvSpPr>
-          <p:cNvPr id="30" name="Город 1"/>
-          <p:cNvSpPr txBox="1"/>
-          <p:nvPr/>
-        </p:nvSpPr>
-        <p:spPr>
-          <a:xfrm>
-            <a:off x="594360" y="2286000"/>
-            <a:ext cx="5303520" cy="320040"/>
+            <a:off x="594360" y="4663440"/>
+            <a:ext cx="5303520" cy="1554480"/>
           </a:xfrm>
           <a:prstGeom prst="rect">
             <a:avLst/>
@@ -15247,470 +13354,14 @@
                 </a:solidFill>
                 <a:latin typeface="Calibri"/>
               </a:rPr>
-              <a:t>Мурманск</a:t>
-            </a:r>
-          </a:p>
-        </p:txBody>
-      </p:sp>
-      <p:sp>
-        <p:nvSpPr>
-          <p:cNvPr id="31" name="Столбец 1"/>
-          <p:cNvSpPr/>
-          <p:nvPr/>
-        </p:nvSpPr>
-        <p:spPr>
-          <a:xfrm>
-            <a:off x="594360" y="2633472"/>
-            <a:ext cx="1402080" cy="347472"/>
-          </a:xfrm>
-          <a:prstGeom prst="rect">
-            <a:avLst/>
-          </a:prstGeom>
-          <a:solidFill>
-            <a:srgbClr val="FFED00"/>
-          </a:solidFill>
-          <a:ln>
-            <a:noFill/>
-          </a:ln>
-          <a:effectLst/>
-        </p:spPr>
-        <p:style>
-          <a:lnRef idx="1">
-            <a:schemeClr val="accent1"/>
-          </a:lnRef>
-          <a:fillRef idx="3">
-            <a:schemeClr val="accent1"/>
-          </a:fillRef>
-          <a:effectRef idx="2">
-            <a:schemeClr val="accent1"/>
-          </a:effectRef>
-          <a:fontRef idx="minor">
-            <a:schemeClr val="lt1"/>
-          </a:fontRef>
-        </p:style>
-        <p:txBody>
-          <a:bodyPr rtlCol="0" anchor="ctr"/>
-          <a:lstStyle/>
-          <a:p>
-            <a:pPr algn="ctr"/>
-          </a:p>
-        </p:txBody>
-      </p:sp>
-      <p:sp>
-        <p:nvSpPr>
-          <p:cNvPr id="32" name="Значение 1"/>
-          <p:cNvSpPr txBox="1"/>
-          <p:nvPr/>
-        </p:nvSpPr>
-        <p:spPr>
-          <a:xfrm>
-            <a:off x="2087880" y="2633472"/>
-            <a:ext cx="914400" cy="347472"/>
-          </a:xfrm>
-          <a:prstGeom prst="rect">
-            <a:avLst/>
-          </a:prstGeom>
-          <a:noFill/>
-        </p:spPr>
-        <p:txBody>
-          <a:bodyPr wrap="square" anchor="ctr" lIns="45720" rIns="45720" tIns="27432" bIns="27432">
-            <a:spAutoFit/>
-          </a:bodyPr>
-          <a:lstStyle/>
-          <a:p>
-            <a:pPr algn="l"/>
-            <a:r>
-              <a:rPr sz="1400" b="1">
-                <a:solidFill>
-                  <a:srgbClr val="FFFFFF"/>
-                </a:solidFill>
-                <a:latin typeface="Calibri"/>
-              </a:rPr>
-              <a:t>≈40</a:t>
-            </a:r>
-          </a:p>
-        </p:txBody>
-      </p:sp>
-      <p:sp>
-        <p:nvSpPr>
-          <p:cNvPr id="33" name="Город 2"/>
-          <p:cNvSpPr txBox="1"/>
-          <p:nvPr/>
-        </p:nvSpPr>
-        <p:spPr>
-          <a:xfrm>
-            <a:off x="594360" y="3154680"/>
-            <a:ext cx="5303520" cy="320040"/>
-          </a:xfrm>
-          <a:prstGeom prst="rect">
-            <a:avLst/>
-          </a:prstGeom>
-          <a:noFill/>
-        </p:spPr>
-        <p:txBody>
-          <a:bodyPr wrap="square" anchor="t" lIns="18288" rIns="18288" tIns="27432" bIns="27432">
-            <a:spAutoFit/>
-          </a:bodyPr>
-          <a:lstStyle/>
-          <a:p>
-            <a:pPr algn="l"/>
-            <a:r>
-              <a:rPr sz="1400" b="0">
-                <a:solidFill>
-                  <a:srgbClr val="FFFFFF"/>
-                </a:solidFill>
-                <a:latin typeface="Calibri"/>
-              </a:rPr>
-              <a:t>Норильск</a:t>
-            </a:r>
-          </a:p>
-        </p:txBody>
-      </p:sp>
-      <p:sp>
-        <p:nvSpPr>
-          <p:cNvPr id="34" name="Столбец 2"/>
-          <p:cNvSpPr/>
-          <p:nvPr/>
-        </p:nvSpPr>
-        <p:spPr>
-          <a:xfrm>
-            <a:off x="594360" y="3502152"/>
-            <a:ext cx="1577339" cy="347472"/>
-          </a:xfrm>
-          <a:prstGeom prst="rect">
-            <a:avLst/>
-          </a:prstGeom>
-          <a:solidFill>
-            <a:srgbClr val="FFED00"/>
-          </a:solidFill>
-          <a:ln>
-            <a:noFill/>
-          </a:ln>
-          <a:effectLst/>
-        </p:spPr>
-        <p:style>
-          <a:lnRef idx="1">
-            <a:schemeClr val="accent1"/>
-          </a:lnRef>
-          <a:fillRef idx="3">
-            <a:schemeClr val="accent1"/>
-          </a:fillRef>
-          <a:effectRef idx="2">
-            <a:schemeClr val="accent1"/>
-          </a:effectRef>
-          <a:fontRef idx="minor">
-            <a:schemeClr val="lt1"/>
-          </a:fontRef>
-        </p:style>
-        <p:txBody>
-          <a:bodyPr rtlCol="0" anchor="ctr"/>
-          <a:lstStyle/>
-          <a:p>
-            <a:pPr algn="ctr"/>
-          </a:p>
-        </p:txBody>
-      </p:sp>
-      <p:sp>
-        <p:nvSpPr>
-          <p:cNvPr id="35" name="Значение 2"/>
-          <p:cNvSpPr txBox="1"/>
-          <p:nvPr/>
-        </p:nvSpPr>
-        <p:spPr>
-          <a:xfrm>
-            <a:off x="2263140" y="3502152"/>
-            <a:ext cx="914400" cy="347472"/>
-          </a:xfrm>
-          <a:prstGeom prst="rect">
-            <a:avLst/>
-          </a:prstGeom>
-          <a:noFill/>
-        </p:spPr>
-        <p:txBody>
-          <a:bodyPr wrap="square" anchor="ctr" lIns="45720" rIns="45720" tIns="27432" bIns="27432">
-            <a:spAutoFit/>
-          </a:bodyPr>
-          <a:lstStyle/>
-          <a:p>
-            <a:pPr algn="l"/>
-            <a:r>
-              <a:rPr sz="1400" b="1">
-                <a:solidFill>
-                  <a:srgbClr val="FFFFFF"/>
-                </a:solidFill>
-                <a:latin typeface="Calibri"/>
-              </a:rPr>
-              <a:t>≈45</a:t>
-            </a:r>
-          </a:p>
-        </p:txBody>
-      </p:sp>
-      <p:sp>
-        <p:nvSpPr>
-          <p:cNvPr id="36" name="Город 3"/>
-          <p:cNvSpPr txBox="1"/>
-          <p:nvPr/>
-        </p:nvSpPr>
-        <p:spPr>
-          <a:xfrm>
-            <a:off x="594360" y="4023360"/>
-            <a:ext cx="5303520" cy="320040"/>
-          </a:xfrm>
-          <a:prstGeom prst="rect">
-            <a:avLst/>
-          </a:prstGeom>
-          <a:noFill/>
-        </p:spPr>
-        <p:txBody>
-          <a:bodyPr wrap="square" anchor="t" lIns="18288" rIns="18288" tIns="27432" bIns="27432">
-            <a:spAutoFit/>
-          </a:bodyPr>
-          <a:lstStyle/>
-          <a:p>
-            <a:pPr algn="l"/>
-            <a:r>
-              <a:rPr sz="1400" b="0">
-                <a:solidFill>
-                  <a:srgbClr val="FFFFFF"/>
-                </a:solidFill>
-                <a:latin typeface="Calibri"/>
-              </a:rPr>
-              <a:t>Диксон</a:t>
-            </a:r>
-          </a:p>
-        </p:txBody>
-      </p:sp>
-      <p:sp>
-        <p:nvSpPr>
-          <p:cNvPr id="37" name="Столбец 3"/>
-          <p:cNvSpPr/>
-          <p:nvPr/>
-        </p:nvSpPr>
-        <p:spPr>
-          <a:xfrm>
-            <a:off x="594360" y="4370832"/>
-            <a:ext cx="2804160" cy="347472"/>
-          </a:xfrm>
-          <a:prstGeom prst="rect">
-            <a:avLst/>
-          </a:prstGeom>
-          <a:solidFill>
-            <a:srgbClr val="FFED00"/>
-          </a:solidFill>
-          <a:ln>
-            <a:noFill/>
-          </a:ln>
-          <a:effectLst/>
-        </p:spPr>
-        <p:style>
-          <a:lnRef idx="1">
-            <a:schemeClr val="accent1"/>
-          </a:lnRef>
-          <a:fillRef idx="3">
-            <a:schemeClr val="accent1"/>
-          </a:fillRef>
-          <a:effectRef idx="2">
-            <a:schemeClr val="accent1"/>
-          </a:effectRef>
-          <a:fontRef idx="minor">
-            <a:schemeClr val="lt1"/>
-          </a:fontRef>
-        </p:style>
-        <p:txBody>
-          <a:bodyPr rtlCol="0" anchor="ctr"/>
-          <a:lstStyle/>
-          <a:p>
-            <a:pPr algn="ctr"/>
-          </a:p>
-        </p:txBody>
-      </p:sp>
-      <p:sp>
-        <p:nvSpPr>
-          <p:cNvPr id="38" name="Значение 3"/>
-          <p:cNvSpPr txBox="1"/>
-          <p:nvPr/>
-        </p:nvSpPr>
-        <p:spPr>
-          <a:xfrm>
-            <a:off x="3489960" y="4370832"/>
-            <a:ext cx="914400" cy="347472"/>
-          </a:xfrm>
-          <a:prstGeom prst="rect">
-            <a:avLst/>
-          </a:prstGeom>
-          <a:noFill/>
-        </p:spPr>
-        <p:txBody>
-          <a:bodyPr wrap="square" anchor="ctr" lIns="45720" rIns="45720" tIns="27432" bIns="27432">
-            <a:spAutoFit/>
-          </a:bodyPr>
-          <a:lstStyle/>
-          <a:p>
-            <a:pPr algn="l"/>
-            <a:r>
-              <a:rPr sz="1400" b="1">
-                <a:solidFill>
-                  <a:srgbClr val="FFFFFF"/>
-                </a:solidFill>
-                <a:latin typeface="Calibri"/>
-              </a:rPr>
-              <a:t>≈80</a:t>
-            </a:r>
-          </a:p>
-        </p:txBody>
-      </p:sp>
-      <p:sp>
-        <p:nvSpPr>
-          <p:cNvPr id="39" name="Город 4"/>
-          <p:cNvSpPr txBox="1"/>
-          <p:nvPr/>
-        </p:nvSpPr>
-        <p:spPr>
-          <a:xfrm>
-            <a:off x="594360" y="4892040"/>
-            <a:ext cx="5303520" cy="320040"/>
-          </a:xfrm>
-          <a:prstGeom prst="rect">
-            <a:avLst/>
-          </a:prstGeom>
-          <a:noFill/>
-        </p:spPr>
-        <p:txBody>
-          <a:bodyPr wrap="square" anchor="t" lIns="18288" rIns="18288" tIns="27432" bIns="27432">
-            <a:spAutoFit/>
-          </a:bodyPr>
-          <a:lstStyle/>
-          <a:p>
-            <a:pPr algn="l"/>
-            <a:r>
-              <a:rPr sz="1400" b="0">
-                <a:solidFill>
-                  <a:srgbClr val="FFFFFF"/>
-                </a:solidFill>
-                <a:latin typeface="Calibri"/>
-              </a:rPr>
-              <a:t>Арктические острова</a:t>
-            </a:r>
-          </a:p>
-        </p:txBody>
-      </p:sp>
-      <p:sp>
-        <p:nvSpPr>
-          <p:cNvPr id="40" name="Столбец 4"/>
-          <p:cNvSpPr/>
-          <p:nvPr/>
-        </p:nvSpPr>
-        <p:spPr>
-          <a:xfrm>
-            <a:off x="594360" y="5239512"/>
-            <a:ext cx="4206240" cy="347472"/>
-          </a:xfrm>
-          <a:prstGeom prst="rect">
-            <a:avLst/>
-          </a:prstGeom>
-          <a:solidFill>
-            <a:srgbClr val="FFED00"/>
-          </a:solidFill>
-          <a:ln>
-            <a:noFill/>
-          </a:ln>
-          <a:effectLst/>
-        </p:spPr>
-        <p:style>
-          <a:lnRef idx="1">
-            <a:schemeClr val="accent1"/>
-          </a:lnRef>
-          <a:fillRef idx="3">
-            <a:schemeClr val="accent1"/>
-          </a:fillRef>
-          <a:effectRef idx="2">
-            <a:schemeClr val="accent1"/>
-          </a:effectRef>
-          <a:fontRef idx="minor">
-            <a:schemeClr val="lt1"/>
-          </a:fontRef>
-        </p:style>
-        <p:txBody>
-          <a:bodyPr rtlCol="0" anchor="ctr"/>
-          <a:lstStyle/>
-          <a:p>
-            <a:pPr algn="ctr"/>
-          </a:p>
-        </p:txBody>
-      </p:sp>
-      <p:sp>
-        <p:nvSpPr>
-          <p:cNvPr id="41" name="Значение 4"/>
-          <p:cNvSpPr txBox="1"/>
-          <p:nvPr/>
-        </p:nvSpPr>
-        <p:spPr>
-          <a:xfrm>
-            <a:off x="4892040" y="5239512"/>
-            <a:ext cx="914400" cy="347472"/>
-          </a:xfrm>
-          <a:prstGeom prst="rect">
-            <a:avLst/>
-          </a:prstGeom>
-          <a:noFill/>
-        </p:spPr>
-        <p:txBody>
-          <a:bodyPr wrap="square" anchor="ctr" lIns="45720" rIns="45720" tIns="27432" bIns="27432">
-            <a:spAutoFit/>
-          </a:bodyPr>
-          <a:lstStyle/>
-          <a:p>
-            <a:pPr algn="l"/>
-            <a:r>
-              <a:rPr sz="1400" b="1">
-                <a:solidFill>
-                  <a:srgbClr val="FFFFFF"/>
-                </a:solidFill>
-                <a:latin typeface="Calibri"/>
-              </a:rPr>
-              <a:t>≈120</a:t>
-            </a:r>
-          </a:p>
-        </p:txBody>
-      </p:sp>
-      <p:sp>
-        <p:nvSpPr>
-          <p:cNvPr id="42" name="Примечание"/>
-          <p:cNvSpPr txBox="1"/>
-          <p:nvPr/>
-        </p:nvSpPr>
-        <p:spPr>
-          <a:xfrm>
-            <a:off x="594360" y="5806440"/>
-            <a:ext cx="5303520" cy="457200"/>
-          </a:xfrm>
-          <a:prstGeom prst="rect">
-            <a:avLst/>
-          </a:prstGeom>
-          <a:noFill/>
-        </p:spPr>
-        <p:txBody>
-          <a:bodyPr wrap="square" anchor="t" lIns="45720" rIns="45720" tIns="27432" bIns="27432">
-            <a:spAutoFit/>
-          </a:bodyPr>
-          <a:lstStyle/>
-          <a:p>
-            <a:pPr algn="l"/>
-            <a:r>
-              <a:rPr sz="1000" b="0">
-                <a:solidFill>
-                  <a:srgbClr val="BBBBBB"/>
-                </a:solidFill>
-                <a:latin typeface="Calibri"/>
-              </a:rPr>
-              <a:t>Для островов — «до ≈ 120 и более», точное значение зависит от широты.</a:t>
-            </a:r>
-          </a:p>
-        </p:txBody>
-      </p:sp>
-      <p:sp>
-        <p:nvSpPr>
-          <p:cNvPr id="43" name="Чем опасна"/>
+              <a:t>В полярную ночь солнце не поднимается над горизонтом, а светлое время ограничено сумерками. К этому прибавляются холод и пурга, поэтому основная нагрузка ложится на нервную систему и внимание.</a:t>
+            </a:r>
+          </a:p>
+        </p:txBody>
+      </p:sp>
+      <p:sp>
+        <p:nvSpPr>
+          <p:cNvPr id="31" name="Чем опасна"/>
           <p:cNvSpPr/>
           <p:nvPr/>
         </p:nvSpPr>
@@ -15756,7 +13407,7 @@
       </p:sp>
       <p:sp>
         <p:nvSpPr>
-          <p:cNvPr id="44" name="TextBox 43"/>
+          <p:cNvPr id="32" name="TextBox 31"/>
           <p:cNvSpPr txBox="1"/>
           <p:nvPr/>
         </p:nvSpPr>
@@ -15791,7 +13442,7 @@
       </p:sp>
       <p:sp>
         <p:nvSpPr>
-          <p:cNvPr id="45" name="Чем опасна список"/>
+          <p:cNvPr id="33" name="Чем опасна список"/>
           <p:cNvSpPr txBox="1"/>
           <p:nvPr/>
         </p:nvSpPr>
@@ -15914,7 +13565,7 @@
       </p:sp>
       <p:sp>
         <p:nvSpPr>
-          <p:cNvPr id="46" name="Что делать"/>
+          <p:cNvPr id="34" name="Что делать"/>
           <p:cNvSpPr/>
           <p:nvPr/>
         </p:nvSpPr>
@@ -15960,7 +13611,7 @@
       </p:sp>
       <p:sp>
         <p:nvSpPr>
-          <p:cNvPr id="47" name="TextBox 46"/>
+          <p:cNvPr id="35" name="TextBox 34"/>
           <p:cNvSpPr txBox="1"/>
           <p:nvPr/>
         </p:nvSpPr>
@@ -15995,7 +13646,7 @@
       </p:sp>
       <p:sp>
         <p:nvSpPr>
-          <p:cNvPr id="48" name="Что делать список"/>
+          <p:cNvPr id="36" name="Что делать список"/>
           <p:cNvSpPr txBox="1"/>
           <p:nvPr/>
         </p:nvSpPr>
@@ -17370,20 +15021,22 @@
       </p:pic>
       <p:sp>
         <p:nvSpPr>
-          <p:cNvPr id="10" name="Слой 3 (защитный)"/>
+          <p:cNvPr id="10" name="Слой 1"/>
           <p:cNvSpPr/>
           <p:nvPr/>
         </p:nvSpPr>
         <p:spPr>
           <a:xfrm>
-            <a:off x="685800" y="1737360"/>
-            <a:ext cx="4663440" cy="4663440"/>
-          </a:xfrm>
-          <a:prstGeom prst="ellipse">
-            <a:avLst/>
+            <a:off x="594360" y="1691640"/>
+            <a:ext cx="3474720" cy="3840480"/>
+          </a:xfrm>
+          <a:prstGeom prst="roundRect">
+            <a:avLst>
+              <a:gd name="adj" fmla="val 8000"/>
+            </a:avLst>
           </a:prstGeom>
           <a:solidFill>
-            <a:srgbClr val="2B2B2B"/>
+            <a:srgbClr val="F1F1F1"/>
           </a:solidFill>
           <a:ln>
             <a:noFill/>
@@ -17414,102 +15067,14 @@
       </p:sp>
       <p:sp>
         <p:nvSpPr>
-          <p:cNvPr id="11" name="Слой 2 (утепляющий)"/>
+          <p:cNvPr id="11" name="Oval 10"/>
           <p:cNvSpPr/>
           <p:nvPr/>
         </p:nvSpPr>
         <p:spPr>
           <a:xfrm>
-            <a:off x="1234439" y="2286000"/>
-            <a:ext cx="3566160" cy="3566160"/>
-          </a:xfrm>
-          <a:prstGeom prst="ellipse">
-            <a:avLst/>
-          </a:prstGeom>
-          <a:solidFill>
-            <a:srgbClr val="4B4B4B"/>
-          </a:solidFill>
-          <a:ln>
-            <a:noFill/>
-          </a:ln>
-          <a:effectLst/>
-        </p:spPr>
-        <p:style>
-          <a:lnRef idx="1">
-            <a:schemeClr val="accent1"/>
-          </a:lnRef>
-          <a:fillRef idx="3">
-            <a:schemeClr val="accent1"/>
-          </a:fillRef>
-          <a:effectRef idx="2">
-            <a:schemeClr val="accent1"/>
-          </a:effectRef>
-          <a:fontRef idx="minor">
-            <a:schemeClr val="lt1"/>
-          </a:fontRef>
-        </p:style>
-        <p:txBody>
-          <a:bodyPr rtlCol="0" anchor="ctr"/>
-          <a:lstStyle/>
-          <a:p>
-            <a:pPr algn="ctr"/>
-          </a:p>
-        </p:txBody>
-      </p:sp>
-      <p:sp>
-        <p:nvSpPr>
-          <p:cNvPr id="12" name="Слой 1 (базовый)"/>
-          <p:cNvSpPr/>
-          <p:nvPr/>
-        </p:nvSpPr>
-        <p:spPr>
-          <a:xfrm>
-            <a:off x="1783079" y="2834640"/>
-            <a:ext cx="2468880" cy="2468880"/>
-          </a:xfrm>
-          <a:prstGeom prst="ellipse">
-            <a:avLst/>
-          </a:prstGeom>
-          <a:solidFill>
-            <a:srgbClr val="FFF7B0"/>
-          </a:solidFill>
-          <a:ln>
-            <a:noFill/>
-          </a:ln>
-          <a:effectLst/>
-        </p:spPr>
-        <p:style>
-          <a:lnRef idx="1">
-            <a:schemeClr val="accent1"/>
-          </a:lnRef>
-          <a:fillRef idx="3">
-            <a:schemeClr val="accent1"/>
-          </a:fillRef>
-          <a:effectRef idx="2">
-            <a:schemeClr val="accent1"/>
-          </a:effectRef>
-          <a:fontRef idx="minor">
-            <a:schemeClr val="lt1"/>
-          </a:fontRef>
-        </p:style>
-        <p:txBody>
-          <a:bodyPr rtlCol="0" anchor="ctr"/>
-          <a:lstStyle/>
-          <a:p>
-            <a:pPr algn="ctr"/>
-          </a:p>
-        </p:txBody>
-      </p:sp>
-      <p:sp>
-        <p:nvSpPr>
-          <p:cNvPr id="13" name="Тело"/>
-          <p:cNvSpPr/>
-          <p:nvPr/>
-        </p:nvSpPr>
-        <p:spPr>
-          <a:xfrm>
-            <a:off x="2377439" y="3429000"/>
-            <a:ext cx="1280160" cy="1280160"/>
+            <a:off x="768096" y="1956815"/>
+            <a:ext cx="475488" cy="475488"/>
           </a:xfrm>
           <a:prstGeom prst="ellipse">
             <a:avLst/>
@@ -17537,23 +15102,32 @@
           </a:fontRef>
         </p:style>
         <p:txBody>
-          <a:bodyPr rtlCol="0" anchor="ctr"/>
+          <a:bodyPr rtlCol="0" anchor="ctr" wrap="square" lIns="0" rIns="0" tIns="27432" bIns="27432"/>
           <a:lstStyle/>
           <a:p>
             <a:pPr algn="ctr"/>
-          </a:p>
-        </p:txBody>
-      </p:sp>
-      <p:sp>
-        <p:nvSpPr>
-          <p:cNvPr id="14" name="Подпись Тело"/>
+            <a:r>
+              <a:rPr sz="1800" b="1">
+                <a:solidFill>
+                  <a:srgbClr val="2B2B2B"/>
+                </a:solidFill>
+                <a:latin typeface="Calibri"/>
+              </a:rPr>
+              <a:t>1</a:t>
+            </a:r>
+          </a:p>
+        </p:txBody>
+      </p:sp>
+      <p:sp>
+        <p:nvSpPr>
+          <p:cNvPr id="12" name="Слой 1 заголовок"/>
           <p:cNvSpPr txBox="1"/>
           <p:nvPr/>
         </p:nvSpPr>
         <p:spPr>
           <a:xfrm>
-            <a:off x="2377439" y="3886200"/>
-            <a:ext cx="1280160" cy="365760"/>
+            <a:off x="1371600" y="1920240"/>
+            <a:ext cx="2560320" cy="548640"/>
           </a:xfrm>
           <a:prstGeom prst="rect">
             <a:avLst/>
@@ -17561,34 +15135,34 @@
           <a:noFill/>
         </p:spPr>
         <p:txBody>
-          <a:bodyPr wrap="square" anchor="ctr" lIns="45720" rIns="45720" tIns="27432" bIns="27432">
+          <a:bodyPr wrap="square" anchor="ctr" lIns="18288" rIns="18288" tIns="27432" bIns="27432">
             <a:spAutoFit/>
           </a:bodyPr>
           <a:lstStyle/>
           <a:p>
-            <a:pPr algn="ctr"/>
-            <a:r>
-              <a:rPr sz="1400" b="1">
+            <a:pPr algn="l"/>
+            <a:r>
+              <a:rPr sz="1700" b="1">
                 <a:solidFill>
                   <a:srgbClr val="2B2B2B"/>
                 </a:solidFill>
                 <a:latin typeface="Calibri"/>
               </a:rPr>
-              <a:t>ТЕЛО</a:t>
-            </a:r>
-          </a:p>
-        </p:txBody>
-      </p:sp>
-      <p:sp>
-        <p:nvSpPr>
-          <p:cNvPr id="15" name="Подпись 1 · БАЗА"/>
+              <a:t>Базовый слой</a:t>
+            </a:r>
+          </a:p>
+        </p:txBody>
+      </p:sp>
+      <p:sp>
+        <p:nvSpPr>
+          <p:cNvPr id="13" name="Слой 1 текст"/>
           <p:cNvSpPr txBox="1"/>
           <p:nvPr/>
         </p:nvSpPr>
         <p:spPr>
           <a:xfrm>
-            <a:off x="1920239" y="3026664"/>
-            <a:ext cx="2194560" cy="274320"/>
+            <a:off x="777240" y="2743200"/>
+            <a:ext cx="3108960" cy="2743200"/>
           </a:xfrm>
           <a:prstGeom prst="rect">
             <a:avLst/>
@@ -17596,104 +15170,97 @@
           <a:noFill/>
         </p:spPr>
         <p:txBody>
-          <a:bodyPr wrap="square" anchor="ctr" lIns="45720" rIns="45720" tIns="27432" bIns="27432">
+          <a:bodyPr wrap="square" anchor="t" lIns="18288" rIns="18288" tIns="27432" bIns="27432">
             <a:spAutoFit/>
           </a:bodyPr>
           <a:lstStyle/>
           <a:p>
-            <a:pPr algn="ctr"/>
-            <a:r>
-              <a:rPr sz="1100" b="1">
+            <a:pPr algn="l">
+              <a:spcAft>
+                <a:spcPts val="1200"/>
+              </a:spcAft>
+            </a:pPr>
+            <a:r>
+              <a:rPr sz="1600" b="1">
                 <a:solidFill>
                   <a:srgbClr val="2B2B2B"/>
                 </a:solidFill>
                 <a:latin typeface="Calibri"/>
               </a:rPr>
-              <a:t>1 · БАЗА</a:t>
-            </a:r>
-          </a:p>
-        </p:txBody>
-      </p:sp>
-      <p:sp>
-        <p:nvSpPr>
-          <p:cNvPr id="16" name="Подпись 2 · УТЕПЛЕНИЕ"/>
-          <p:cNvSpPr txBox="1"/>
-          <p:nvPr/>
-        </p:nvSpPr>
-        <p:spPr>
-          <a:xfrm>
-            <a:off x="1920239" y="2432304"/>
-            <a:ext cx="2194560" cy="274320"/>
-          </a:xfrm>
-          <a:prstGeom prst="rect">
-            <a:avLst/>
-          </a:prstGeom>
-          <a:noFill/>
-        </p:spPr>
-        <p:txBody>
-          <a:bodyPr wrap="square" anchor="ctr" lIns="45720" rIns="45720" tIns="27432" bIns="27432">
-            <a:spAutoFit/>
-          </a:bodyPr>
-          <a:lstStyle/>
-          <a:p>
-            <a:pPr algn="ctr"/>
-            <a:r>
-              <a:rPr sz="1100" b="1">
-                <a:solidFill>
-                  <a:srgbClr val="FFFFFF"/>
+              <a:t>Задача: </a:t>
+            </a:r>
+            <a:r>
+              <a:rPr sz="1600" b="0">
+                <a:solidFill>
+                  <a:srgbClr val="4B4B4B"/>
                 </a:solidFill>
                 <a:latin typeface="Calibri"/>
               </a:rPr>
-              <a:t>2 · УТЕПЛЕНИЕ</a:t>
-            </a:r>
-          </a:p>
-        </p:txBody>
-      </p:sp>
-      <p:sp>
-        <p:nvSpPr>
-          <p:cNvPr id="17" name="Подпись 3 · ЗАЩИТА"/>
-          <p:cNvSpPr txBox="1"/>
-          <p:nvPr/>
-        </p:nvSpPr>
-        <p:spPr>
-          <a:xfrm>
-            <a:off x="1920239" y="1883664"/>
-            <a:ext cx="2194560" cy="274320"/>
-          </a:xfrm>
-          <a:prstGeom prst="rect">
-            <a:avLst/>
-          </a:prstGeom>
-          <a:noFill/>
-        </p:spPr>
-        <p:txBody>
-          <a:bodyPr wrap="square" anchor="ctr" lIns="45720" rIns="45720" tIns="27432" bIns="27432">
-            <a:spAutoFit/>
-          </a:bodyPr>
-          <a:lstStyle/>
-          <a:p>
-            <a:pPr algn="ctr"/>
-            <a:r>
-              <a:rPr sz="1100" b="1">
-                <a:solidFill>
-                  <a:srgbClr val="FFFFFF"/>
+              <a:t>отводить пот от кожи</a:t>
+            </a:r>
+          </a:p>
+          <a:p>
+            <a:pPr algn="l">
+              <a:spcAft>
+                <a:spcPts val="1200"/>
+              </a:spcAft>
+            </a:pPr>
+            <a:r>
+              <a:rPr sz="1600" b="1">
+                <a:solidFill>
+                  <a:srgbClr val="2B2B2B"/>
                 </a:solidFill>
                 <a:latin typeface="Calibri"/>
               </a:rPr>
-              <a:t>3 · ЗАЩИТА</a:t>
-            </a:r>
-          </a:p>
-        </p:txBody>
-      </p:sp>
-      <p:sp>
-        <p:nvSpPr>
-          <p:cNvPr id="18" name="Слой 1"/>
+              <a:t>Материалы: </a:t>
+            </a:r>
+            <a:r>
+              <a:rPr sz="1600" b="0">
+                <a:solidFill>
+                  <a:srgbClr val="4B4B4B"/>
+                </a:solidFill>
+                <a:latin typeface="Calibri"/>
+              </a:rPr>
+              <a:t>синтетика или тонкая мериносовая шерсть, плотно по фигуре</a:t>
+            </a:r>
+          </a:p>
+          <a:p>
+            <a:pPr algn="l">
+              <a:spcAft>
+                <a:spcPts val="1200"/>
+              </a:spcAft>
+            </a:pPr>
+            <a:r>
+              <a:rPr sz="1600" b="1">
+                <a:solidFill>
+                  <a:srgbClr val="2B2B2B"/>
+                </a:solidFill>
+                <a:latin typeface="Calibri"/>
+              </a:rPr>
+              <a:t>Не допускать: </a:t>
+            </a:r>
+            <a:r>
+              <a:rPr sz="1600" b="0">
+                <a:solidFill>
+                  <a:srgbClr val="4B4B4B"/>
+                </a:solidFill>
+                <a:latin typeface="Calibri"/>
+              </a:rPr>
+              <a:t>хлопка, он намокает и остывает</a:t>
+            </a:r>
+          </a:p>
+        </p:txBody>
+      </p:sp>
+      <p:sp>
+        <p:nvSpPr>
+          <p:cNvPr id="14" name="Слой 2"/>
           <p:cNvSpPr/>
           <p:nvPr/>
         </p:nvSpPr>
         <p:spPr>
           <a:xfrm>
-            <a:off x="5897880" y="1691640"/>
-            <a:ext cx="5715000" cy="1463040"/>
+            <a:off x="4366260" y="1691640"/>
+            <a:ext cx="3474720" cy="3840480"/>
           </a:xfrm>
           <a:prstGeom prst="roundRect">
             <a:avLst>
@@ -17732,14 +15299,14 @@
       </p:sp>
       <p:sp>
         <p:nvSpPr>
-          <p:cNvPr id="19" name="Oval 18"/>
+          <p:cNvPr id="15" name="Oval 14"/>
           <p:cNvSpPr/>
           <p:nvPr/>
         </p:nvSpPr>
         <p:spPr>
           <a:xfrm>
-            <a:off x="6089904" y="1837943"/>
-            <a:ext cx="438912" cy="438912"/>
+            <a:off x="4539996" y="1956815"/>
+            <a:ext cx="475488" cy="475488"/>
           </a:xfrm>
           <a:prstGeom prst="ellipse">
             <a:avLst/>
@@ -17772,27 +15339,62 @@
           <a:p>
             <a:pPr algn="ctr"/>
             <a:r>
-              <a:rPr sz="1600" b="1">
+              <a:rPr sz="1800" b="1">
                 <a:solidFill>
                   <a:srgbClr val="2B2B2B"/>
                 </a:solidFill>
                 <a:latin typeface="Calibri"/>
               </a:rPr>
-              <a:t>1</a:t>
-            </a:r>
-          </a:p>
-        </p:txBody>
-      </p:sp>
-      <p:sp>
-        <p:nvSpPr>
-          <p:cNvPr id="20" name="TextBox 19"/>
+              <a:t>2</a:t>
+            </a:r>
+          </a:p>
+        </p:txBody>
+      </p:sp>
+      <p:sp>
+        <p:nvSpPr>
+          <p:cNvPr id="16" name="Слой 2 заголовок"/>
           <p:cNvSpPr txBox="1"/>
           <p:nvPr/>
         </p:nvSpPr>
         <p:spPr>
           <a:xfrm>
-            <a:off x="6675120" y="1801368"/>
-            <a:ext cx="4846320" cy="365760"/>
+            <a:off x="5143500" y="1920240"/>
+            <a:ext cx="2560320" cy="548640"/>
+          </a:xfrm>
+          <a:prstGeom prst="rect">
+            <a:avLst/>
+          </a:prstGeom>
+          <a:noFill/>
+        </p:spPr>
+        <p:txBody>
+          <a:bodyPr wrap="square" anchor="ctr" lIns="18288" rIns="18288" tIns="27432" bIns="27432">
+            <a:spAutoFit/>
+          </a:bodyPr>
+          <a:lstStyle/>
+          <a:p>
+            <a:pPr algn="l"/>
+            <a:r>
+              <a:rPr sz="1700" b="1">
+                <a:solidFill>
+                  <a:srgbClr val="2B2B2B"/>
+                </a:solidFill>
+                <a:latin typeface="Calibri"/>
+              </a:rPr>
+              <a:t>Утепляющий слой</a:t>
+            </a:r>
+          </a:p>
+        </p:txBody>
+      </p:sp>
+      <p:sp>
+        <p:nvSpPr>
+          <p:cNvPr id="17" name="Слой 2 текст"/>
+          <p:cNvSpPr txBox="1"/>
+          <p:nvPr/>
+        </p:nvSpPr>
+        <p:spPr>
+          <a:xfrm>
+            <a:off x="4549140" y="2743200"/>
+            <a:ext cx="3108960" cy="2743200"/>
           </a:xfrm>
           <a:prstGeom prst="rect">
             <a:avLst/>
@@ -17805,7 +15407,11 @@
           </a:bodyPr>
           <a:lstStyle/>
           <a:p>
-            <a:pPr algn="l"/>
+            <a:pPr algn="l">
+              <a:spcAft>
+                <a:spcPts val="1200"/>
+              </a:spcAft>
+            </a:pPr>
             <a:r>
               <a:rPr sz="1600" b="1">
                 <a:solidFill>
@@ -17813,91 +15419,80 @@
                 </a:solidFill>
                 <a:latin typeface="Calibri"/>
               </a:rPr>
-              <a:t>Базовый слой</a:t>
-            </a:r>
-          </a:p>
-        </p:txBody>
-      </p:sp>
-      <p:sp>
-        <p:nvSpPr>
-          <p:cNvPr id="21" name="Слой 1 описание"/>
-          <p:cNvSpPr txBox="1"/>
-          <p:nvPr/>
-        </p:nvSpPr>
-        <p:spPr>
-          <a:xfrm>
-            <a:off x="6675120" y="2194560"/>
-            <a:ext cx="4846320" cy="548640"/>
-          </a:xfrm>
-          <a:prstGeom prst="rect">
-            <a:avLst/>
-          </a:prstGeom>
-          <a:noFill/>
-        </p:spPr>
-        <p:txBody>
-          <a:bodyPr wrap="square" anchor="t" lIns="18288" rIns="18288" tIns="27432" bIns="27432">
-            <a:spAutoFit/>
-          </a:bodyPr>
-          <a:lstStyle/>
-          <a:p>
-            <a:pPr algn="l"/>
-            <a:r>
-              <a:rPr sz="1300" b="0">
+              <a:t>Задача: </a:t>
+            </a:r>
+            <a:r>
+              <a:rPr sz="1600" b="0">
                 <a:solidFill>
                   <a:srgbClr val="4B4B4B"/>
                 </a:solidFill>
                 <a:latin typeface="Calibri"/>
               </a:rPr>
-              <a:t>Отводит пот от кожи. Синтетика или тонкая мериносовая шерсть, плотно к телу.</a:t>
-            </a:r>
-          </a:p>
-        </p:txBody>
-      </p:sp>
-      <p:sp>
-        <p:nvSpPr>
-          <p:cNvPr id="22" name="Слой 1 совет"/>
-          <p:cNvSpPr txBox="1"/>
-          <p:nvPr/>
-        </p:nvSpPr>
-        <p:spPr>
-          <a:xfrm>
-            <a:off x="6675120" y="2761488"/>
-            <a:ext cx="4846320" cy="320040"/>
-          </a:xfrm>
-          <a:prstGeom prst="rect">
-            <a:avLst/>
-          </a:prstGeom>
-          <a:noFill/>
-        </p:spPr>
-        <p:txBody>
-          <a:bodyPr wrap="square" anchor="t" lIns="18288" rIns="18288" tIns="27432" bIns="27432">
-            <a:spAutoFit/>
-          </a:bodyPr>
-          <a:lstStyle/>
-          <a:p>
-            <a:pPr algn="l"/>
-            <a:r>
-              <a:rPr sz="1200" b="1">
+              <a:t>держать воздух и тепло</a:t>
+            </a:r>
+          </a:p>
+          <a:p>
+            <a:pPr algn="l">
+              <a:spcAft>
+                <a:spcPts val="1200"/>
+              </a:spcAft>
+            </a:pPr>
+            <a:r>
+              <a:rPr sz="1600" b="1">
                 <a:solidFill>
                   <a:srgbClr val="2B2B2B"/>
                 </a:solidFill>
                 <a:latin typeface="Calibri"/>
               </a:rPr>
-              <a:t>▸ Не хлопок: мокрый, он остывает.</a:t>
-            </a:r>
-          </a:p>
-        </p:txBody>
-      </p:sp>
-      <p:sp>
-        <p:nvSpPr>
-          <p:cNvPr id="23" name="Слой 2"/>
+              <a:t>Материалы: </a:t>
+            </a:r>
+            <a:r>
+              <a:rPr sz="1600" b="0">
+                <a:solidFill>
+                  <a:srgbClr val="4B4B4B"/>
+                </a:solidFill>
+                <a:latin typeface="Calibri"/>
+              </a:rPr>
+              <a:t>флис, шерсть, пух, синтетический утеплитель, слоёв может быть несколько</a:t>
+            </a:r>
+          </a:p>
+          <a:p>
+            <a:pPr algn="l">
+              <a:spcAft>
+                <a:spcPts val="1200"/>
+              </a:spcAft>
+            </a:pPr>
+            <a:r>
+              <a:rPr sz="1600" b="1">
+                <a:solidFill>
+                  <a:srgbClr val="2B2B2B"/>
+                </a:solidFill>
+                <a:latin typeface="Calibri"/>
+              </a:rPr>
+              <a:t>Не допускать: </a:t>
+            </a:r>
+            <a:r>
+              <a:rPr sz="1600" b="0">
+                <a:solidFill>
+                  <a:srgbClr val="4B4B4B"/>
+                </a:solidFill>
+                <a:latin typeface="Calibri"/>
+              </a:rPr>
+              <a:t>пережима, тепло создаёт воздух</a:t>
+            </a:r>
+          </a:p>
+        </p:txBody>
+      </p:sp>
+      <p:sp>
+        <p:nvSpPr>
+          <p:cNvPr id="18" name="Слой 3"/>
           <p:cNvSpPr/>
           <p:nvPr/>
         </p:nvSpPr>
         <p:spPr>
           <a:xfrm>
-            <a:off x="5897880" y="3291840"/>
-            <a:ext cx="5715000" cy="1463040"/>
+            <a:off x="8138160" y="1691640"/>
+            <a:ext cx="3474720" cy="3840480"/>
           </a:xfrm>
           <a:prstGeom prst="roundRect">
             <a:avLst>
@@ -17936,14 +15531,14 @@
       </p:sp>
       <p:sp>
         <p:nvSpPr>
-          <p:cNvPr id="24" name="Oval 23"/>
+          <p:cNvPr id="19" name="Oval 18"/>
           <p:cNvSpPr/>
           <p:nvPr/>
         </p:nvSpPr>
         <p:spPr>
           <a:xfrm>
-            <a:off x="6089904" y="3438144"/>
-            <a:ext cx="438912" cy="438912"/>
+            <a:off x="8311896" y="1956815"/>
+            <a:ext cx="475488" cy="475488"/>
           </a:xfrm>
           <a:prstGeom prst="ellipse">
             <a:avLst/>
@@ -17976,27 +15571,62 @@
           <a:p>
             <a:pPr algn="ctr"/>
             <a:r>
-              <a:rPr sz="1600" b="1">
+              <a:rPr sz="1800" b="1">
                 <a:solidFill>
                   <a:srgbClr val="2B2B2B"/>
                 </a:solidFill>
                 <a:latin typeface="Calibri"/>
               </a:rPr>
-              <a:t>2</a:t>
-            </a:r>
-          </a:p>
-        </p:txBody>
-      </p:sp>
-      <p:sp>
-        <p:nvSpPr>
-          <p:cNvPr id="25" name="TextBox 24"/>
+              <a:t>3</a:t>
+            </a:r>
+          </a:p>
+        </p:txBody>
+      </p:sp>
+      <p:sp>
+        <p:nvSpPr>
+          <p:cNvPr id="20" name="Слой 3 заголовок"/>
           <p:cNvSpPr txBox="1"/>
           <p:nvPr/>
         </p:nvSpPr>
         <p:spPr>
           <a:xfrm>
-            <a:off x="6675120" y="3401568"/>
-            <a:ext cx="4846320" cy="365760"/>
+            <a:off x="8915400" y="1920240"/>
+            <a:ext cx="2560320" cy="548640"/>
+          </a:xfrm>
+          <a:prstGeom prst="rect">
+            <a:avLst/>
+          </a:prstGeom>
+          <a:noFill/>
+        </p:spPr>
+        <p:txBody>
+          <a:bodyPr wrap="square" anchor="ctr" lIns="18288" rIns="18288" tIns="27432" bIns="27432">
+            <a:spAutoFit/>
+          </a:bodyPr>
+          <a:lstStyle/>
+          <a:p>
+            <a:pPr algn="l"/>
+            <a:r>
+              <a:rPr sz="1700" b="1">
+                <a:solidFill>
+                  <a:srgbClr val="2B2B2B"/>
+                </a:solidFill>
+                <a:latin typeface="Calibri"/>
+              </a:rPr>
+              <a:t>Защитный слой</a:t>
+            </a:r>
+          </a:p>
+        </p:txBody>
+      </p:sp>
+      <p:sp>
+        <p:nvSpPr>
+          <p:cNvPr id="21" name="Слой 3 текст"/>
+          <p:cNvSpPr txBox="1"/>
+          <p:nvPr/>
+        </p:nvSpPr>
+        <p:spPr>
+          <a:xfrm>
+            <a:off x="8321040" y="2743200"/>
+            <a:ext cx="3108960" cy="2743200"/>
           </a:xfrm>
           <a:prstGeom prst="rect">
             <a:avLst/>
@@ -18009,7 +15639,11 @@
           </a:bodyPr>
           <a:lstStyle/>
           <a:p>
-            <a:pPr algn="l"/>
+            <a:pPr algn="l">
+              <a:spcAft>
+                <a:spcPts val="1200"/>
+              </a:spcAft>
+            </a:pPr>
             <a:r>
               <a:rPr sz="1600" b="1">
                 <a:solidFill>
@@ -18017,140 +15651,85 @@
                 </a:solidFill>
                 <a:latin typeface="Calibri"/>
               </a:rPr>
-              <a:t>Утепляющий слой</a:t>
-            </a:r>
-          </a:p>
-        </p:txBody>
-      </p:sp>
-      <p:sp>
-        <p:nvSpPr>
-          <p:cNvPr id="26" name="Слой 2 описание"/>
-          <p:cNvSpPr txBox="1"/>
-          <p:nvPr/>
-        </p:nvSpPr>
-        <p:spPr>
-          <a:xfrm>
-            <a:off x="6675120" y="3794760"/>
-            <a:ext cx="4846320" cy="548640"/>
-          </a:xfrm>
-          <a:prstGeom prst="rect">
-            <a:avLst/>
-          </a:prstGeom>
-          <a:noFill/>
-        </p:spPr>
-        <p:txBody>
-          <a:bodyPr wrap="square" anchor="t" lIns="18288" rIns="18288" tIns="27432" bIns="27432">
-            <a:spAutoFit/>
-          </a:bodyPr>
-          <a:lstStyle/>
-          <a:p>
-            <a:pPr algn="l"/>
-            <a:r>
-              <a:rPr sz="1300" b="0">
+              <a:t>Задача: </a:t>
+            </a:r>
+            <a:r>
+              <a:rPr sz="1600" b="0">
                 <a:solidFill>
                   <a:srgbClr val="4B4B4B"/>
                 </a:solidFill>
                 <a:latin typeface="Calibri"/>
               </a:rPr>
-              <a:t>Держит воздух и тепло. Флис, шерсть, пух, синтетический утеплитель. Слоёв может быть несколько.</a:t>
-            </a:r>
-          </a:p>
-        </p:txBody>
-      </p:sp>
-      <p:sp>
-        <p:nvSpPr>
-          <p:cNvPr id="27" name="Слой 2 совет"/>
-          <p:cNvSpPr txBox="1"/>
-          <p:nvPr/>
-        </p:nvSpPr>
-        <p:spPr>
-          <a:xfrm>
-            <a:off x="6675120" y="4361688"/>
-            <a:ext cx="4846320" cy="320040"/>
-          </a:xfrm>
-          <a:prstGeom prst="rect">
-            <a:avLst/>
-          </a:prstGeom>
-          <a:noFill/>
-        </p:spPr>
-        <p:txBody>
-          <a:bodyPr wrap="square" anchor="t" lIns="18288" rIns="18288" tIns="27432" bIns="27432">
-            <a:spAutoFit/>
-          </a:bodyPr>
-          <a:lstStyle/>
-          <a:p>
-            <a:pPr algn="l"/>
-            <a:r>
-              <a:rPr sz="1200" b="1">
+              <a:t>защита от ветра, снега и влаги</a:t>
+            </a:r>
+          </a:p>
+          <a:p>
+            <a:pPr algn="l">
+              <a:spcAft>
+                <a:spcPts val="1200"/>
+              </a:spcAft>
+            </a:pPr>
+            <a:r>
+              <a:rPr sz="1600" b="1">
                 <a:solidFill>
                   <a:srgbClr val="2B2B2B"/>
                 </a:solidFill>
                 <a:latin typeface="Calibri"/>
               </a:rPr>
-              <a:t>▸ Не пережимать: тепло — это воздух.</a:t>
-            </a:r>
-          </a:p>
-        </p:txBody>
-      </p:sp>
-      <p:sp>
-        <p:nvSpPr>
-          <p:cNvPr id="28" name="Слой 3"/>
+              <a:t>Материалы: </a:t>
+            </a:r>
+            <a:r>
+              <a:rPr sz="1600" b="0">
+                <a:solidFill>
+                  <a:srgbClr val="4B4B4B"/>
+                </a:solidFill>
+                <a:latin typeface="Calibri"/>
+              </a:rPr>
+              <a:t>мембрана или плотная ткань, парка или комбинезон с капюшоном</a:t>
+            </a:r>
+          </a:p>
+          <a:p>
+            <a:pPr algn="l">
+              <a:spcAft>
+                <a:spcPts val="1200"/>
+              </a:spcAft>
+            </a:pPr>
+            <a:r>
+              <a:rPr sz="1600" b="1">
+                <a:solidFill>
+                  <a:srgbClr val="2B2B2B"/>
+                </a:solidFill>
+                <a:latin typeface="Calibri"/>
+              </a:rPr>
+              <a:t>Не допускать: </a:t>
+            </a:r>
+            <a:r>
+              <a:rPr sz="1600" b="0">
+                <a:solidFill>
+                  <a:srgbClr val="4B4B4B"/>
+                </a:solidFill>
+                <a:latin typeface="Calibri"/>
+              </a:rPr>
+              <a:t>отсутствия вентиляции: нужны молнии под мышками</a:t>
+            </a:r>
+          </a:p>
+        </p:txBody>
+      </p:sp>
+      <p:sp>
+        <p:nvSpPr>
+          <p:cNvPr id="22" name="Правило слоёв"/>
           <p:cNvSpPr/>
           <p:nvPr/>
         </p:nvSpPr>
         <p:spPr>
           <a:xfrm>
-            <a:off x="5897880" y="4892040"/>
-            <a:ext cx="5715000" cy="1463040"/>
+            <a:off x="594360" y="5715000"/>
+            <a:ext cx="11018520" cy="640080"/>
           </a:xfrm>
           <a:prstGeom prst="roundRect">
             <a:avLst>
               <a:gd name="adj" fmla="val 8000"/>
             </a:avLst>
-          </a:prstGeom>
-          <a:solidFill>
-            <a:srgbClr val="F1F1F1"/>
-          </a:solidFill>
-          <a:ln>
-            <a:noFill/>
-          </a:ln>
-          <a:effectLst/>
-        </p:spPr>
-        <p:style>
-          <a:lnRef idx="1">
-            <a:schemeClr val="accent1"/>
-          </a:lnRef>
-          <a:fillRef idx="3">
-            <a:schemeClr val="accent1"/>
-          </a:fillRef>
-          <a:effectRef idx="2">
-            <a:schemeClr val="accent1"/>
-          </a:effectRef>
-          <a:fontRef idx="minor">
-            <a:schemeClr val="lt1"/>
-          </a:fontRef>
-        </p:style>
-        <p:txBody>
-          <a:bodyPr rtlCol="0" anchor="ctr"/>
-          <a:lstStyle/>
-          <a:p>
-            <a:pPr algn="ctr"/>
-          </a:p>
-        </p:txBody>
-      </p:sp>
-      <p:sp>
-        <p:nvSpPr>
-          <p:cNvPr id="29" name="Oval 28"/>
-          <p:cNvSpPr/>
-          <p:nvPr/>
-        </p:nvSpPr>
-        <p:spPr>
-          <a:xfrm>
-            <a:off x="6089904" y="5038344"/>
-            <a:ext cx="438912" cy="438912"/>
-          </a:xfrm>
-          <a:prstGeom prst="ellipse">
-            <a:avLst/>
           </a:prstGeom>
           <a:solidFill>
             <a:srgbClr val="FFED00"/>
@@ -18175,123 +15754,18 @@
           </a:fontRef>
         </p:style>
         <p:txBody>
-          <a:bodyPr rtlCol="0" anchor="ctr" wrap="square" lIns="0" rIns="0" tIns="27432" bIns="27432"/>
+          <a:bodyPr rtlCol="0" anchor="ctr" wrap="square" lIns="109728" rIns="109728" tIns="27432" bIns="27432"/>
           <a:lstStyle/>
           <a:p>
             <a:pPr algn="ctr"/>
             <a:r>
-              <a:rPr sz="1600" b="1">
+              <a:rPr sz="1400" b="1">
                 <a:solidFill>
                   <a:srgbClr val="2B2B2B"/>
                 </a:solidFill>
                 <a:latin typeface="Calibri"/>
               </a:rPr>
-              <a:t>3</a:t>
-            </a:r>
-          </a:p>
-        </p:txBody>
-      </p:sp>
-      <p:sp>
-        <p:nvSpPr>
-          <p:cNvPr id="30" name="TextBox 29"/>
-          <p:cNvSpPr txBox="1"/>
-          <p:nvPr/>
-        </p:nvSpPr>
-        <p:spPr>
-          <a:xfrm>
-            <a:off x="6675120" y="5001768"/>
-            <a:ext cx="4846320" cy="365760"/>
-          </a:xfrm>
-          <a:prstGeom prst="rect">
-            <a:avLst/>
-          </a:prstGeom>
-          <a:noFill/>
-        </p:spPr>
-        <p:txBody>
-          <a:bodyPr wrap="square" anchor="t" lIns="18288" rIns="18288" tIns="27432" bIns="27432">
-            <a:spAutoFit/>
-          </a:bodyPr>
-          <a:lstStyle/>
-          <a:p>
-            <a:pPr algn="l"/>
-            <a:r>
-              <a:rPr sz="1600" b="1">
-                <a:solidFill>
-                  <a:srgbClr val="2B2B2B"/>
-                </a:solidFill>
-                <a:latin typeface="Calibri"/>
-              </a:rPr>
-              <a:t>Защитный слой</a:t>
-            </a:r>
-          </a:p>
-        </p:txBody>
-      </p:sp>
-      <p:sp>
-        <p:nvSpPr>
-          <p:cNvPr id="31" name="Слой 3 описание"/>
-          <p:cNvSpPr txBox="1"/>
-          <p:nvPr/>
-        </p:nvSpPr>
-        <p:spPr>
-          <a:xfrm>
-            <a:off x="6675120" y="5394959"/>
-            <a:ext cx="4846320" cy="548640"/>
-          </a:xfrm>
-          <a:prstGeom prst="rect">
-            <a:avLst/>
-          </a:prstGeom>
-          <a:noFill/>
-        </p:spPr>
-        <p:txBody>
-          <a:bodyPr wrap="square" anchor="t" lIns="18288" rIns="18288" tIns="27432" bIns="27432">
-            <a:spAutoFit/>
-          </a:bodyPr>
-          <a:lstStyle/>
-          <a:p>
-            <a:pPr algn="l"/>
-            <a:r>
-              <a:rPr sz="1300" b="0">
-                <a:solidFill>
-                  <a:srgbClr val="4B4B4B"/>
-                </a:solidFill>
-                <a:latin typeface="Calibri"/>
-              </a:rPr>
-              <a:t>Ветро- и влагозащита, капюшон, манжеты и пояс на регулировке. Парка или комбинезон.</a:t>
-            </a:r>
-          </a:p>
-        </p:txBody>
-      </p:sp>
-      <p:sp>
-        <p:nvSpPr>
-          <p:cNvPr id="32" name="Слой 3 совет"/>
-          <p:cNvSpPr txBox="1"/>
-          <p:nvPr/>
-        </p:nvSpPr>
-        <p:spPr>
-          <a:xfrm>
-            <a:off x="6675120" y="5961888"/>
-            <a:ext cx="4846320" cy="320040"/>
-          </a:xfrm>
-          <a:prstGeom prst="rect">
-            <a:avLst/>
-          </a:prstGeom>
-          <a:noFill/>
-        </p:spPr>
-        <p:txBody>
-          <a:bodyPr wrap="square" anchor="t" lIns="18288" rIns="18288" tIns="27432" bIns="27432">
-            <a:spAutoFit/>
-          </a:bodyPr>
-          <a:lstStyle/>
-          <a:p>
-            <a:pPr algn="l"/>
-            <a:r>
-              <a:rPr sz="1200" b="1">
-                <a:solidFill>
-                  <a:srgbClr val="2B2B2B"/>
-                </a:solidFill>
-                <a:latin typeface="Calibri"/>
-              </a:rPr>
-              <a:t>▸ Вентиляция: молнии, подмышки.</a:t>
+              <a:t>Лучше слегка замёрзнуть в начале пути, чем вспотеть: мокрая одежда в мороз опаснее лёгкого озноба</a:t>
             </a:r>
           </a:p>
         </p:txBody>
@@ -19171,8 +16645,8 @@
           <p:nvPr/>
         </p:nvGraphicFramePr>
         <p:xfrm>
-          <a:off x="502920" y="1645920"/>
-          <a:ext cx="6309360" cy="3246120"/>
+          <a:off x="594360" y="1691640"/>
+          <a:ext cx="6217920" cy="4114800"/>
         </p:xfrm>
         <a:graphic>
           <a:graphicData uri="http://schemas.openxmlformats.org/drawingml/2006/chart">
@@ -19189,7 +16663,7 @@
         <p:spPr>
           <a:xfrm>
             <a:off x="7086600" y="1691640"/>
-            <a:ext cx="4526280" cy="713232"/>
+            <a:ext cx="4526280" cy="960120"/>
           </a:xfrm>
           <a:prstGeom prst="roundRect">
             <a:avLst>
@@ -19235,7 +16709,7 @@
         <p:spPr>
           <a:xfrm>
             <a:off x="7223760" y="1691640"/>
-            <a:ext cx="4297680" cy="713232"/>
+            <a:ext cx="4297680" cy="960120"/>
           </a:xfrm>
           <a:prstGeom prst="rect">
             <a:avLst/>
@@ -19250,7 +16724,7 @@
           <a:p>
             <a:pPr algn="l"/>
             <a:r>
-              <a:rPr sz="1300" b="1">
+              <a:rPr sz="1400" b="1">
                 <a:solidFill>
                   <a:srgbClr val="2B2B2B"/>
                 </a:solidFill>
@@ -19259,7 +16733,7 @@
               <a:t>Ниже −30 °C: </a:t>
             </a:r>
             <a:r>
-              <a:rPr sz="1300" b="0">
+              <a:rPr sz="1400" b="0">
                 <a:solidFill>
                   <a:srgbClr val="4B4B4B"/>
                 </a:solidFill>
@@ -19278,8 +16752,8 @@
         </p:nvSpPr>
         <p:spPr>
           <a:xfrm>
-            <a:off x="7086600" y="2496312"/>
-            <a:ext cx="4526280" cy="713232"/>
+            <a:off x="7086600" y="2761488"/>
+            <a:ext cx="4526280" cy="960120"/>
           </a:xfrm>
           <a:prstGeom prst="roundRect">
             <a:avLst>
@@ -19324,8 +16798,8 @@
         </p:nvSpPr>
         <p:spPr>
           <a:xfrm>
-            <a:off x="7223760" y="2496312"/>
-            <a:ext cx="4297680" cy="713232"/>
+            <a:off x="7223760" y="2761488"/>
+            <a:ext cx="4297680" cy="960120"/>
           </a:xfrm>
           <a:prstGeom prst="rect">
             <a:avLst/>
@@ -19340,7 +16814,7 @@
           <a:p>
             <a:pPr algn="l"/>
             <a:r>
-              <a:rPr sz="1300" b="1">
+              <a:rPr sz="1400" b="1">
                 <a:solidFill>
                   <a:srgbClr val="2B2B2B"/>
                 </a:solidFill>
@@ -19349,7 +16823,7 @@
               <a:t>Ветер 10 м/с и больше: </a:t>
             </a:r>
             <a:r>
-              <a:rPr sz="1300" b="0">
+              <a:rPr sz="1400" b="0">
                 <a:solidFill>
                   <a:srgbClr val="4B4B4B"/>
                 </a:solidFill>
@@ -19368,8 +16842,8 @@
         </p:nvSpPr>
         <p:spPr>
           <a:xfrm>
-            <a:off x="7086600" y="3300984"/>
-            <a:ext cx="4526280" cy="713232"/>
+            <a:off x="7086600" y="3831335"/>
+            <a:ext cx="4526280" cy="960120"/>
           </a:xfrm>
           <a:prstGeom prst="roundRect">
             <a:avLst>
@@ -19414,8 +16888,8 @@
         </p:nvSpPr>
         <p:spPr>
           <a:xfrm>
-            <a:off x="7223760" y="3300984"/>
-            <a:ext cx="4297680" cy="713232"/>
+            <a:off x="7223760" y="3831335"/>
+            <a:ext cx="4297680" cy="960120"/>
           </a:xfrm>
           <a:prstGeom prst="rect">
             <a:avLst/>
@@ -19430,7 +16904,7 @@
           <a:p>
             <a:pPr algn="l"/>
             <a:r>
-              <a:rPr sz="1300" b="1">
+              <a:rPr sz="1400" b="1">
                 <a:solidFill>
                   <a:srgbClr val="2B2B2B"/>
                 </a:solidFill>
@@ -19439,7 +16913,7 @@
               <a:t>Тёплое помещение: </a:t>
             </a:r>
             <a:r>
-              <a:rPr sz="1300" b="0">
+              <a:rPr sz="1400" b="0">
                 <a:solidFill>
                   <a:srgbClr val="4B4B4B"/>
                 </a:solidFill>
@@ -19458,8 +16932,8 @@
         </p:nvSpPr>
         <p:spPr>
           <a:xfrm>
-            <a:off x="7086600" y="4105656"/>
-            <a:ext cx="4526280" cy="713232"/>
+            <a:off x="7086600" y="4901183"/>
+            <a:ext cx="4526280" cy="960120"/>
           </a:xfrm>
           <a:prstGeom prst="roundRect">
             <a:avLst>
@@ -19504,8 +16978,8 @@
         </p:nvSpPr>
         <p:spPr>
           <a:xfrm>
-            <a:off x="7223760" y="4105656"/>
-            <a:ext cx="4297680" cy="713232"/>
+            <a:off x="7223760" y="4901183"/>
+            <a:ext cx="4297680" cy="960120"/>
           </a:xfrm>
           <a:prstGeom prst="rect">
             <a:avLst/>
@@ -19520,7 +16994,7 @@
           <a:p>
             <a:pPr algn="l"/>
             <a:r>
-              <a:rPr sz="1300" b="1">
+              <a:rPr sz="1400" b="1">
                 <a:solidFill>
                   <a:srgbClr val="2B2B2B"/>
                 </a:solidFill>
@@ -19529,7 +17003,7 @@
               <a:t>Ниже −50 °C: </a:t>
             </a:r>
             <a:r>
-              <a:rPr sz="1300" b="0">
+              <a:rPr sz="1400" b="0">
                 <a:solidFill>
                   <a:srgbClr val="4B4B4B"/>
                 </a:solidFill>
@@ -19542,14 +17016,14 @@
       </p:sp>
       <p:sp>
         <p:nvSpPr>
-          <p:cNvPr id="19" name="Заголовок смены"/>
+          <p:cNvPr id="19" name="Примечание"/>
           <p:cNvSpPr txBox="1"/>
           <p:nvPr/>
         </p:nvSpPr>
         <p:spPr>
           <a:xfrm>
-            <a:off x="594360" y="5029200"/>
-            <a:ext cx="10972800" cy="320040"/>
+            <a:off x="594360" y="5943600"/>
+            <a:ext cx="6217920" cy="320040"/>
           </a:xfrm>
           <a:prstGeom prst="rect">
             <a:avLst/>
@@ -19563,745 +17037,6 @@
           <a:lstStyle/>
           <a:p>
             <a:pPr algn="l"/>
-            <a:r>
-              <a:rPr sz="1400" b="1">
-                <a:solidFill>
-                  <a:srgbClr val="2B2B2B"/>
-                </a:solidFill>
-                <a:latin typeface="Calibri"/>
-              </a:rPr>
-              <a:t>Пример смены при −30…−40 °C (ориентир), минуты</a:t>
-            </a:r>
-          </a:p>
-        </p:txBody>
-      </p:sp>
-      <p:sp>
-        <p:nvSpPr>
-          <p:cNvPr id="20" name="Отрезок 1"/>
-          <p:cNvSpPr/>
-          <p:nvPr/>
-        </p:nvSpPr>
-        <p:spPr>
-          <a:xfrm>
-            <a:off x="594360" y="5440680"/>
-            <a:ext cx="1616202" cy="640080"/>
-          </a:xfrm>
-          <a:prstGeom prst="rect">
-            <a:avLst/>
-          </a:prstGeom>
-          <a:solidFill>
-            <a:srgbClr val="2B2B2B"/>
-          </a:solidFill>
-          <a:ln>
-            <a:noFill/>
-          </a:ln>
-          <a:effectLst/>
-        </p:spPr>
-        <p:style>
-          <a:lnRef idx="1">
-            <a:schemeClr val="accent1"/>
-          </a:lnRef>
-          <a:fillRef idx="3">
-            <a:schemeClr val="accent1"/>
-          </a:fillRef>
-          <a:effectRef idx="2">
-            <a:schemeClr val="accent1"/>
-          </a:effectRef>
-          <a:fontRef idx="minor">
-            <a:schemeClr val="lt1"/>
-          </a:fontRef>
-        </p:style>
-        <p:txBody>
-          <a:bodyPr rtlCol="0" anchor="ctr" wrap="square" lIns="9144" rIns="9144" tIns="27432" bIns="27432"/>
-          <a:lstStyle/>
-          <a:p>
-            <a:pPr algn="ctr"/>
-            <a:r>
-              <a:rPr sz="1600" b="1">
-                <a:solidFill>
-                  <a:srgbClr val="FFFFFF"/>
-                </a:solidFill>
-                <a:latin typeface="Calibri"/>
-              </a:rPr>
-              <a:t>45</a:t>
-            </a:r>
-          </a:p>
-        </p:txBody>
-      </p:sp>
-      <p:sp>
-        <p:nvSpPr>
-          <p:cNvPr id="21" name="Подпись отрезка 1"/>
-          <p:cNvSpPr txBox="1"/>
-          <p:nvPr/>
-        </p:nvSpPr>
-        <p:spPr>
-          <a:xfrm>
-            <a:off x="594360" y="6108192"/>
-            <a:ext cx="1616202" cy="274320"/>
-          </a:xfrm>
-          <a:prstGeom prst="rect">
-            <a:avLst/>
-          </a:prstGeom>
-          <a:noFill/>
-        </p:spPr>
-        <p:txBody>
-          <a:bodyPr wrap="square" anchor="t" lIns="0" rIns="0" tIns="27432" bIns="27432">
-            <a:spAutoFit/>
-          </a:bodyPr>
-          <a:lstStyle/>
-          <a:p>
-            <a:pPr algn="ctr"/>
-            <a:r>
-              <a:rPr sz="1000" b="0">
-                <a:solidFill>
-                  <a:srgbClr val="4B4B4B"/>
-                </a:solidFill>
-                <a:latin typeface="Calibri"/>
-              </a:rPr>
-              <a:t>Работа</a:t>
-            </a:r>
-          </a:p>
-        </p:txBody>
-      </p:sp>
-      <p:sp>
-        <p:nvSpPr>
-          <p:cNvPr id="22" name="Отрезок 2"/>
-          <p:cNvSpPr/>
-          <p:nvPr/>
-        </p:nvSpPr>
-        <p:spPr>
-          <a:xfrm>
-            <a:off x="2247138" y="5440680"/>
-            <a:ext cx="697992" cy="640080"/>
-          </a:xfrm>
-          <a:prstGeom prst="rect">
-            <a:avLst/>
-          </a:prstGeom>
-          <a:solidFill>
-            <a:srgbClr val="FFED00"/>
-          </a:solidFill>
-          <a:ln>
-            <a:noFill/>
-          </a:ln>
-          <a:effectLst/>
-        </p:spPr>
-        <p:style>
-          <a:lnRef idx="1">
-            <a:schemeClr val="accent1"/>
-          </a:lnRef>
-          <a:fillRef idx="3">
-            <a:schemeClr val="accent1"/>
-          </a:fillRef>
-          <a:effectRef idx="2">
-            <a:schemeClr val="accent1"/>
-          </a:effectRef>
-          <a:fontRef idx="minor">
-            <a:schemeClr val="lt1"/>
-          </a:fontRef>
-        </p:style>
-        <p:txBody>
-          <a:bodyPr rtlCol="0" anchor="ctr" wrap="square" lIns="9144" rIns="9144" tIns="27432" bIns="27432"/>
-          <a:lstStyle/>
-          <a:p>
-            <a:pPr algn="ctr"/>
-            <a:r>
-              <a:rPr sz="1600" b="1">
-                <a:solidFill>
-                  <a:srgbClr val="2B2B2B"/>
-                </a:solidFill>
-                <a:latin typeface="Calibri"/>
-              </a:rPr>
-              <a:t>20</a:t>
-            </a:r>
-          </a:p>
-        </p:txBody>
-      </p:sp>
-      <p:sp>
-        <p:nvSpPr>
-          <p:cNvPr id="23" name="Подпись отрезка 2"/>
-          <p:cNvSpPr txBox="1"/>
-          <p:nvPr/>
-        </p:nvSpPr>
-        <p:spPr>
-          <a:xfrm>
-            <a:off x="2247138" y="6108192"/>
-            <a:ext cx="697992" cy="274320"/>
-          </a:xfrm>
-          <a:prstGeom prst="rect">
-            <a:avLst/>
-          </a:prstGeom>
-          <a:noFill/>
-        </p:spPr>
-        <p:txBody>
-          <a:bodyPr wrap="square" anchor="t" lIns="0" rIns="0" tIns="27432" bIns="27432">
-            <a:spAutoFit/>
-          </a:bodyPr>
-          <a:lstStyle/>
-          <a:p>
-            <a:pPr algn="ctr"/>
-            <a:r>
-              <a:rPr sz="1000" b="0">
-                <a:solidFill>
-                  <a:srgbClr val="4B4B4B"/>
-                </a:solidFill>
-                <a:latin typeface="Calibri"/>
-              </a:rPr>
-              <a:t>Обогрев</a:t>
-            </a:r>
-          </a:p>
-        </p:txBody>
-      </p:sp>
-      <p:sp>
-        <p:nvSpPr>
-          <p:cNvPr id="24" name="Отрезок 3"/>
-          <p:cNvSpPr/>
-          <p:nvPr/>
-        </p:nvSpPr>
-        <p:spPr>
-          <a:xfrm>
-            <a:off x="2981706" y="5440680"/>
-            <a:ext cx="1616202" cy="640080"/>
-          </a:xfrm>
-          <a:prstGeom prst="rect">
-            <a:avLst/>
-          </a:prstGeom>
-          <a:solidFill>
-            <a:srgbClr val="2B2B2B"/>
-          </a:solidFill>
-          <a:ln>
-            <a:noFill/>
-          </a:ln>
-          <a:effectLst/>
-        </p:spPr>
-        <p:style>
-          <a:lnRef idx="1">
-            <a:schemeClr val="accent1"/>
-          </a:lnRef>
-          <a:fillRef idx="3">
-            <a:schemeClr val="accent1"/>
-          </a:fillRef>
-          <a:effectRef idx="2">
-            <a:schemeClr val="accent1"/>
-          </a:effectRef>
-          <a:fontRef idx="minor">
-            <a:schemeClr val="lt1"/>
-          </a:fontRef>
-        </p:style>
-        <p:txBody>
-          <a:bodyPr rtlCol="0" anchor="ctr" wrap="square" lIns="9144" rIns="9144" tIns="27432" bIns="27432"/>
-          <a:lstStyle/>
-          <a:p>
-            <a:pPr algn="ctr"/>
-            <a:r>
-              <a:rPr sz="1600" b="1">
-                <a:solidFill>
-                  <a:srgbClr val="FFFFFF"/>
-                </a:solidFill>
-                <a:latin typeface="Calibri"/>
-              </a:rPr>
-              <a:t>45</a:t>
-            </a:r>
-          </a:p>
-        </p:txBody>
-      </p:sp>
-      <p:sp>
-        <p:nvSpPr>
-          <p:cNvPr id="25" name="Подпись отрезка 3"/>
-          <p:cNvSpPr txBox="1"/>
-          <p:nvPr/>
-        </p:nvSpPr>
-        <p:spPr>
-          <a:xfrm>
-            <a:off x="2981706" y="6108192"/>
-            <a:ext cx="1616202" cy="274320"/>
-          </a:xfrm>
-          <a:prstGeom prst="rect">
-            <a:avLst/>
-          </a:prstGeom>
-          <a:noFill/>
-        </p:spPr>
-        <p:txBody>
-          <a:bodyPr wrap="square" anchor="t" lIns="0" rIns="0" tIns="27432" bIns="27432">
-            <a:spAutoFit/>
-          </a:bodyPr>
-          <a:lstStyle/>
-          <a:p>
-            <a:pPr algn="ctr"/>
-            <a:r>
-              <a:rPr sz="1000" b="0">
-                <a:solidFill>
-                  <a:srgbClr val="4B4B4B"/>
-                </a:solidFill>
-                <a:latin typeface="Calibri"/>
-              </a:rPr>
-              <a:t>Работа</a:t>
-            </a:r>
-          </a:p>
-        </p:txBody>
-      </p:sp>
-      <p:sp>
-        <p:nvSpPr>
-          <p:cNvPr id="26" name="Отрезок 4"/>
-          <p:cNvSpPr/>
-          <p:nvPr/>
-        </p:nvSpPr>
-        <p:spPr>
-          <a:xfrm>
-            <a:off x="4634484" y="5440680"/>
-            <a:ext cx="697992" cy="640080"/>
-          </a:xfrm>
-          <a:prstGeom prst="rect">
-            <a:avLst/>
-          </a:prstGeom>
-          <a:solidFill>
-            <a:srgbClr val="FFED00"/>
-          </a:solidFill>
-          <a:ln>
-            <a:noFill/>
-          </a:ln>
-          <a:effectLst/>
-        </p:spPr>
-        <p:style>
-          <a:lnRef idx="1">
-            <a:schemeClr val="accent1"/>
-          </a:lnRef>
-          <a:fillRef idx="3">
-            <a:schemeClr val="accent1"/>
-          </a:fillRef>
-          <a:effectRef idx="2">
-            <a:schemeClr val="accent1"/>
-          </a:effectRef>
-          <a:fontRef idx="minor">
-            <a:schemeClr val="lt1"/>
-          </a:fontRef>
-        </p:style>
-        <p:txBody>
-          <a:bodyPr rtlCol="0" anchor="ctr" wrap="square" lIns="9144" rIns="9144" tIns="27432" bIns="27432"/>
-          <a:lstStyle/>
-          <a:p>
-            <a:pPr algn="ctr"/>
-            <a:r>
-              <a:rPr sz="1600" b="1">
-                <a:solidFill>
-                  <a:srgbClr val="2B2B2B"/>
-                </a:solidFill>
-                <a:latin typeface="Calibri"/>
-              </a:rPr>
-              <a:t>20</a:t>
-            </a:r>
-          </a:p>
-        </p:txBody>
-      </p:sp>
-      <p:sp>
-        <p:nvSpPr>
-          <p:cNvPr id="27" name="Подпись отрезка 4"/>
-          <p:cNvSpPr txBox="1"/>
-          <p:nvPr/>
-        </p:nvSpPr>
-        <p:spPr>
-          <a:xfrm>
-            <a:off x="4634484" y="6108192"/>
-            <a:ext cx="697992" cy="274320"/>
-          </a:xfrm>
-          <a:prstGeom prst="rect">
-            <a:avLst/>
-          </a:prstGeom>
-          <a:noFill/>
-        </p:spPr>
-        <p:txBody>
-          <a:bodyPr wrap="square" anchor="t" lIns="0" rIns="0" tIns="27432" bIns="27432">
-            <a:spAutoFit/>
-          </a:bodyPr>
-          <a:lstStyle/>
-          <a:p>
-            <a:pPr algn="ctr"/>
-            <a:r>
-              <a:rPr sz="1000" b="0">
-                <a:solidFill>
-                  <a:srgbClr val="4B4B4B"/>
-                </a:solidFill>
-                <a:latin typeface="Calibri"/>
-              </a:rPr>
-              <a:t>Обогрев</a:t>
-            </a:r>
-          </a:p>
-        </p:txBody>
-      </p:sp>
-      <p:sp>
-        <p:nvSpPr>
-          <p:cNvPr id="28" name="Отрезок 5"/>
-          <p:cNvSpPr/>
-          <p:nvPr/>
-        </p:nvSpPr>
-        <p:spPr>
-          <a:xfrm>
-            <a:off x="5369052" y="5440680"/>
-            <a:ext cx="1616202" cy="640080"/>
-          </a:xfrm>
-          <a:prstGeom prst="rect">
-            <a:avLst/>
-          </a:prstGeom>
-          <a:solidFill>
-            <a:srgbClr val="2B2B2B"/>
-          </a:solidFill>
-          <a:ln>
-            <a:noFill/>
-          </a:ln>
-          <a:effectLst/>
-        </p:spPr>
-        <p:style>
-          <a:lnRef idx="1">
-            <a:schemeClr val="accent1"/>
-          </a:lnRef>
-          <a:fillRef idx="3">
-            <a:schemeClr val="accent1"/>
-          </a:fillRef>
-          <a:effectRef idx="2">
-            <a:schemeClr val="accent1"/>
-          </a:effectRef>
-          <a:fontRef idx="minor">
-            <a:schemeClr val="lt1"/>
-          </a:fontRef>
-        </p:style>
-        <p:txBody>
-          <a:bodyPr rtlCol="0" anchor="ctr" wrap="square" lIns="9144" rIns="9144" tIns="27432" bIns="27432"/>
-          <a:lstStyle/>
-          <a:p>
-            <a:pPr algn="ctr"/>
-            <a:r>
-              <a:rPr sz="1600" b="1">
-                <a:solidFill>
-                  <a:srgbClr val="FFFFFF"/>
-                </a:solidFill>
-                <a:latin typeface="Calibri"/>
-              </a:rPr>
-              <a:t>45</a:t>
-            </a:r>
-          </a:p>
-        </p:txBody>
-      </p:sp>
-      <p:sp>
-        <p:nvSpPr>
-          <p:cNvPr id="29" name="Подпись отрезка 5"/>
-          <p:cNvSpPr txBox="1"/>
-          <p:nvPr/>
-        </p:nvSpPr>
-        <p:spPr>
-          <a:xfrm>
-            <a:off x="5369052" y="6108192"/>
-            <a:ext cx="1616202" cy="274320"/>
-          </a:xfrm>
-          <a:prstGeom prst="rect">
-            <a:avLst/>
-          </a:prstGeom>
-          <a:noFill/>
-        </p:spPr>
-        <p:txBody>
-          <a:bodyPr wrap="square" anchor="t" lIns="0" rIns="0" tIns="27432" bIns="27432">
-            <a:spAutoFit/>
-          </a:bodyPr>
-          <a:lstStyle/>
-          <a:p>
-            <a:pPr algn="ctr"/>
-            <a:r>
-              <a:rPr sz="1000" b="0">
-                <a:solidFill>
-                  <a:srgbClr val="4B4B4B"/>
-                </a:solidFill>
-                <a:latin typeface="Calibri"/>
-              </a:rPr>
-              <a:t>Работа</a:t>
-            </a:r>
-          </a:p>
-        </p:txBody>
-      </p:sp>
-      <p:sp>
-        <p:nvSpPr>
-          <p:cNvPr id="30" name="Отрезок 6"/>
-          <p:cNvSpPr/>
-          <p:nvPr/>
-        </p:nvSpPr>
-        <p:spPr>
-          <a:xfrm>
-            <a:off x="7021830" y="5440680"/>
-            <a:ext cx="2167128" cy="640080"/>
-          </a:xfrm>
-          <a:prstGeom prst="rect">
-            <a:avLst/>
-          </a:prstGeom>
-          <a:solidFill>
-            <a:srgbClr val="FFED00"/>
-          </a:solidFill>
-          <a:ln>
-            <a:noFill/>
-          </a:ln>
-          <a:effectLst/>
-        </p:spPr>
-        <p:style>
-          <a:lnRef idx="1">
-            <a:schemeClr val="accent1"/>
-          </a:lnRef>
-          <a:fillRef idx="3">
-            <a:schemeClr val="accent1"/>
-          </a:fillRef>
-          <a:effectRef idx="2">
-            <a:schemeClr val="accent1"/>
-          </a:effectRef>
-          <a:fontRef idx="minor">
-            <a:schemeClr val="lt1"/>
-          </a:fontRef>
-        </p:style>
-        <p:txBody>
-          <a:bodyPr rtlCol="0" anchor="ctr" wrap="square" lIns="9144" rIns="9144" tIns="27432" bIns="27432"/>
-          <a:lstStyle/>
-          <a:p>
-            <a:pPr algn="ctr"/>
-            <a:r>
-              <a:rPr sz="1600" b="1">
-                <a:solidFill>
-                  <a:srgbClr val="2B2B2B"/>
-                </a:solidFill>
-                <a:latin typeface="Calibri"/>
-              </a:rPr>
-              <a:t>60</a:t>
-            </a:r>
-          </a:p>
-        </p:txBody>
-      </p:sp>
-      <p:sp>
-        <p:nvSpPr>
-          <p:cNvPr id="31" name="Подпись отрезка 6"/>
-          <p:cNvSpPr txBox="1"/>
-          <p:nvPr/>
-        </p:nvSpPr>
-        <p:spPr>
-          <a:xfrm>
-            <a:off x="7021830" y="6108192"/>
-            <a:ext cx="2167128" cy="274320"/>
-          </a:xfrm>
-          <a:prstGeom prst="rect">
-            <a:avLst/>
-          </a:prstGeom>
-          <a:noFill/>
-        </p:spPr>
-        <p:txBody>
-          <a:bodyPr wrap="square" anchor="t" lIns="0" rIns="0" tIns="27432" bIns="27432">
-            <a:spAutoFit/>
-          </a:bodyPr>
-          <a:lstStyle/>
-          <a:p>
-            <a:pPr algn="ctr"/>
-            <a:r>
-              <a:rPr sz="1000" b="0">
-                <a:solidFill>
-                  <a:srgbClr val="4B4B4B"/>
-                </a:solidFill>
-                <a:latin typeface="Calibri"/>
-              </a:rPr>
-              <a:t>Обед и тепло</a:t>
-            </a:r>
-          </a:p>
-        </p:txBody>
-      </p:sp>
-      <p:sp>
-        <p:nvSpPr>
-          <p:cNvPr id="32" name="Отрезок 7"/>
-          <p:cNvSpPr/>
-          <p:nvPr/>
-        </p:nvSpPr>
-        <p:spPr>
-          <a:xfrm>
-            <a:off x="9225534" y="5440680"/>
-            <a:ext cx="1616202" cy="640080"/>
-          </a:xfrm>
-          <a:prstGeom prst="rect">
-            <a:avLst/>
-          </a:prstGeom>
-          <a:solidFill>
-            <a:srgbClr val="2B2B2B"/>
-          </a:solidFill>
-          <a:ln>
-            <a:noFill/>
-          </a:ln>
-          <a:effectLst/>
-        </p:spPr>
-        <p:style>
-          <a:lnRef idx="1">
-            <a:schemeClr val="accent1"/>
-          </a:lnRef>
-          <a:fillRef idx="3">
-            <a:schemeClr val="accent1"/>
-          </a:fillRef>
-          <a:effectRef idx="2">
-            <a:schemeClr val="accent1"/>
-          </a:effectRef>
-          <a:fontRef idx="minor">
-            <a:schemeClr val="lt1"/>
-          </a:fontRef>
-        </p:style>
-        <p:txBody>
-          <a:bodyPr rtlCol="0" anchor="ctr" wrap="square" lIns="9144" rIns="9144" tIns="27432" bIns="27432"/>
-          <a:lstStyle/>
-          <a:p>
-            <a:pPr algn="ctr"/>
-            <a:r>
-              <a:rPr sz="1600" b="1">
-                <a:solidFill>
-                  <a:srgbClr val="FFFFFF"/>
-                </a:solidFill>
-                <a:latin typeface="Calibri"/>
-              </a:rPr>
-              <a:t>45</a:t>
-            </a:r>
-          </a:p>
-        </p:txBody>
-      </p:sp>
-      <p:sp>
-        <p:nvSpPr>
-          <p:cNvPr id="33" name="Подпись отрезка 7"/>
-          <p:cNvSpPr txBox="1"/>
-          <p:nvPr/>
-        </p:nvSpPr>
-        <p:spPr>
-          <a:xfrm>
-            <a:off x="9225534" y="6108192"/>
-            <a:ext cx="1616202" cy="274320"/>
-          </a:xfrm>
-          <a:prstGeom prst="rect">
-            <a:avLst/>
-          </a:prstGeom>
-          <a:noFill/>
-        </p:spPr>
-        <p:txBody>
-          <a:bodyPr wrap="square" anchor="t" lIns="0" rIns="0" tIns="27432" bIns="27432">
-            <a:spAutoFit/>
-          </a:bodyPr>
-          <a:lstStyle/>
-          <a:p>
-            <a:pPr algn="ctr"/>
-            <a:r>
-              <a:rPr sz="1000" b="0">
-                <a:solidFill>
-                  <a:srgbClr val="4B4B4B"/>
-                </a:solidFill>
-                <a:latin typeface="Calibri"/>
-              </a:rPr>
-              <a:t>Работа</a:t>
-            </a:r>
-          </a:p>
-        </p:txBody>
-      </p:sp>
-      <p:sp>
-        <p:nvSpPr>
-          <p:cNvPr id="34" name="Отрезок 8"/>
-          <p:cNvSpPr/>
-          <p:nvPr/>
-        </p:nvSpPr>
-        <p:spPr>
-          <a:xfrm>
-            <a:off x="10878312" y="5440680"/>
-            <a:ext cx="697992" cy="640080"/>
-          </a:xfrm>
-          <a:prstGeom prst="rect">
-            <a:avLst/>
-          </a:prstGeom>
-          <a:solidFill>
-            <a:srgbClr val="FFED00"/>
-          </a:solidFill>
-          <a:ln>
-            <a:noFill/>
-          </a:ln>
-          <a:effectLst/>
-        </p:spPr>
-        <p:style>
-          <a:lnRef idx="1">
-            <a:schemeClr val="accent1"/>
-          </a:lnRef>
-          <a:fillRef idx="3">
-            <a:schemeClr val="accent1"/>
-          </a:fillRef>
-          <a:effectRef idx="2">
-            <a:schemeClr val="accent1"/>
-          </a:effectRef>
-          <a:fontRef idx="minor">
-            <a:schemeClr val="lt1"/>
-          </a:fontRef>
-        </p:style>
-        <p:txBody>
-          <a:bodyPr rtlCol="0" anchor="ctr" wrap="square" lIns="9144" rIns="9144" tIns="27432" bIns="27432"/>
-          <a:lstStyle/>
-          <a:p>
-            <a:pPr algn="ctr"/>
-            <a:r>
-              <a:rPr sz="1600" b="1">
-                <a:solidFill>
-                  <a:srgbClr val="2B2B2B"/>
-                </a:solidFill>
-                <a:latin typeface="Calibri"/>
-              </a:rPr>
-              <a:t>20</a:t>
-            </a:r>
-          </a:p>
-        </p:txBody>
-      </p:sp>
-      <p:sp>
-        <p:nvSpPr>
-          <p:cNvPr id="35" name="Подпись отрезка 8"/>
-          <p:cNvSpPr txBox="1"/>
-          <p:nvPr/>
-        </p:nvSpPr>
-        <p:spPr>
-          <a:xfrm>
-            <a:off x="10878312" y="6108192"/>
-            <a:ext cx="697992" cy="274320"/>
-          </a:xfrm>
-          <a:prstGeom prst="rect">
-            <a:avLst/>
-          </a:prstGeom>
-          <a:noFill/>
-        </p:spPr>
-        <p:txBody>
-          <a:bodyPr wrap="square" anchor="t" lIns="0" rIns="0" tIns="27432" bIns="27432">
-            <a:spAutoFit/>
-          </a:bodyPr>
-          <a:lstStyle/>
-          <a:p>
-            <a:pPr algn="ctr"/>
-            <a:r>
-              <a:rPr sz="1000" b="0">
-                <a:solidFill>
-                  <a:srgbClr val="4B4B4B"/>
-                </a:solidFill>
-                <a:latin typeface="Calibri"/>
-              </a:rPr>
-              <a:t>Обогрев</a:t>
-            </a:r>
-          </a:p>
-        </p:txBody>
-      </p:sp>
-      <p:sp>
-        <p:nvSpPr>
-          <p:cNvPr id="36" name="Примечание"/>
-          <p:cNvSpPr txBox="1"/>
-          <p:nvPr/>
-        </p:nvSpPr>
-        <p:spPr>
-          <a:xfrm>
-            <a:off x="6400800" y="5029200"/>
-            <a:ext cx="5212080" cy="320040"/>
-          </a:xfrm>
-          <a:prstGeom prst="rect">
-            <a:avLst/>
-          </a:prstGeom>
-          <a:noFill/>
-        </p:spPr>
-        <p:txBody>
-          <a:bodyPr wrap="square" anchor="t" lIns="45720" rIns="45720" tIns="27432" bIns="27432">
-            <a:spAutoFit/>
-          </a:bodyPr>
-          <a:lstStyle/>
-          <a:p>
-            <a:pPr algn="r"/>
             <a:r>
               <a:rPr sz="1100" b="0">
                 <a:solidFill>

--- a/out/Безопасность_на_Крайнем_Севере.pptx
+++ b/out/Безопасность_на_Крайнем_Севере.pptx
@@ -857,7 +857,7 @@
           <a:lstStyle/>
           <a:p>
             <a:r>
-              <a:t>Север — это не просто «очень холодно». Это сочетание факторов, которые усиливают друг друга. В Оймяконе зафиксирован минимум −67,7 °C. В Норильске полярная ночь длится около 45 суток. Ветер в 10 метров в секунду превращает −20 °C в ощущаемые примерно −33 °C. А помощь может быть в часах или сутках пути, поэтому при выезде нужен аварийный запас минимум на трое суток. Дальше по плану: карта зон, холод, полярная ночь, изоляция, одежда и график работ.</a:t>
+              <a:t>Север — это не просто «очень холодно». Это сочетание факторов, которые усиливают друг друга. В Оймяконе зафиксирован минимум −67,7 °C. В Норильске полярная ночь длится около 45 суток. Ветер в 10 метров в секунду превращает −20 °C в ощущаемые примерно −34 °C. А помощь может быть в часах или сутках пути, поэтому при выезде нужен аварийный запас минимум на трое суток. Дальше по плану: карта зон, холод, полярная ночь, изоляция, одежда и график работ.</a:t>
             </a:r>
           </a:p>
         </p:txBody>
@@ -6809,11 +6809,11 @@
           <a:p>
             <a:pPr algn="l">
               <a:spcAft>
-                <a:spcPts val="1200"/>
+                <a:spcPts val="1400"/>
               </a:spcAft>
             </a:pPr>
             <a:r>
-              <a:rPr sz="1400" b="1">
+              <a:rPr sz="1600" b="1">
                 <a:solidFill>
                   <a:srgbClr val="2B2B2B"/>
                 </a:solidFill>
@@ -6822,7 +6822,7 @@
               <a:t>Арктика: </a:t>
             </a:r>
             <a:r>
-              <a:rPr sz="1400" b="0">
+              <a:rPr sz="1600" b="0">
                 <a:solidFill>
                   <a:srgbClr val="4B4B4B"/>
                 </a:solidFill>
@@ -6831,6 +6831,104 @@
               <a:t>−40…−55 °C, ночь 80–120 сут</a:t>
             </a:r>
           </a:p>
+          <a:p>
+            <a:pPr algn="l">
+              <a:spcAft>
+                <a:spcPts val="1400"/>
+              </a:spcAft>
+            </a:pPr>
+            <a:r>
+              <a:rPr sz="1600" b="1">
+                <a:solidFill>
+                  <a:srgbClr val="2B2B2B"/>
+                </a:solidFill>
+                <a:latin typeface="Calibri"/>
+              </a:rPr>
+              <a:t>За Полярным кругом: </a:t>
+            </a:r>
+            <a:r>
+              <a:rPr sz="1600" b="0">
+                <a:solidFill>
+                  <a:srgbClr val="4B4B4B"/>
+                </a:solidFill>
+                <a:latin typeface="Calibri"/>
+              </a:rPr>
+              <a:t>−30…−45 °C, ночь до 45 сут</a:t>
+            </a:r>
+          </a:p>
+          <a:p>
+            <a:pPr algn="l">
+              <a:spcAft>
+                <a:spcPts val="1400"/>
+              </a:spcAft>
+            </a:pPr>
+            <a:r>
+              <a:rPr sz="1600" b="1">
+                <a:solidFill>
+                  <a:srgbClr val="2B2B2B"/>
+                </a:solidFill>
+                <a:latin typeface="Calibri"/>
+              </a:rPr>
+              <a:t>Крайний Север: </a:t>
+            </a:r>
+            <a:r>
+              <a:rPr sz="1600" b="0">
+                <a:solidFill>
+                  <a:srgbClr val="4B4B4B"/>
+                </a:solidFill>
+                <a:latin typeface="Calibri"/>
+              </a:rPr>
+              <a:t>до −50…−67 °C</a:t>
+            </a:r>
+          </a:p>
+          <a:p>
+            <a:pPr algn="l">
+              <a:spcAft>
+                <a:spcPts val="1400"/>
+              </a:spcAft>
+            </a:pPr>
+            <a:r>
+              <a:rPr sz="1600" b="1">
+                <a:solidFill>
+                  <a:srgbClr val="2B2B2B"/>
+                </a:solidFill>
+                <a:latin typeface="Calibri"/>
+              </a:rPr>
+              <a:t>Приравненные: </a:t>
+            </a:r>
+            <a:r>
+              <a:rPr sz="1600" b="0">
+                <a:solidFill>
+                  <a:srgbClr val="4B4B4B"/>
+                </a:solidFill>
+                <a:latin typeface="Calibri"/>
+              </a:rPr>
+              <a:t>−25…−40 °C, долгая зима</a:t>
+            </a:r>
+          </a:p>
+        </p:txBody>
+      </p:sp>
+      <p:sp>
+        <p:nvSpPr>
+          <p:cNvPr id="17" name="Слои на плакате"/>
+          <p:cNvSpPr txBox="1"/>
+          <p:nvPr/>
+        </p:nvSpPr>
+        <p:spPr>
+          <a:xfrm>
+            <a:off x="4503420" y="2286000"/>
+            <a:ext cx="3200400" cy="3108960"/>
+          </a:xfrm>
+          <a:prstGeom prst="rect">
+            <a:avLst/>
+          </a:prstGeom>
+          <a:noFill/>
+        </p:spPr>
+        <p:txBody>
+          <a:bodyPr wrap="square" anchor="t" lIns="18288" rIns="18288" tIns="27432" bIns="27432">
+            <a:spAutoFit/>
+          </a:bodyPr>
+          <a:lstStyle/>
           <a:p>
             <a:pPr algn="l">
               <a:spcAft>
@@ -6838,22 +6936,22 @@
               </a:spcAft>
             </a:pPr>
             <a:r>
-              <a:rPr sz="1400" b="1">
+              <a:rPr sz="1600" b="1">
                 <a:solidFill>
                   <a:srgbClr val="2B2B2B"/>
                 </a:solidFill>
                 <a:latin typeface="Calibri"/>
               </a:rPr>
-              <a:t>За Полярным кругом: </a:t>
-            </a:r>
-            <a:r>
-              <a:rPr sz="1400" b="0">
+              <a:t>1 · база: </a:t>
+            </a:r>
+            <a:r>
+              <a:rPr sz="1600" b="0">
                 <a:solidFill>
                   <a:srgbClr val="4B4B4B"/>
                 </a:solidFill>
                 <a:latin typeface="Calibri"/>
               </a:rPr>
-              <a:t>−30…−45 °C, ночь до 45 сут</a:t>
+              <a:t>синтетика или шерсть</a:t>
             </a:r>
           </a:p>
           <a:p>
@@ -6863,22 +6961,22 @@
               </a:spcAft>
             </a:pPr>
             <a:r>
-              <a:rPr sz="1400" b="1">
+              <a:rPr sz="1600" b="1">
                 <a:solidFill>
                   <a:srgbClr val="2B2B2B"/>
                 </a:solidFill>
                 <a:latin typeface="Calibri"/>
               </a:rPr>
-              <a:t>Крайний Север: </a:t>
-            </a:r>
-            <a:r>
-              <a:rPr sz="1400" b="0">
+              <a:t>2 · тепло: </a:t>
+            </a:r>
+            <a:r>
+              <a:rPr sz="1600" b="0">
                 <a:solidFill>
                   <a:srgbClr val="4B4B4B"/>
                 </a:solidFill>
                 <a:latin typeface="Calibri"/>
               </a:rPr>
-              <a:t>до −50…−67 °C</a:t>
+              <a:t>флис, пух, шерсть</a:t>
             </a:r>
           </a:p>
           <a:p>
@@ -6888,164 +6986,66 @@
               </a:spcAft>
             </a:pPr>
             <a:r>
-              <a:rPr sz="1400" b="1">
+              <a:rPr sz="1600" b="1">
                 <a:solidFill>
                   <a:srgbClr val="2B2B2B"/>
                 </a:solidFill>
                 <a:latin typeface="Calibri"/>
               </a:rPr>
-              <a:t>Приравненные: </a:t>
-            </a:r>
-            <a:r>
-              <a:rPr sz="1400" b="0">
+              <a:t>3 · защита: </a:t>
+            </a:r>
+            <a:r>
+              <a:rPr sz="1600" b="0">
                 <a:solidFill>
                   <a:srgbClr val="4B4B4B"/>
                 </a:solidFill>
                 <a:latin typeface="Calibri"/>
               </a:rPr>
-              <a:t>−25…−40 °C, долгая зима</a:t>
-            </a:r>
-          </a:p>
-        </p:txBody>
-      </p:sp>
-      <p:sp>
-        <p:nvSpPr>
-          <p:cNvPr id="17" name="Слои на плакате"/>
-          <p:cNvSpPr txBox="1"/>
-          <p:nvPr/>
-        </p:nvSpPr>
-        <p:spPr>
-          <a:xfrm>
-            <a:off x="4503420" y="2286000"/>
-            <a:ext cx="3200400" cy="3108960"/>
-          </a:xfrm>
-          <a:prstGeom prst="rect">
-            <a:avLst/>
-          </a:prstGeom>
-          <a:noFill/>
-        </p:spPr>
-        <p:txBody>
-          <a:bodyPr wrap="square" anchor="t" lIns="18288" rIns="18288" tIns="27432" bIns="27432">
-            <a:spAutoFit/>
-          </a:bodyPr>
-          <a:lstStyle/>
+              <a:t>ветро- и влагозащита</a:t>
+            </a:r>
+          </a:p>
           <a:p>
             <a:pPr algn="l">
               <a:spcAft>
-                <a:spcPts val="1000"/>
+                <a:spcPts val="1200"/>
               </a:spcAft>
             </a:pPr>
             <a:r>
-              <a:rPr sz="1400" b="1">
+              <a:rPr sz="1600" b="1">
                 <a:solidFill>
                   <a:srgbClr val="2B2B2B"/>
                 </a:solidFill>
                 <a:latin typeface="Calibri"/>
               </a:rPr>
-              <a:t>1 · база: </a:t>
-            </a:r>
-            <a:r>
-              <a:rPr sz="1400" b="0">
+              <a:t>Руки и ноги: </a:t>
+            </a:r>
+            <a:r>
+              <a:rPr sz="1600" b="0">
                 <a:solidFill>
                   <a:srgbClr val="4B4B4B"/>
                 </a:solidFill>
                 <a:latin typeface="Calibri"/>
               </a:rPr>
-              <a:t>синтетика или шерсть</a:t>
+              <a:t>рукавицы, обувь на размер больше</a:t>
             </a:r>
           </a:p>
           <a:p>
             <a:pPr algn="l">
               <a:spcAft>
-                <a:spcPts val="1000"/>
+                <a:spcPts val="1200"/>
               </a:spcAft>
             </a:pPr>
             <a:r>
-              <a:rPr sz="1400" b="1">
+              <a:rPr sz="1600" b="1">
                 <a:solidFill>
                   <a:srgbClr val="2B2B2B"/>
                 </a:solidFill>
                 <a:latin typeface="Calibri"/>
               </a:rPr>
-              <a:t>2 · тепло: </a:t>
-            </a:r>
-            <a:r>
-              <a:rPr sz="1400" b="0">
-                <a:solidFill>
-                  <a:srgbClr val="4B4B4B"/>
-                </a:solidFill>
-                <a:latin typeface="Calibri"/>
-              </a:rPr>
-              <a:t>флис, пух, шерсть</a:t>
-            </a:r>
-          </a:p>
-          <a:p>
-            <a:pPr algn="l">
-              <a:spcAft>
-                <a:spcPts val="1000"/>
-              </a:spcAft>
-            </a:pPr>
-            <a:r>
-              <a:rPr sz="1400" b="1">
-                <a:solidFill>
-                  <a:srgbClr val="2B2B2B"/>
-                </a:solidFill>
-                <a:latin typeface="Calibri"/>
-              </a:rPr>
-              <a:t>3 · защита: </a:t>
-            </a:r>
-            <a:r>
-              <a:rPr sz="1400" b="0">
-                <a:solidFill>
-                  <a:srgbClr val="4B4B4B"/>
-                </a:solidFill>
-                <a:latin typeface="Calibri"/>
-              </a:rPr>
-              <a:t>ветро- и влагозащита</a:t>
-            </a:r>
-          </a:p>
-          <a:p>
-            <a:pPr algn="l">
-              <a:spcAft>
-                <a:spcPts val="1000"/>
-              </a:spcAft>
-            </a:pPr>
-            <a:r>
-              <a:rPr sz="1400" b="1">
-                <a:solidFill>
-                  <a:srgbClr val="2B2B2B"/>
-                </a:solidFill>
-                <a:latin typeface="Calibri"/>
-              </a:rPr>
-              <a:t>Руки и ноги: </a:t>
-            </a:r>
-            <a:r>
-              <a:rPr sz="1400" b="0">
-                <a:solidFill>
-                  <a:srgbClr val="4B4B4B"/>
-                </a:solidFill>
-                <a:latin typeface="Calibri"/>
-              </a:rPr>
-              <a:t>рукавицы, обувь на размер больше</a:t>
-            </a:r>
-          </a:p>
-          <a:p>
-            <a:pPr algn="l">
-              <a:spcAft>
-                <a:spcPts val="1000"/>
-              </a:spcAft>
-            </a:pPr>
-            <a:r>
-              <a:rPr sz="1400" b="1">
-                <a:solidFill>
-                  <a:srgbClr val="2B2B2B"/>
-                </a:solidFill>
-                <a:latin typeface="Calibri"/>
-              </a:rPr>
               <a:t>Правило: </a:t>
             </a:r>
             <a:r>
-              <a:rPr sz="1400" b="0">
+              <a:rPr sz="1600" b="0">
                 <a:solidFill>
                   <a:srgbClr val="4B4B4B"/>
                 </a:solidFill>
@@ -9796,7 +9796,7 @@
           <a:p>
             <a:pPr algn="l"/>
             <a:r>
-              <a:rPr sz="1400" b="0">
+              <a:rPr sz="1500" b="0">
                 <a:solidFill>
                   <a:srgbClr val="4B4B4B"/>
                 </a:solidFill>
@@ -9956,13 +9956,13 @@
           <a:p>
             <a:pPr algn="l"/>
             <a:r>
-              <a:rPr sz="1400" b="0">
+              <a:rPr sz="1500" b="0">
                 <a:solidFill>
                   <a:srgbClr val="4B4B4B"/>
                 </a:solidFill>
                 <a:latin typeface="Calibri"/>
               </a:rPr>
-              <a:t>непрерывной полярной ночи в Норильске (около 3 дек — 13 янв)</a:t>
+              <a:t>непрерывной полярной ночи в Норильске (с конца ноября до середины января)</a:t>
             </a:r>
           </a:p>
         </p:txBody>
@@ -10043,7 +10043,7 @@
                 </a:solidFill>
                 <a:latin typeface="Calibri"/>
               </a:rPr>
-              <a:t>≈ −33 °C</a:t>
+              <a:t>≈ −34 °C</a:t>
             </a:r>
           </a:p>
         </p:txBody>
@@ -10116,7 +10116,7 @@
           <a:p>
             <a:pPr algn="l"/>
             <a:r>
-              <a:rPr sz="1400" b="0">
+              <a:rPr sz="1500" b="0">
                 <a:solidFill>
                   <a:srgbClr val="4B4B4B"/>
                 </a:solidFill>
@@ -10276,7 +10276,7 @@
           <a:p>
             <a:pPr algn="l"/>
             <a:r>
-              <a:rPr sz="1400" b="0">
+              <a:rPr sz="1500" b="0">
                 <a:solidFill>
                   <a:srgbClr val="4B4B4B"/>
                 </a:solidFill>
@@ -12478,7 +12478,7 @@
                           </a:solidFill>
                           <a:latin typeface="Calibri"/>
                         </a:rPr>
-                        <a:t>-10 °C</a:t>
+                        <a:t>−10 °C</a:t>
                       </a:r>
                     </a:p>
                   </a:txBody>
@@ -12501,7 +12501,7 @@
                           </a:solidFill>
                           <a:latin typeface="Calibri"/>
                         </a:rPr>
-                        <a:t>-17</a:t>
+                        <a:t>−17</a:t>
                       </a:r>
                     </a:p>
                   </a:txBody>
@@ -12524,7 +12524,7 @@
                           </a:solidFill>
                           <a:latin typeface="Calibri"/>
                         </a:rPr>
-                        <a:t>-20</a:t>
+                        <a:t>−20</a:t>
                       </a:r>
                     </a:p>
                   </a:txBody>
@@ -12547,7 +12547,7 @@
                           </a:solidFill>
                           <a:latin typeface="Calibri"/>
                         </a:rPr>
-                        <a:t>-22</a:t>
+                        <a:t>−22</a:t>
                       </a:r>
                     </a:p>
                   </a:txBody>
@@ -12572,7 +12572,7 @@
                           </a:solidFill>
                           <a:latin typeface="Calibri"/>
                         </a:rPr>
-                        <a:t>-20 °C</a:t>
+                        <a:t>−20 °C</a:t>
                       </a:r>
                     </a:p>
                   </a:txBody>
@@ -12595,7 +12595,7 @@
                           </a:solidFill>
                           <a:latin typeface="Calibri"/>
                         </a:rPr>
-                        <a:t>-30</a:t>
+                        <a:t>−30</a:t>
                       </a:r>
                     </a:p>
                   </a:txBody>
@@ -12618,7 +12618,7 @@
                           </a:solidFill>
                           <a:latin typeface="Calibri"/>
                         </a:rPr>
-                        <a:t>-34</a:t>
+                        <a:t>−34</a:t>
                       </a:r>
                     </a:p>
                   </a:txBody>
@@ -12641,7 +12641,7 @@
                           </a:solidFill>
                           <a:latin typeface="Calibri"/>
                         </a:rPr>
-                        <a:t>-36</a:t>
+                        <a:t>−36</a:t>
                       </a:r>
                     </a:p>
                   </a:txBody>
@@ -12666,7 +12666,7 @@
                           </a:solidFill>
                           <a:latin typeface="Calibri"/>
                         </a:rPr>
-                        <a:t>-30 °C</a:t>
+                        <a:t>−30 °C</a:t>
                       </a:r>
                     </a:p>
                   </a:txBody>
@@ -12689,7 +12689,7 @@
                           </a:solidFill>
                           <a:latin typeface="Calibri"/>
                         </a:rPr>
-                        <a:t>-42</a:t>
+                        <a:t>−42</a:t>
                       </a:r>
                     </a:p>
                   </a:txBody>
@@ -12712,7 +12712,7 @@
                           </a:solidFill>
                           <a:latin typeface="Calibri"/>
                         </a:rPr>
-                        <a:t>-47</a:t>
+                        <a:t>−47</a:t>
                       </a:r>
                     </a:p>
                   </a:txBody>
@@ -12735,7 +12735,7 @@
                           </a:solidFill>
                           <a:latin typeface="Calibri"/>
                         </a:rPr>
-                        <a:t>-50</a:t>
+                        <a:t>−50</a:t>
                       </a:r>
                     </a:p>
                   </a:txBody>
@@ -12760,7 +12760,7 @@
                           </a:solidFill>
                           <a:latin typeface="Calibri"/>
                         </a:rPr>
-                        <a:t>-40 °C</a:t>
+                        <a:t>−40 °C</a:t>
                       </a:r>
                     </a:p>
                   </a:txBody>
@@ -12783,7 +12783,7 @@
                           </a:solidFill>
                           <a:latin typeface="Calibri"/>
                         </a:rPr>
-                        <a:t>-55</a:t>
+                        <a:t>−55</a:t>
                       </a:r>
                     </a:p>
                   </a:txBody>
@@ -12806,7 +12806,7 @@
                           </a:solidFill>
                           <a:latin typeface="Calibri"/>
                         </a:rPr>
-                        <a:t>-60</a:t>
+                        <a:t>−60</a:t>
                       </a:r>
                     </a:p>
                   </a:txBody>
@@ -12829,7 +12829,7 @@
                           </a:solidFill>
                           <a:latin typeface="Calibri"/>
                         </a:rPr>
-                        <a:t>-63</a:t>
+                        <a:t>−63</a:t>
                       </a:r>
                     </a:p>
                   </a:txBody>
@@ -16051,7 +16051,7 @@
                     <a:p>
                       <a:pPr algn="l"/>
                       <a:r>
-                        <a:rPr sz="1400" b="1">
+                        <a:rPr sz="1500" b="1">
                           <a:solidFill>
                             <a:srgbClr val="2B2B2B"/>
                           </a:solidFill>
@@ -16074,7 +16074,7 @@
                     <a:p>
                       <a:pPr algn="l"/>
                       <a:r>
-                        <a:rPr sz="1300" b="0">
+                        <a:rPr sz="1500" b="0">
                           <a:solidFill>
                             <a:srgbClr val="2B2B2B"/>
                           </a:solidFill>
@@ -16097,7 +16097,7 @@
                     <a:p>
                       <a:pPr algn="l"/>
                       <a:r>
-                        <a:rPr sz="1300" b="0">
+                        <a:rPr sz="1500" b="0">
                           <a:solidFill>
                             <a:srgbClr val="2B2B2B"/>
                           </a:solidFill>
@@ -16122,7 +16122,7 @@
                     <a:p>
                       <a:pPr algn="l"/>
                       <a:r>
-                        <a:rPr sz="1400" b="1">
+                        <a:rPr sz="1500" b="1">
                           <a:solidFill>
                             <a:srgbClr val="2B2B2B"/>
                           </a:solidFill>
@@ -16145,7 +16145,7 @@
                     <a:p>
                       <a:pPr algn="l"/>
                       <a:r>
-                        <a:rPr sz="1300" b="0">
+                        <a:rPr sz="1500" b="0">
                           <a:solidFill>
                             <a:srgbClr val="2B2B2B"/>
                           </a:solidFill>
@@ -16168,7 +16168,7 @@
                     <a:p>
                       <a:pPr algn="l"/>
                       <a:r>
-                        <a:rPr sz="1300" b="0">
+                        <a:rPr sz="1500" b="0">
                           <a:solidFill>
                             <a:srgbClr val="2B2B2B"/>
                           </a:solidFill>
@@ -16193,7 +16193,7 @@
                     <a:p>
                       <a:pPr algn="l"/>
                       <a:r>
-                        <a:rPr sz="1400" b="1">
+                        <a:rPr sz="1500" b="1">
                           <a:solidFill>
                             <a:srgbClr val="2B2B2B"/>
                           </a:solidFill>
@@ -16216,7 +16216,7 @@
                     <a:p>
                       <a:pPr algn="l"/>
                       <a:r>
-                        <a:rPr sz="1300" b="0">
+                        <a:rPr sz="1500" b="0">
                           <a:solidFill>
                             <a:srgbClr val="2B2B2B"/>
                           </a:solidFill>
@@ -16239,7 +16239,7 @@
                     <a:p>
                       <a:pPr algn="l"/>
                       <a:r>
-                        <a:rPr sz="1300" b="0">
+                        <a:rPr sz="1500" b="0">
                           <a:solidFill>
                             <a:srgbClr val="2B2B2B"/>
                           </a:solidFill>
@@ -16264,7 +16264,7 @@
                     <a:p>
                       <a:pPr algn="l"/>
                       <a:r>
-                        <a:rPr sz="1400" b="1">
+                        <a:rPr sz="1500" b="1">
                           <a:solidFill>
                             <a:srgbClr val="2B2B2B"/>
                           </a:solidFill>
@@ -16287,7 +16287,7 @@
                     <a:p>
                       <a:pPr algn="l"/>
                       <a:r>
-                        <a:rPr sz="1300" b="0">
+                        <a:rPr sz="1500" b="0">
                           <a:solidFill>
                             <a:srgbClr val="2B2B2B"/>
                           </a:solidFill>
@@ -16310,7 +16310,7 @@
                     <a:p>
                       <a:pPr algn="l"/>
                       <a:r>
-                        <a:rPr sz="1300" b="0">
+                        <a:rPr sz="1500" b="0">
                           <a:solidFill>
                             <a:srgbClr val="2B2B2B"/>
                           </a:solidFill>
@@ -16335,7 +16335,7 @@
                     <a:p>
                       <a:pPr algn="l"/>
                       <a:r>
-                        <a:rPr sz="1400" b="1">
+                        <a:rPr sz="1500" b="1">
                           <a:solidFill>
                             <a:srgbClr val="2B2B2B"/>
                           </a:solidFill>
@@ -16358,7 +16358,7 @@
                     <a:p>
                       <a:pPr algn="l"/>
                       <a:r>
-                        <a:rPr sz="1300" b="0">
+                        <a:rPr sz="1500" b="0">
                           <a:solidFill>
                             <a:srgbClr val="2B2B2B"/>
                           </a:solidFill>
@@ -16381,7 +16381,7 @@
                     <a:p>
                       <a:pPr algn="l"/>
                       <a:r>
-                        <a:rPr sz="1300" b="0">
+                        <a:rPr sz="1500" b="0">
                           <a:solidFill>
                             <a:srgbClr val="2B2B2B"/>
                           </a:solidFill>
